--- a/day2-deck/decks/Hours per RO Value - Review.pptx
+++ b/day2-deck/decks/Hours per RO Value - Review.pptx
@@ -1015,7 +1015,7 @@
         <p:spPr>
           <a:xfrm>
             <a:off x="457200" y="1207008"/>
-            <a:ext cx="11274552" cy="4645152"/>
+            <a:ext cx="11274552" cy="4782312"/>
           </a:xfrm>
           <a:prstGeom prst="rect">
             <a:avLst/>
@@ -1269,7 +1269,7 @@
         <p:spPr>
           <a:xfrm>
             <a:off x="658368" y="1700784"/>
-            <a:ext cx="1938528" cy="236668"/>
+            <a:ext cx="1938528" cy="248502"/>
           </a:xfrm>
           <a:prstGeom prst="rect">
             <a:avLst/>
@@ -1307,8 +1307,8 @@
         </p:nvSpPr>
         <p:spPr>
           <a:xfrm>
-            <a:off x="2670048" y="1754034"/>
-            <a:ext cx="384048" cy="130168"/>
+            <a:off x="2670048" y="1756697"/>
+            <a:ext cx="384048" cy="136676"/>
           </a:xfrm>
           <a:prstGeom prst="rect">
             <a:avLst/>
@@ -1328,7 +1328,7 @@
         <p:spPr>
           <a:xfrm>
             <a:off x="3108960" y="1700784"/>
-            <a:ext cx="1024128" cy="236668"/>
+            <a:ext cx="1024128" cy="248502"/>
           </a:xfrm>
           <a:prstGeom prst="rect">
             <a:avLst/>
@@ -1367,7 +1367,7 @@
         <p:spPr>
           <a:xfrm>
             <a:off x="4133088" y="1700784"/>
-            <a:ext cx="896112" cy="236668"/>
+            <a:ext cx="896112" cy="248502"/>
           </a:xfrm>
           <a:prstGeom prst="rect">
             <a:avLst/>
@@ -1406,7 +1406,7 @@
         <p:spPr>
           <a:xfrm>
             <a:off x="5029200" y="1700784"/>
-            <a:ext cx="841248" cy="236668"/>
+            <a:ext cx="841248" cy="248502"/>
           </a:xfrm>
           <a:prstGeom prst="rect">
             <a:avLst/>
@@ -1444,8 +1444,8 @@
         </p:nvSpPr>
         <p:spPr>
           <a:xfrm>
-            <a:off x="658368" y="1937452"/>
-            <a:ext cx="1938528" cy="236668"/>
+            <a:off x="658368" y="1949286"/>
+            <a:ext cx="1938528" cy="248502"/>
           </a:xfrm>
           <a:prstGeom prst="rect">
             <a:avLst/>
@@ -1483,8 +1483,8 @@
         </p:nvSpPr>
         <p:spPr>
           <a:xfrm>
-            <a:off x="2670048" y="1990703"/>
-            <a:ext cx="169491" cy="130168"/>
+            <a:off x="2670048" y="2005199"/>
+            <a:ext cx="169491" cy="136676"/>
           </a:xfrm>
           <a:prstGeom prst="rect">
             <a:avLst/>
@@ -1503,8 +1503,8 @@
         </p:nvSpPr>
         <p:spPr>
           <a:xfrm>
-            <a:off x="3108960" y="1937452"/>
-            <a:ext cx="1024128" cy="236668"/>
+            <a:off x="3108960" y="1949286"/>
+            <a:ext cx="1024128" cy="248502"/>
           </a:xfrm>
           <a:prstGeom prst="rect">
             <a:avLst/>
@@ -1542,8 +1542,8 @@
         </p:nvSpPr>
         <p:spPr>
           <a:xfrm>
-            <a:off x="4133088" y="1937452"/>
-            <a:ext cx="896112" cy="236668"/>
+            <a:off x="4133088" y="1949286"/>
+            <a:ext cx="896112" cy="248502"/>
           </a:xfrm>
           <a:prstGeom prst="rect">
             <a:avLst/>
@@ -1581,8 +1581,8 @@
         </p:nvSpPr>
         <p:spPr>
           <a:xfrm>
-            <a:off x="5029200" y="1937452"/>
-            <a:ext cx="841248" cy="236668"/>
+            <a:off x="5029200" y="1949286"/>
+            <a:ext cx="841248" cy="248502"/>
           </a:xfrm>
           <a:prstGeom prst="rect">
             <a:avLst/>
@@ -1620,8 +1620,8 @@
         </p:nvSpPr>
         <p:spPr>
           <a:xfrm>
-            <a:off x="658368" y="2174120"/>
-            <a:ext cx="1938528" cy="236668"/>
+            <a:off x="658368" y="2197787"/>
+            <a:ext cx="1938528" cy="248502"/>
           </a:xfrm>
           <a:prstGeom prst="rect">
             <a:avLst/>
@@ -1659,8 +1659,8 @@
         </p:nvSpPr>
         <p:spPr>
           <a:xfrm>
-            <a:off x="2670048" y="2227371"/>
-            <a:ext cx="135326" cy="130168"/>
+            <a:off x="2670048" y="2253700"/>
+            <a:ext cx="135326" cy="136676"/>
           </a:xfrm>
           <a:prstGeom prst="rect">
             <a:avLst/>
@@ -1679,8 +1679,8 @@
         </p:nvSpPr>
         <p:spPr>
           <a:xfrm>
-            <a:off x="3108960" y="2174120"/>
-            <a:ext cx="1024128" cy="236668"/>
+            <a:off x="3108960" y="2197787"/>
+            <a:ext cx="1024128" cy="248502"/>
           </a:xfrm>
           <a:prstGeom prst="rect">
             <a:avLst/>
@@ -1718,8 +1718,8 @@
         </p:nvSpPr>
         <p:spPr>
           <a:xfrm>
-            <a:off x="4133088" y="2174120"/>
-            <a:ext cx="896112" cy="236668"/>
+            <a:off x="4133088" y="2197787"/>
+            <a:ext cx="896112" cy="248502"/>
           </a:xfrm>
           <a:prstGeom prst="rect">
             <a:avLst/>
@@ -1757,8 +1757,8 @@
         </p:nvSpPr>
         <p:spPr>
           <a:xfrm>
-            <a:off x="5029200" y="2174120"/>
-            <a:ext cx="841248" cy="236668"/>
+            <a:off x="5029200" y="2197787"/>
+            <a:ext cx="841248" cy="248502"/>
           </a:xfrm>
           <a:prstGeom prst="rect">
             <a:avLst/>
@@ -1796,8 +1796,8 @@
         </p:nvSpPr>
         <p:spPr>
           <a:xfrm>
-            <a:off x="658368" y="2410789"/>
-            <a:ext cx="1938528" cy="236668"/>
+            <a:off x="658368" y="2446289"/>
+            <a:ext cx="1938528" cy="248502"/>
           </a:xfrm>
           <a:prstGeom prst="rect">
             <a:avLst/>
@@ -1835,8 +1835,8 @@
         </p:nvSpPr>
         <p:spPr>
           <a:xfrm>
-            <a:off x="2670048" y="2464039"/>
-            <a:ext cx="113951" cy="130168"/>
+            <a:off x="2670048" y="2502202"/>
+            <a:ext cx="113951" cy="136676"/>
           </a:xfrm>
           <a:prstGeom prst="rect">
             <a:avLst/>
@@ -1855,8 +1855,8 @@
         </p:nvSpPr>
         <p:spPr>
           <a:xfrm>
-            <a:off x="3108960" y="2410789"/>
-            <a:ext cx="1024128" cy="236668"/>
+            <a:off x="3108960" y="2446289"/>
+            <a:ext cx="1024128" cy="248502"/>
           </a:xfrm>
           <a:prstGeom prst="rect">
             <a:avLst/>
@@ -1894,8 +1894,8 @@
         </p:nvSpPr>
         <p:spPr>
           <a:xfrm>
-            <a:off x="4133088" y="2410789"/>
-            <a:ext cx="896112" cy="236668"/>
+            <a:off x="4133088" y="2446289"/>
+            <a:ext cx="896112" cy="248502"/>
           </a:xfrm>
           <a:prstGeom prst="rect">
             <a:avLst/>
@@ -1933,8 +1933,8 @@
         </p:nvSpPr>
         <p:spPr>
           <a:xfrm>
-            <a:off x="5029200" y="2410789"/>
-            <a:ext cx="841248" cy="236668"/>
+            <a:off x="5029200" y="2446289"/>
+            <a:ext cx="841248" cy="248502"/>
           </a:xfrm>
           <a:prstGeom prst="rect">
             <a:avLst/>
@@ -1972,8 +1972,8 @@
         </p:nvSpPr>
         <p:spPr>
           <a:xfrm>
-            <a:off x="658368" y="2647457"/>
-            <a:ext cx="1938528" cy="236668"/>
+            <a:off x="658368" y="2694791"/>
+            <a:ext cx="1938528" cy="248502"/>
           </a:xfrm>
           <a:prstGeom prst="rect">
             <a:avLst/>
@@ -2011,8 +2011,8 @@
         </p:nvSpPr>
         <p:spPr>
           <a:xfrm>
-            <a:off x="2670048" y="2700707"/>
-            <a:ext cx="111909" cy="130168"/>
+            <a:off x="2670048" y="2750703"/>
+            <a:ext cx="111909" cy="136676"/>
           </a:xfrm>
           <a:prstGeom prst="rect">
             <a:avLst/>
@@ -2031,8 +2031,8 @@
         </p:nvSpPr>
         <p:spPr>
           <a:xfrm>
-            <a:off x="3108960" y="2647457"/>
-            <a:ext cx="1024128" cy="236668"/>
+            <a:off x="3108960" y="2694791"/>
+            <a:ext cx="1024128" cy="248502"/>
           </a:xfrm>
           <a:prstGeom prst="rect">
             <a:avLst/>
@@ -2070,8 +2070,8 @@
         </p:nvSpPr>
         <p:spPr>
           <a:xfrm>
-            <a:off x="4133088" y="2647457"/>
-            <a:ext cx="896112" cy="236668"/>
+            <a:off x="4133088" y="2694791"/>
+            <a:ext cx="896112" cy="248502"/>
           </a:xfrm>
           <a:prstGeom prst="rect">
             <a:avLst/>
@@ -2109,8 +2109,8 @@
         </p:nvSpPr>
         <p:spPr>
           <a:xfrm>
-            <a:off x="5029200" y="2647457"/>
-            <a:ext cx="841248" cy="236668"/>
+            <a:off x="5029200" y="2694791"/>
+            <a:ext cx="841248" cy="248502"/>
           </a:xfrm>
           <a:prstGeom prst="rect">
             <a:avLst/>
@@ -2148,8 +2148,8 @@
         </p:nvSpPr>
         <p:spPr>
           <a:xfrm>
-            <a:off x="658368" y="2884125"/>
-            <a:ext cx="1938528" cy="236668"/>
+            <a:off x="658368" y="2943292"/>
+            <a:ext cx="1938528" cy="248502"/>
           </a:xfrm>
           <a:prstGeom prst="rect">
             <a:avLst/>
@@ -2187,8 +2187,8 @@
         </p:nvSpPr>
         <p:spPr>
           <a:xfrm>
-            <a:off x="2670048" y="2937376"/>
-            <a:ext cx="110625" cy="130168"/>
+            <a:off x="2670048" y="2999205"/>
+            <a:ext cx="110625" cy="136676"/>
           </a:xfrm>
           <a:prstGeom prst="rect">
             <a:avLst/>
@@ -2207,8 +2207,8 @@
         </p:nvSpPr>
         <p:spPr>
           <a:xfrm>
-            <a:off x="3108960" y="2884125"/>
-            <a:ext cx="1024128" cy="236668"/>
+            <a:off x="3108960" y="2943292"/>
+            <a:ext cx="1024128" cy="248502"/>
           </a:xfrm>
           <a:prstGeom prst="rect">
             <a:avLst/>
@@ -2246,8 +2246,8 @@
         </p:nvSpPr>
         <p:spPr>
           <a:xfrm>
-            <a:off x="4133088" y="2884125"/>
-            <a:ext cx="896112" cy="236668"/>
+            <a:off x="4133088" y="2943292"/>
+            <a:ext cx="896112" cy="248502"/>
           </a:xfrm>
           <a:prstGeom prst="rect">
             <a:avLst/>
@@ -2285,8 +2285,8 @@
         </p:nvSpPr>
         <p:spPr>
           <a:xfrm>
-            <a:off x="5029200" y="2884125"/>
-            <a:ext cx="841248" cy="236668"/>
+            <a:off x="5029200" y="2943292"/>
+            <a:ext cx="841248" cy="248502"/>
           </a:xfrm>
           <a:prstGeom prst="rect">
             <a:avLst/>
@@ -2324,8 +2324,8 @@
         </p:nvSpPr>
         <p:spPr>
           <a:xfrm>
-            <a:off x="658368" y="3120793"/>
-            <a:ext cx="1938528" cy="236668"/>
+            <a:off x="658368" y="3191794"/>
+            <a:ext cx="1938528" cy="248502"/>
           </a:xfrm>
           <a:prstGeom prst="rect">
             <a:avLst/>
@@ -2363,8 +2363,8 @@
         </p:nvSpPr>
         <p:spPr>
           <a:xfrm>
-            <a:off x="2670048" y="3174044"/>
-            <a:ext cx="101643" cy="130168"/>
+            <a:off x="2670048" y="3247707"/>
+            <a:ext cx="101643" cy="136676"/>
           </a:xfrm>
           <a:prstGeom prst="rect">
             <a:avLst/>
@@ -2383,8 +2383,8 @@
         </p:nvSpPr>
         <p:spPr>
           <a:xfrm>
-            <a:off x="3108960" y="3120793"/>
-            <a:ext cx="1024128" cy="236668"/>
+            <a:off x="3108960" y="3191794"/>
+            <a:ext cx="1024128" cy="248502"/>
           </a:xfrm>
           <a:prstGeom prst="rect">
             <a:avLst/>
@@ -2422,8 +2422,8 @@
         </p:nvSpPr>
         <p:spPr>
           <a:xfrm>
-            <a:off x="4133088" y="3120793"/>
-            <a:ext cx="896112" cy="236668"/>
+            <a:off x="4133088" y="3191794"/>
+            <a:ext cx="896112" cy="248502"/>
           </a:xfrm>
           <a:prstGeom prst="rect">
             <a:avLst/>
@@ -2461,8 +2461,8 @@
         </p:nvSpPr>
         <p:spPr>
           <a:xfrm>
-            <a:off x="5029200" y="3120793"/>
-            <a:ext cx="841248" cy="236668"/>
+            <a:off x="5029200" y="3191794"/>
+            <a:ext cx="841248" cy="248502"/>
           </a:xfrm>
           <a:prstGeom prst="rect">
             <a:avLst/>
@@ -2500,8 +2500,8 @@
         </p:nvSpPr>
         <p:spPr>
           <a:xfrm>
-            <a:off x="658368" y="3357462"/>
-            <a:ext cx="1938528" cy="236668"/>
+            <a:off x="658368" y="3440296"/>
+            <a:ext cx="1938528" cy="248502"/>
           </a:xfrm>
           <a:prstGeom prst="rect">
             <a:avLst/>
@@ -2539,8 +2539,8 @@
         </p:nvSpPr>
         <p:spPr>
           <a:xfrm>
-            <a:off x="2670048" y="3410712"/>
-            <a:ext cx="101252" cy="130168"/>
+            <a:off x="2670048" y="3496208"/>
+            <a:ext cx="101252" cy="136676"/>
           </a:xfrm>
           <a:prstGeom prst="rect">
             <a:avLst/>
@@ -2559,8 +2559,8 @@
         </p:nvSpPr>
         <p:spPr>
           <a:xfrm>
-            <a:off x="3108960" y="3357462"/>
-            <a:ext cx="1024128" cy="236668"/>
+            <a:off x="3108960" y="3440296"/>
+            <a:ext cx="1024128" cy="248502"/>
           </a:xfrm>
           <a:prstGeom prst="rect">
             <a:avLst/>
@@ -2598,8 +2598,8 @@
         </p:nvSpPr>
         <p:spPr>
           <a:xfrm>
-            <a:off x="4133088" y="3357462"/>
-            <a:ext cx="896112" cy="236668"/>
+            <a:off x="4133088" y="3440296"/>
+            <a:ext cx="896112" cy="248502"/>
           </a:xfrm>
           <a:prstGeom prst="rect">
             <a:avLst/>
@@ -2637,8 +2637,8 @@
         </p:nvSpPr>
         <p:spPr>
           <a:xfrm>
-            <a:off x="5029200" y="3357462"/>
-            <a:ext cx="841248" cy="236668"/>
+            <a:off x="5029200" y="3440296"/>
+            <a:ext cx="841248" cy="248502"/>
           </a:xfrm>
           <a:prstGeom prst="rect">
             <a:avLst/>
@@ -2676,8 +2676,8 @@
         </p:nvSpPr>
         <p:spPr>
           <a:xfrm>
-            <a:off x="658368" y="3594130"/>
-            <a:ext cx="1938528" cy="236668"/>
+            <a:off x="658368" y="3688797"/>
+            <a:ext cx="1938528" cy="248502"/>
           </a:xfrm>
           <a:prstGeom prst="rect">
             <a:avLst/>
@@ -2715,8 +2715,8 @@
         </p:nvSpPr>
         <p:spPr>
           <a:xfrm>
-            <a:off x="2670048" y="3647380"/>
-            <a:ext cx="64695" cy="130168"/>
+            <a:off x="2670048" y="3744710"/>
+            <a:ext cx="64695" cy="136676"/>
           </a:xfrm>
           <a:prstGeom prst="rect">
             <a:avLst/>
@@ -2735,8 +2735,8 @@
         </p:nvSpPr>
         <p:spPr>
           <a:xfrm>
-            <a:off x="3108960" y="3594130"/>
-            <a:ext cx="1024128" cy="236668"/>
+            <a:off x="3108960" y="3688797"/>
+            <a:ext cx="1024128" cy="248502"/>
           </a:xfrm>
           <a:prstGeom prst="rect">
             <a:avLst/>
@@ -2774,8 +2774,8 @@
         </p:nvSpPr>
         <p:spPr>
           <a:xfrm>
-            <a:off x="4133088" y="3594130"/>
-            <a:ext cx="896112" cy="236668"/>
+            <a:off x="4133088" y="3688797"/>
+            <a:ext cx="896112" cy="248502"/>
           </a:xfrm>
           <a:prstGeom prst="rect">
             <a:avLst/>
@@ -2813,8 +2813,8 @@
         </p:nvSpPr>
         <p:spPr>
           <a:xfrm>
-            <a:off x="5029200" y="3594130"/>
-            <a:ext cx="841248" cy="236668"/>
+            <a:off x="5029200" y="3688797"/>
+            <a:ext cx="841248" cy="248502"/>
           </a:xfrm>
           <a:prstGeom prst="rect">
             <a:avLst/>
@@ -2852,8 +2852,8 @@
         </p:nvSpPr>
         <p:spPr>
           <a:xfrm>
-            <a:off x="658368" y="3830798"/>
-            <a:ext cx="1938528" cy="236668"/>
+            <a:off x="658368" y="3937299"/>
+            <a:ext cx="1938528" cy="248502"/>
           </a:xfrm>
           <a:prstGeom prst="rect">
             <a:avLst/>
@@ -2891,8 +2891,8 @@
         </p:nvSpPr>
         <p:spPr>
           <a:xfrm>
-            <a:off x="2670048" y="3884048"/>
-            <a:ext cx="61139" cy="130168"/>
+            <a:off x="2670048" y="3993212"/>
+            <a:ext cx="61139" cy="136676"/>
           </a:xfrm>
           <a:prstGeom prst="rect">
             <a:avLst/>
@@ -2911,8 +2911,8 @@
         </p:nvSpPr>
         <p:spPr>
           <a:xfrm>
-            <a:off x="3108960" y="3830798"/>
-            <a:ext cx="1024128" cy="236668"/>
+            <a:off x="3108960" y="3937299"/>
+            <a:ext cx="1024128" cy="248502"/>
           </a:xfrm>
           <a:prstGeom prst="rect">
             <a:avLst/>
@@ -2950,8 +2950,8 @@
         </p:nvSpPr>
         <p:spPr>
           <a:xfrm>
-            <a:off x="4133088" y="3830798"/>
-            <a:ext cx="896112" cy="236668"/>
+            <a:off x="4133088" y="3937299"/>
+            <a:ext cx="896112" cy="248502"/>
           </a:xfrm>
           <a:prstGeom prst="rect">
             <a:avLst/>
@@ -2989,8 +2989,8 @@
         </p:nvSpPr>
         <p:spPr>
           <a:xfrm>
-            <a:off x="5029200" y="3830798"/>
-            <a:ext cx="841248" cy="236668"/>
+            <a:off x="5029200" y="3937299"/>
+            <a:ext cx="841248" cy="248502"/>
           </a:xfrm>
           <a:prstGeom prst="rect">
             <a:avLst/>
@@ -3028,8 +3028,8 @@
         </p:nvSpPr>
         <p:spPr>
           <a:xfrm>
-            <a:off x="658368" y="4067466"/>
-            <a:ext cx="1938528" cy="236668"/>
+            <a:off x="658368" y="4185800"/>
+            <a:ext cx="1938528" cy="248502"/>
           </a:xfrm>
           <a:prstGeom prst="rect">
             <a:avLst/>
@@ -3067,8 +3067,8 @@
         </p:nvSpPr>
         <p:spPr>
           <a:xfrm>
-            <a:off x="2670048" y="4120717"/>
-            <a:ext cx="59038" cy="130168"/>
+            <a:off x="2670048" y="4241713"/>
+            <a:ext cx="59038" cy="136676"/>
           </a:xfrm>
           <a:prstGeom prst="rect">
             <a:avLst/>
@@ -3087,8 +3087,8 @@
         </p:nvSpPr>
         <p:spPr>
           <a:xfrm>
-            <a:off x="3108960" y="4067466"/>
-            <a:ext cx="1024128" cy="236668"/>
+            <a:off x="3108960" y="4185800"/>
+            <a:ext cx="1024128" cy="248502"/>
           </a:xfrm>
           <a:prstGeom prst="rect">
             <a:avLst/>
@@ -3126,8 +3126,8 @@
         </p:nvSpPr>
         <p:spPr>
           <a:xfrm>
-            <a:off x="4133088" y="4067466"/>
-            <a:ext cx="896112" cy="236668"/>
+            <a:off x="4133088" y="4185800"/>
+            <a:ext cx="896112" cy="248502"/>
           </a:xfrm>
           <a:prstGeom prst="rect">
             <a:avLst/>
@@ -3165,8 +3165,8 @@
         </p:nvSpPr>
         <p:spPr>
           <a:xfrm>
-            <a:off x="5029200" y="4067466"/>
-            <a:ext cx="841248" cy="236668"/>
+            <a:off x="5029200" y="4185800"/>
+            <a:ext cx="841248" cy="248502"/>
           </a:xfrm>
           <a:prstGeom prst="rect">
             <a:avLst/>
@@ -3204,8 +3204,8 @@
         </p:nvSpPr>
         <p:spPr>
           <a:xfrm>
-            <a:off x="658368" y="4304135"/>
-            <a:ext cx="1938528" cy="236668"/>
+            <a:off x="658368" y="4434302"/>
+            <a:ext cx="1938528" cy="248502"/>
           </a:xfrm>
           <a:prstGeom prst="rect">
             <a:avLst/>
@@ -3243,8 +3243,8 @@
         </p:nvSpPr>
         <p:spPr>
           <a:xfrm>
-            <a:off x="2670048" y="4357385"/>
-            <a:ext cx="50079" cy="130168"/>
+            <a:off x="2670048" y="4490215"/>
+            <a:ext cx="50079" cy="136676"/>
           </a:xfrm>
           <a:prstGeom prst="rect">
             <a:avLst/>
@@ -3263,8 +3263,8 @@
         </p:nvSpPr>
         <p:spPr>
           <a:xfrm>
-            <a:off x="3108960" y="4304135"/>
-            <a:ext cx="1024128" cy="236668"/>
+            <a:off x="3108960" y="4434302"/>
+            <a:ext cx="1024128" cy="248502"/>
           </a:xfrm>
           <a:prstGeom prst="rect">
             <a:avLst/>
@@ -3302,8 +3302,8 @@
         </p:nvSpPr>
         <p:spPr>
           <a:xfrm>
-            <a:off x="4133088" y="4304135"/>
-            <a:ext cx="896112" cy="236668"/>
+            <a:off x="4133088" y="4434302"/>
+            <a:ext cx="896112" cy="248502"/>
           </a:xfrm>
           <a:prstGeom prst="rect">
             <a:avLst/>
@@ -3341,8 +3341,8 @@
         </p:nvSpPr>
         <p:spPr>
           <a:xfrm>
-            <a:off x="5029200" y="4304135"/>
-            <a:ext cx="841248" cy="236668"/>
+            <a:off x="5029200" y="4434302"/>
+            <a:ext cx="841248" cy="248502"/>
           </a:xfrm>
           <a:prstGeom prst="rect">
             <a:avLst/>
@@ -3380,8 +3380,8 @@
         </p:nvSpPr>
         <p:spPr>
           <a:xfrm>
-            <a:off x="658368" y="4540803"/>
-            <a:ext cx="1938528" cy="236668"/>
+            <a:off x="658368" y="4682804"/>
+            <a:ext cx="1938528" cy="248502"/>
           </a:xfrm>
           <a:prstGeom prst="rect">
             <a:avLst/>
@@ -3419,8 +3419,8 @@
         </p:nvSpPr>
         <p:spPr>
           <a:xfrm>
-            <a:off x="2670048" y="4594053"/>
-            <a:ext cx="49123" cy="130168"/>
+            <a:off x="2670048" y="4738717"/>
+            <a:ext cx="49123" cy="136676"/>
           </a:xfrm>
           <a:prstGeom prst="rect">
             <a:avLst/>
@@ -3439,8 +3439,8 @@
         </p:nvSpPr>
         <p:spPr>
           <a:xfrm>
-            <a:off x="3108960" y="4540803"/>
-            <a:ext cx="1024128" cy="236668"/>
+            <a:off x="3108960" y="4682804"/>
+            <a:ext cx="1024128" cy="248502"/>
           </a:xfrm>
           <a:prstGeom prst="rect">
             <a:avLst/>
@@ -3478,8 +3478,8 @@
         </p:nvSpPr>
         <p:spPr>
           <a:xfrm>
-            <a:off x="4133088" y="4540803"/>
-            <a:ext cx="896112" cy="236668"/>
+            <a:off x="4133088" y="4682804"/>
+            <a:ext cx="896112" cy="248502"/>
           </a:xfrm>
           <a:prstGeom prst="rect">
             <a:avLst/>
@@ -3517,8 +3517,8 @@
         </p:nvSpPr>
         <p:spPr>
           <a:xfrm>
-            <a:off x="5029200" y="4540803"/>
-            <a:ext cx="841248" cy="236668"/>
+            <a:off x="5029200" y="4682804"/>
+            <a:ext cx="841248" cy="248502"/>
           </a:xfrm>
           <a:prstGeom prst="rect">
             <a:avLst/>
@@ -3556,8 +3556,8 @@
         </p:nvSpPr>
         <p:spPr>
           <a:xfrm>
-            <a:off x="658368" y="4777471"/>
-            <a:ext cx="1938528" cy="236668"/>
+            <a:off x="658368" y="4931305"/>
+            <a:ext cx="1938528" cy="248502"/>
           </a:xfrm>
           <a:prstGeom prst="rect">
             <a:avLst/>
@@ -3595,8 +3595,8 @@
         </p:nvSpPr>
         <p:spPr>
           <a:xfrm>
-            <a:off x="2670048" y="4830721"/>
-            <a:ext cx="48257" cy="130168"/>
+            <a:off x="2670048" y="4987218"/>
+            <a:ext cx="48257" cy="136676"/>
           </a:xfrm>
           <a:prstGeom prst="rect">
             <a:avLst/>
@@ -3615,8 +3615,8 @@
         </p:nvSpPr>
         <p:spPr>
           <a:xfrm>
-            <a:off x="3108960" y="4777471"/>
-            <a:ext cx="1024128" cy="236668"/>
+            <a:off x="3108960" y="4931305"/>
+            <a:ext cx="1024128" cy="248502"/>
           </a:xfrm>
           <a:prstGeom prst="rect">
             <a:avLst/>
@@ -3654,8 +3654,8 @@
         </p:nvSpPr>
         <p:spPr>
           <a:xfrm>
-            <a:off x="4133088" y="4777471"/>
-            <a:ext cx="896112" cy="236668"/>
+            <a:off x="4133088" y="4931305"/>
+            <a:ext cx="896112" cy="248502"/>
           </a:xfrm>
           <a:prstGeom prst="rect">
             <a:avLst/>
@@ -3693,8 +3693,8 @@
         </p:nvSpPr>
         <p:spPr>
           <a:xfrm>
-            <a:off x="5029200" y="4777471"/>
-            <a:ext cx="841248" cy="236668"/>
+            <a:off x="5029200" y="4931305"/>
+            <a:ext cx="841248" cy="248502"/>
           </a:xfrm>
           <a:prstGeom prst="rect">
             <a:avLst/>
@@ -3732,8 +3732,8 @@
         </p:nvSpPr>
         <p:spPr>
           <a:xfrm>
-            <a:off x="658368" y="5014139"/>
-            <a:ext cx="1938528" cy="236668"/>
+            <a:off x="658368" y="5179807"/>
+            <a:ext cx="1938528" cy="248502"/>
           </a:xfrm>
           <a:prstGeom prst="rect">
             <a:avLst/>
@@ -3771,8 +3771,8 @@
         </p:nvSpPr>
         <p:spPr>
           <a:xfrm>
-            <a:off x="2670048" y="5067390"/>
-            <a:ext cx="46762" cy="130168"/>
+            <a:off x="2670048" y="5235720"/>
+            <a:ext cx="46762" cy="136676"/>
           </a:xfrm>
           <a:prstGeom prst="rect">
             <a:avLst/>
@@ -3791,8 +3791,8 @@
         </p:nvSpPr>
         <p:spPr>
           <a:xfrm>
-            <a:off x="3108960" y="5014139"/>
-            <a:ext cx="1024128" cy="236668"/>
+            <a:off x="3108960" y="5179807"/>
+            <a:ext cx="1024128" cy="248502"/>
           </a:xfrm>
           <a:prstGeom prst="rect">
             <a:avLst/>
@@ -3830,8 +3830,8 @@
         </p:nvSpPr>
         <p:spPr>
           <a:xfrm>
-            <a:off x="4133088" y="5014139"/>
-            <a:ext cx="896112" cy="236668"/>
+            <a:off x="4133088" y="5179807"/>
+            <a:ext cx="896112" cy="248502"/>
           </a:xfrm>
           <a:prstGeom prst="rect">
             <a:avLst/>
@@ -3869,8 +3869,8 @@
         </p:nvSpPr>
         <p:spPr>
           <a:xfrm>
-            <a:off x="5029200" y="5014139"/>
-            <a:ext cx="841248" cy="236668"/>
+            <a:off x="5029200" y="5179807"/>
+            <a:ext cx="841248" cy="248502"/>
           </a:xfrm>
           <a:prstGeom prst="rect">
             <a:avLst/>
@@ -3908,8 +3908,8 @@
         </p:nvSpPr>
         <p:spPr>
           <a:xfrm>
-            <a:off x="658368" y="5250808"/>
-            <a:ext cx="1938528" cy="236668"/>
+            <a:off x="658368" y="5428309"/>
+            <a:ext cx="1938528" cy="248502"/>
           </a:xfrm>
           <a:prstGeom prst="rect">
             <a:avLst/>
@@ -3947,8 +3947,8 @@
         </p:nvSpPr>
         <p:spPr>
           <a:xfrm>
-            <a:off x="2670048" y="5304058"/>
-            <a:ext cx="44339" cy="130168"/>
+            <a:off x="2670048" y="5484222"/>
+            <a:ext cx="44339" cy="136676"/>
           </a:xfrm>
           <a:prstGeom prst="rect">
             <a:avLst/>
@@ -3967,8 +3967,8 @@
         </p:nvSpPr>
         <p:spPr>
           <a:xfrm>
-            <a:off x="3108960" y="5250808"/>
-            <a:ext cx="1024128" cy="236668"/>
+            <a:off x="3108960" y="5428309"/>
+            <a:ext cx="1024128" cy="248502"/>
           </a:xfrm>
           <a:prstGeom prst="rect">
             <a:avLst/>
@@ -4006,8 +4006,8 @@
         </p:nvSpPr>
         <p:spPr>
           <a:xfrm>
-            <a:off x="4133088" y="5250808"/>
-            <a:ext cx="896112" cy="236668"/>
+            <a:off x="4133088" y="5428309"/>
+            <a:ext cx="896112" cy="248502"/>
           </a:xfrm>
           <a:prstGeom prst="rect">
             <a:avLst/>
@@ -4045,8 +4045,8 @@
         </p:nvSpPr>
         <p:spPr>
           <a:xfrm>
-            <a:off x="5029200" y="5250808"/>
-            <a:ext cx="841248" cy="236668"/>
+            <a:off x="5029200" y="5428309"/>
+            <a:ext cx="841248" cy="248502"/>
           </a:xfrm>
           <a:prstGeom prst="rect">
             <a:avLst/>
@@ -4084,8 +4084,8 @@
         </p:nvSpPr>
         <p:spPr>
           <a:xfrm>
-            <a:off x="658368" y="5487476"/>
-            <a:ext cx="1938528" cy="236668"/>
+            <a:off x="658368" y="5676810"/>
+            <a:ext cx="1938528" cy="248502"/>
           </a:xfrm>
           <a:prstGeom prst="rect">
             <a:avLst/>
@@ -4123,8 +4123,8 @@
         </p:nvSpPr>
         <p:spPr>
           <a:xfrm>
-            <a:off x="2670048" y="5540726"/>
-            <a:ext cx="44034" cy="130168"/>
+            <a:off x="2670048" y="5732723"/>
+            <a:ext cx="44034" cy="136676"/>
           </a:xfrm>
           <a:prstGeom prst="rect">
             <a:avLst/>
@@ -4143,8 +4143,8 @@
         </p:nvSpPr>
         <p:spPr>
           <a:xfrm>
-            <a:off x="3108960" y="5487476"/>
-            <a:ext cx="1024128" cy="236668"/>
+            <a:off x="3108960" y="5676810"/>
+            <a:ext cx="1024128" cy="248502"/>
           </a:xfrm>
           <a:prstGeom prst="rect">
             <a:avLst/>
@@ -4182,8 +4182,8 @@
         </p:nvSpPr>
         <p:spPr>
           <a:xfrm>
-            <a:off x="4133088" y="5487476"/>
-            <a:ext cx="896112" cy="236668"/>
+            <a:off x="4133088" y="5676810"/>
+            <a:ext cx="896112" cy="248502"/>
           </a:xfrm>
           <a:prstGeom prst="rect">
             <a:avLst/>
@@ -4221,8 +4221,8 @@
         </p:nvSpPr>
         <p:spPr>
           <a:xfrm>
-            <a:off x="5029200" y="5487476"/>
-            <a:ext cx="841248" cy="236668"/>
+            <a:off x="5029200" y="5676810"/>
+            <a:ext cx="841248" cy="248502"/>
           </a:xfrm>
           <a:prstGeom prst="rect">
             <a:avLst/>
@@ -4261,7 +4261,7 @@
         <p:spPr>
           <a:xfrm>
             <a:off x="6208776" y="1700784"/>
-            <a:ext cx="1938528" cy="236668"/>
+            <a:ext cx="1938528" cy="248502"/>
           </a:xfrm>
           <a:prstGeom prst="rect">
             <a:avLst/>
@@ -4299,8 +4299,8 @@
         </p:nvSpPr>
         <p:spPr>
           <a:xfrm>
-            <a:off x="8220456" y="1754034"/>
-            <a:ext cx="43777" cy="130168"/>
+            <a:off x="8220456" y="1756697"/>
+            <a:ext cx="43777" cy="136676"/>
           </a:xfrm>
           <a:prstGeom prst="rect">
             <a:avLst/>
@@ -4320,7 +4320,7 @@
         <p:spPr>
           <a:xfrm>
             <a:off x="8659368" y="1700784"/>
-            <a:ext cx="1024128" cy="236668"/>
+            <a:ext cx="1024128" cy="248502"/>
           </a:xfrm>
           <a:prstGeom prst="rect">
             <a:avLst/>
@@ -4359,7 +4359,7 @@
         <p:spPr>
           <a:xfrm>
             <a:off x="9683496" y="1700784"/>
-            <a:ext cx="896112" cy="236668"/>
+            <a:ext cx="896112" cy="248502"/>
           </a:xfrm>
           <a:prstGeom prst="rect">
             <a:avLst/>
@@ -4398,7 +4398,7 @@
         <p:spPr>
           <a:xfrm>
             <a:off x="10579608" y="1700784"/>
-            <a:ext cx="841248" cy="236668"/>
+            <a:ext cx="841248" cy="248502"/>
           </a:xfrm>
           <a:prstGeom prst="rect">
             <a:avLst/>
@@ -4436,8 +4436,8 @@
         </p:nvSpPr>
         <p:spPr>
           <a:xfrm>
-            <a:off x="6208776" y="1937452"/>
-            <a:ext cx="1938528" cy="236668"/>
+            <a:off x="6208776" y="1949286"/>
+            <a:ext cx="1938528" cy="248502"/>
           </a:xfrm>
           <a:prstGeom prst="rect">
             <a:avLst/>
@@ -4475,8 +4475,8 @@
         </p:nvSpPr>
         <p:spPr>
           <a:xfrm>
-            <a:off x="8220456" y="1990703"/>
-            <a:ext cx="43509" cy="130168"/>
+            <a:off x="8220456" y="2005199"/>
+            <a:ext cx="43509" cy="136676"/>
           </a:xfrm>
           <a:prstGeom prst="rect">
             <a:avLst/>
@@ -4495,8 +4495,8 @@
         </p:nvSpPr>
         <p:spPr>
           <a:xfrm>
-            <a:off x="8659368" y="1937452"/>
-            <a:ext cx="1024128" cy="236668"/>
+            <a:off x="8659368" y="1949286"/>
+            <a:ext cx="1024128" cy="248502"/>
           </a:xfrm>
           <a:prstGeom prst="rect">
             <a:avLst/>
@@ -4534,8 +4534,8 @@
         </p:nvSpPr>
         <p:spPr>
           <a:xfrm>
-            <a:off x="9683496" y="1937452"/>
-            <a:ext cx="896112" cy="236668"/>
+            <a:off x="9683496" y="1949286"/>
+            <a:ext cx="896112" cy="248502"/>
           </a:xfrm>
           <a:prstGeom prst="rect">
             <a:avLst/>
@@ -4573,8 +4573,8 @@
         </p:nvSpPr>
         <p:spPr>
           <a:xfrm>
-            <a:off x="10579608" y="1937452"/>
-            <a:ext cx="841248" cy="236668"/>
+            <a:off x="10579608" y="1949286"/>
+            <a:ext cx="841248" cy="248502"/>
           </a:xfrm>
           <a:prstGeom prst="rect">
             <a:avLst/>
@@ -4612,8 +4612,8 @@
         </p:nvSpPr>
         <p:spPr>
           <a:xfrm>
-            <a:off x="6208776" y="2174120"/>
-            <a:ext cx="1938528" cy="236668"/>
+            <a:off x="6208776" y="2197787"/>
+            <a:ext cx="1938528" cy="248502"/>
           </a:xfrm>
           <a:prstGeom prst="rect">
             <a:avLst/>
@@ -4651,8 +4651,8 @@
         </p:nvSpPr>
         <p:spPr>
           <a:xfrm>
-            <a:off x="8220456" y="2227371"/>
-            <a:ext cx="42758" cy="130168"/>
+            <a:off x="8220456" y="2253700"/>
+            <a:ext cx="42758" cy="136676"/>
           </a:xfrm>
           <a:prstGeom prst="rect">
             <a:avLst/>
@@ -4671,8 +4671,8 @@
         </p:nvSpPr>
         <p:spPr>
           <a:xfrm>
-            <a:off x="8659368" y="2174120"/>
-            <a:ext cx="1024128" cy="236668"/>
+            <a:off x="8659368" y="2197787"/>
+            <a:ext cx="1024128" cy="248502"/>
           </a:xfrm>
           <a:prstGeom prst="rect">
             <a:avLst/>
@@ -4710,8 +4710,8 @@
         </p:nvSpPr>
         <p:spPr>
           <a:xfrm>
-            <a:off x="9683496" y="2174120"/>
-            <a:ext cx="896112" cy="236668"/>
+            <a:off x="9683496" y="2197787"/>
+            <a:ext cx="896112" cy="248502"/>
           </a:xfrm>
           <a:prstGeom prst="rect">
             <a:avLst/>
@@ -4749,8 +4749,8 @@
         </p:nvSpPr>
         <p:spPr>
           <a:xfrm>
-            <a:off x="10579608" y="2174120"/>
-            <a:ext cx="841248" cy="236668"/>
+            <a:off x="10579608" y="2197787"/>
+            <a:ext cx="841248" cy="248502"/>
           </a:xfrm>
           <a:prstGeom prst="rect">
             <a:avLst/>
@@ -4788,8 +4788,8 @@
         </p:nvSpPr>
         <p:spPr>
           <a:xfrm>
-            <a:off x="6208776" y="2410789"/>
-            <a:ext cx="1938528" cy="236668"/>
+            <a:off x="6208776" y="2446289"/>
+            <a:ext cx="1938528" cy="248502"/>
           </a:xfrm>
           <a:prstGeom prst="rect">
             <a:avLst/>
@@ -4827,8 +4827,8 @@
         </p:nvSpPr>
         <p:spPr>
           <a:xfrm>
-            <a:off x="8220456" y="2464039"/>
-            <a:ext cx="40422" cy="130168"/>
+            <a:off x="8220456" y="2502202"/>
+            <a:ext cx="40422" cy="136676"/>
           </a:xfrm>
           <a:prstGeom prst="rect">
             <a:avLst/>
@@ -4847,8 +4847,8 @@
         </p:nvSpPr>
         <p:spPr>
           <a:xfrm>
-            <a:off x="8659368" y="2410789"/>
-            <a:ext cx="1024128" cy="236668"/>
+            <a:off x="8659368" y="2446289"/>
+            <a:ext cx="1024128" cy="248502"/>
           </a:xfrm>
           <a:prstGeom prst="rect">
             <a:avLst/>
@@ -4886,8 +4886,8 @@
         </p:nvSpPr>
         <p:spPr>
           <a:xfrm>
-            <a:off x="9683496" y="2410789"/>
-            <a:ext cx="896112" cy="236668"/>
+            <a:off x="9683496" y="2446289"/>
+            <a:ext cx="896112" cy="248502"/>
           </a:xfrm>
           <a:prstGeom prst="rect">
             <a:avLst/>
@@ -4925,8 +4925,8 @@
         </p:nvSpPr>
         <p:spPr>
           <a:xfrm>
-            <a:off x="10579608" y="2410789"/>
-            <a:ext cx="841248" cy="236668"/>
+            <a:off x="10579608" y="2446289"/>
+            <a:ext cx="841248" cy="248502"/>
           </a:xfrm>
           <a:prstGeom prst="rect">
             <a:avLst/>
@@ -4964,8 +4964,8 @@
         </p:nvSpPr>
         <p:spPr>
           <a:xfrm>
-            <a:off x="6208776" y="2647457"/>
-            <a:ext cx="1938528" cy="236668"/>
+            <a:off x="6208776" y="2694791"/>
+            <a:ext cx="1938528" cy="248502"/>
           </a:xfrm>
           <a:prstGeom prst="rect">
             <a:avLst/>
@@ -5003,8 +5003,8 @@
         </p:nvSpPr>
         <p:spPr>
           <a:xfrm>
-            <a:off x="8220456" y="2700707"/>
-            <a:ext cx="38930" cy="130168"/>
+            <a:off x="8220456" y="2750703"/>
+            <a:ext cx="38930" cy="136676"/>
           </a:xfrm>
           <a:prstGeom prst="rect">
             <a:avLst/>
@@ -5023,8 +5023,8 @@
         </p:nvSpPr>
         <p:spPr>
           <a:xfrm>
-            <a:off x="8659368" y="2647457"/>
-            <a:ext cx="1024128" cy="236668"/>
+            <a:off x="8659368" y="2694791"/>
+            <a:ext cx="1024128" cy="248502"/>
           </a:xfrm>
           <a:prstGeom prst="rect">
             <a:avLst/>
@@ -5062,8 +5062,8 @@
         </p:nvSpPr>
         <p:spPr>
           <a:xfrm>
-            <a:off x="9683496" y="2647457"/>
-            <a:ext cx="896112" cy="236668"/>
+            <a:off x="9683496" y="2694791"/>
+            <a:ext cx="896112" cy="248502"/>
           </a:xfrm>
           <a:prstGeom prst="rect">
             <a:avLst/>
@@ -5101,8 +5101,8 @@
         </p:nvSpPr>
         <p:spPr>
           <a:xfrm>
-            <a:off x="10579608" y="2647457"/>
-            <a:ext cx="841248" cy="236668"/>
+            <a:off x="10579608" y="2694791"/>
+            <a:ext cx="841248" cy="248502"/>
           </a:xfrm>
           <a:prstGeom prst="rect">
             <a:avLst/>
@@ -5140,8 +5140,8 @@
         </p:nvSpPr>
         <p:spPr>
           <a:xfrm>
-            <a:off x="6208776" y="2884125"/>
-            <a:ext cx="1938528" cy="236668"/>
+            <a:off x="6208776" y="2943292"/>
+            <a:ext cx="1938528" cy="248502"/>
           </a:xfrm>
           <a:prstGeom prst="rect">
             <a:avLst/>
@@ -5179,8 +5179,8 @@
         </p:nvSpPr>
         <p:spPr>
           <a:xfrm>
-            <a:off x="8220456" y="2937376"/>
-            <a:ext cx="37956" cy="130168"/>
+            <a:off x="8220456" y="2999205"/>
+            <a:ext cx="37956" cy="136676"/>
           </a:xfrm>
           <a:prstGeom prst="rect">
             <a:avLst/>
@@ -5199,8 +5199,8 @@
         </p:nvSpPr>
         <p:spPr>
           <a:xfrm>
-            <a:off x="8659368" y="2884125"/>
-            <a:ext cx="1024128" cy="236668"/>
+            <a:off x="8659368" y="2943292"/>
+            <a:ext cx="1024128" cy="248502"/>
           </a:xfrm>
           <a:prstGeom prst="rect">
             <a:avLst/>
@@ -5238,8 +5238,8 @@
         </p:nvSpPr>
         <p:spPr>
           <a:xfrm>
-            <a:off x="9683496" y="2884125"/>
-            <a:ext cx="896112" cy="236668"/>
+            <a:off x="9683496" y="2943292"/>
+            <a:ext cx="896112" cy="248502"/>
           </a:xfrm>
           <a:prstGeom prst="rect">
             <a:avLst/>
@@ -5277,8 +5277,8 @@
         </p:nvSpPr>
         <p:spPr>
           <a:xfrm>
-            <a:off x="10579608" y="2884125"/>
-            <a:ext cx="841248" cy="236668"/>
+            <a:off x="10579608" y="2943292"/>
+            <a:ext cx="841248" cy="248502"/>
           </a:xfrm>
           <a:prstGeom prst="rect">
             <a:avLst/>
@@ -5316,8 +5316,8 @@
         </p:nvSpPr>
         <p:spPr>
           <a:xfrm>
-            <a:off x="6208776" y="3120793"/>
-            <a:ext cx="1938528" cy="236668"/>
+            <a:off x="6208776" y="3191794"/>
+            <a:ext cx="1938528" cy="248502"/>
           </a:xfrm>
           <a:prstGeom prst="rect">
             <a:avLst/>
@@ -5355,8 +5355,8 @@
         </p:nvSpPr>
         <p:spPr>
           <a:xfrm>
-            <a:off x="8220456" y="3174044"/>
-            <a:ext cx="33319" cy="130168"/>
+            <a:off x="8220456" y="3247707"/>
+            <a:ext cx="33319" cy="136676"/>
           </a:xfrm>
           <a:prstGeom prst="rect">
             <a:avLst/>
@@ -5375,8 +5375,8 @@
         </p:nvSpPr>
         <p:spPr>
           <a:xfrm>
-            <a:off x="8659368" y="3120793"/>
-            <a:ext cx="1024128" cy="236668"/>
+            <a:off x="8659368" y="3191794"/>
+            <a:ext cx="1024128" cy="248502"/>
           </a:xfrm>
           <a:prstGeom prst="rect">
             <a:avLst/>
@@ -5414,8 +5414,8 @@
         </p:nvSpPr>
         <p:spPr>
           <a:xfrm>
-            <a:off x="9683496" y="3120793"/>
-            <a:ext cx="896112" cy="236668"/>
+            <a:off x="9683496" y="3191794"/>
+            <a:ext cx="896112" cy="248502"/>
           </a:xfrm>
           <a:prstGeom prst="rect">
             <a:avLst/>
@@ -5453,8 +5453,8 @@
         </p:nvSpPr>
         <p:spPr>
           <a:xfrm>
-            <a:off x="10579608" y="3120793"/>
-            <a:ext cx="841248" cy="236668"/>
+            <a:off x="10579608" y="3191794"/>
+            <a:ext cx="841248" cy="248502"/>
           </a:xfrm>
           <a:prstGeom prst="rect">
             <a:avLst/>
@@ -5492,8 +5492,8 @@
         </p:nvSpPr>
         <p:spPr>
           <a:xfrm>
-            <a:off x="6208776" y="3357462"/>
-            <a:ext cx="1938528" cy="236668"/>
+            <a:off x="6208776" y="3440296"/>
+            <a:ext cx="1938528" cy="248502"/>
           </a:xfrm>
           <a:prstGeom prst="rect">
             <a:avLst/>
@@ -5531,8 +5531,8 @@
         </p:nvSpPr>
         <p:spPr>
           <a:xfrm>
-            <a:off x="8220456" y="3410712"/>
-            <a:ext cx="32649" cy="130168"/>
+            <a:off x="8220456" y="3496208"/>
+            <a:ext cx="32649" cy="136676"/>
           </a:xfrm>
           <a:prstGeom prst="rect">
             <a:avLst/>
@@ -5551,8 +5551,8 @@
         </p:nvSpPr>
         <p:spPr>
           <a:xfrm>
-            <a:off x="8659368" y="3357462"/>
-            <a:ext cx="1024128" cy="236668"/>
+            <a:off x="8659368" y="3440296"/>
+            <a:ext cx="1024128" cy="248502"/>
           </a:xfrm>
           <a:prstGeom prst="rect">
             <a:avLst/>
@@ -5590,8 +5590,8 @@
         </p:nvSpPr>
         <p:spPr>
           <a:xfrm>
-            <a:off x="9683496" y="3357462"/>
-            <a:ext cx="896112" cy="236668"/>
+            <a:off x="9683496" y="3440296"/>
+            <a:ext cx="896112" cy="248502"/>
           </a:xfrm>
           <a:prstGeom prst="rect">
             <a:avLst/>
@@ -5629,8 +5629,8 @@
         </p:nvSpPr>
         <p:spPr>
           <a:xfrm>
-            <a:off x="10579608" y="3357462"/>
-            <a:ext cx="841248" cy="236668"/>
+            <a:off x="10579608" y="3440296"/>
+            <a:ext cx="841248" cy="248502"/>
           </a:xfrm>
           <a:prstGeom prst="rect">
             <a:avLst/>
@@ -5668,8 +5668,8 @@
         </p:nvSpPr>
         <p:spPr>
           <a:xfrm>
-            <a:off x="6208776" y="3594130"/>
-            <a:ext cx="1938528" cy="236668"/>
+            <a:off x="6208776" y="3688797"/>
+            <a:ext cx="1938528" cy="248502"/>
           </a:xfrm>
           <a:prstGeom prst="rect">
             <a:avLst/>
@@ -5707,8 +5707,8 @@
         </p:nvSpPr>
         <p:spPr>
           <a:xfrm>
-            <a:off x="8220456" y="3647380"/>
-            <a:ext cx="29384" cy="130168"/>
+            <a:off x="8220456" y="3744710"/>
+            <a:ext cx="29384" cy="136676"/>
           </a:xfrm>
           <a:prstGeom prst="rect">
             <a:avLst/>
@@ -5727,8 +5727,8 @@
         </p:nvSpPr>
         <p:spPr>
           <a:xfrm>
-            <a:off x="8659368" y="3594130"/>
-            <a:ext cx="1024128" cy="236668"/>
+            <a:off x="8659368" y="3688797"/>
+            <a:ext cx="1024128" cy="248502"/>
           </a:xfrm>
           <a:prstGeom prst="rect">
             <a:avLst/>
@@ -5766,8 +5766,8 @@
         </p:nvSpPr>
         <p:spPr>
           <a:xfrm>
-            <a:off x="9683496" y="3594130"/>
-            <a:ext cx="896112" cy="236668"/>
+            <a:off x="9683496" y="3688797"/>
+            <a:ext cx="896112" cy="248502"/>
           </a:xfrm>
           <a:prstGeom prst="rect">
             <a:avLst/>
@@ -5805,8 +5805,8 @@
         </p:nvSpPr>
         <p:spPr>
           <a:xfrm>
-            <a:off x="10579608" y="3594130"/>
-            <a:ext cx="841248" cy="236668"/>
+            <a:off x="10579608" y="3688797"/>
+            <a:ext cx="841248" cy="248502"/>
           </a:xfrm>
           <a:prstGeom prst="rect">
             <a:avLst/>
@@ -5844,8 +5844,8 @@
         </p:nvSpPr>
         <p:spPr>
           <a:xfrm>
-            <a:off x="6208776" y="3830798"/>
-            <a:ext cx="1938528" cy="236668"/>
+            <a:off x="6208776" y="3937299"/>
+            <a:ext cx="1938528" cy="248502"/>
           </a:xfrm>
           <a:prstGeom prst="rect">
             <a:avLst/>
@@ -5883,8 +5883,8 @@
         </p:nvSpPr>
         <p:spPr>
           <a:xfrm>
-            <a:off x="8220456" y="3884048"/>
-            <a:ext cx="29214" cy="130168"/>
+            <a:off x="8220456" y="3993212"/>
+            <a:ext cx="29214" cy="136676"/>
           </a:xfrm>
           <a:prstGeom prst="rect">
             <a:avLst/>
@@ -5903,8 +5903,8 @@
         </p:nvSpPr>
         <p:spPr>
           <a:xfrm>
-            <a:off x="8659368" y="3830798"/>
-            <a:ext cx="1024128" cy="236668"/>
+            <a:off x="8659368" y="3937299"/>
+            <a:ext cx="1024128" cy="248502"/>
           </a:xfrm>
           <a:prstGeom prst="rect">
             <a:avLst/>
@@ -5942,8 +5942,8 @@
         </p:nvSpPr>
         <p:spPr>
           <a:xfrm>
-            <a:off x="9683496" y="3830798"/>
-            <a:ext cx="896112" cy="236668"/>
+            <a:off x="9683496" y="3937299"/>
+            <a:ext cx="896112" cy="248502"/>
           </a:xfrm>
           <a:prstGeom prst="rect">
             <a:avLst/>
@@ -5981,8 +5981,8 @@
         </p:nvSpPr>
         <p:spPr>
           <a:xfrm>
-            <a:off x="10579608" y="3830798"/>
-            <a:ext cx="841248" cy="236668"/>
+            <a:off x="10579608" y="3937299"/>
+            <a:ext cx="841248" cy="248502"/>
           </a:xfrm>
           <a:prstGeom prst="rect">
             <a:avLst/>
@@ -6020,8 +6020,8 @@
         </p:nvSpPr>
         <p:spPr>
           <a:xfrm>
-            <a:off x="6208776" y="4067466"/>
-            <a:ext cx="1938528" cy="236668"/>
+            <a:off x="6208776" y="4185800"/>
+            <a:ext cx="1938528" cy="248502"/>
           </a:xfrm>
           <a:prstGeom prst="rect">
             <a:avLst/>
@@ -6059,8 +6059,8 @@
         </p:nvSpPr>
         <p:spPr>
           <a:xfrm>
-            <a:off x="8220456" y="4120717"/>
-            <a:ext cx="22369" cy="130168"/>
+            <a:off x="8220456" y="4241713"/>
+            <a:ext cx="22369" cy="136676"/>
           </a:xfrm>
           <a:prstGeom prst="rect">
             <a:avLst/>
@@ -6079,8 +6079,8 @@
         </p:nvSpPr>
         <p:spPr>
           <a:xfrm>
-            <a:off x="8659368" y="4067466"/>
-            <a:ext cx="1024128" cy="236668"/>
+            <a:off x="8659368" y="4185800"/>
+            <a:ext cx="1024128" cy="248502"/>
           </a:xfrm>
           <a:prstGeom prst="rect">
             <a:avLst/>
@@ -6118,8 +6118,8 @@
         </p:nvSpPr>
         <p:spPr>
           <a:xfrm>
-            <a:off x="9683496" y="4067466"/>
-            <a:ext cx="896112" cy="236668"/>
+            <a:off x="9683496" y="4185800"/>
+            <a:ext cx="896112" cy="248502"/>
           </a:xfrm>
           <a:prstGeom prst="rect">
             <a:avLst/>
@@ -6157,8 +6157,8 @@
         </p:nvSpPr>
         <p:spPr>
           <a:xfrm>
-            <a:off x="10579608" y="4067466"/>
-            <a:ext cx="841248" cy="236668"/>
+            <a:off x="10579608" y="4185800"/>
+            <a:ext cx="841248" cy="248502"/>
           </a:xfrm>
           <a:prstGeom prst="rect">
             <a:avLst/>
@@ -6196,8 +6196,8 @@
         </p:nvSpPr>
         <p:spPr>
           <a:xfrm>
-            <a:off x="6208776" y="4304135"/>
-            <a:ext cx="1938528" cy="236668"/>
+            <a:off x="6208776" y="4434302"/>
+            <a:ext cx="1938528" cy="248502"/>
           </a:xfrm>
           <a:prstGeom prst="rect">
             <a:avLst/>
@@ -6235,8 +6235,8 @@
         </p:nvSpPr>
         <p:spPr>
           <a:xfrm>
-            <a:off x="8220456" y="4357385"/>
-            <a:ext cx="21616" cy="130168"/>
+            <a:off x="8220456" y="4490215"/>
+            <a:ext cx="21616" cy="136676"/>
           </a:xfrm>
           <a:prstGeom prst="rect">
             <a:avLst/>
@@ -6255,8 +6255,8 @@
         </p:nvSpPr>
         <p:spPr>
           <a:xfrm>
-            <a:off x="8659368" y="4304135"/>
-            <a:ext cx="1024128" cy="236668"/>
+            <a:off x="8659368" y="4434302"/>
+            <a:ext cx="1024128" cy="248502"/>
           </a:xfrm>
           <a:prstGeom prst="rect">
             <a:avLst/>
@@ -6294,8 +6294,8 @@
         </p:nvSpPr>
         <p:spPr>
           <a:xfrm>
-            <a:off x="9683496" y="4304135"/>
-            <a:ext cx="896112" cy="236668"/>
+            <a:off x="9683496" y="4434302"/>
+            <a:ext cx="896112" cy="248502"/>
           </a:xfrm>
           <a:prstGeom prst="rect">
             <a:avLst/>
@@ -6333,8 +6333,8 @@
         </p:nvSpPr>
         <p:spPr>
           <a:xfrm>
-            <a:off x="10579608" y="4304135"/>
-            <a:ext cx="841248" cy="236668"/>
+            <a:off x="10579608" y="4434302"/>
+            <a:ext cx="841248" cy="248502"/>
           </a:xfrm>
           <a:prstGeom prst="rect">
             <a:avLst/>
@@ -6372,8 +6372,8 @@
         </p:nvSpPr>
         <p:spPr>
           <a:xfrm>
-            <a:off x="6208776" y="4540803"/>
-            <a:ext cx="1938528" cy="236668"/>
+            <a:off x="6208776" y="4682804"/>
+            <a:ext cx="1938528" cy="248502"/>
           </a:xfrm>
           <a:prstGeom prst="rect">
             <a:avLst/>
@@ -6411,8 +6411,8 @@
         </p:nvSpPr>
         <p:spPr>
           <a:xfrm>
-            <a:off x="8220456" y="4594053"/>
-            <a:ext cx="20062" cy="130168"/>
+            <a:off x="8220456" y="4738717"/>
+            <a:ext cx="20062" cy="136676"/>
           </a:xfrm>
           <a:prstGeom prst="rect">
             <a:avLst/>
@@ -6431,8 +6431,8 @@
         </p:nvSpPr>
         <p:spPr>
           <a:xfrm>
-            <a:off x="8659368" y="4540803"/>
-            <a:ext cx="1024128" cy="236668"/>
+            <a:off x="8659368" y="4682804"/>
+            <a:ext cx="1024128" cy="248502"/>
           </a:xfrm>
           <a:prstGeom prst="rect">
             <a:avLst/>
@@ -6470,8 +6470,8 @@
         </p:nvSpPr>
         <p:spPr>
           <a:xfrm>
-            <a:off x="9683496" y="4540803"/>
-            <a:ext cx="896112" cy="236668"/>
+            <a:off x="9683496" y="4682804"/>
+            <a:ext cx="896112" cy="248502"/>
           </a:xfrm>
           <a:prstGeom prst="rect">
             <a:avLst/>
@@ -6509,8 +6509,8 @@
         </p:nvSpPr>
         <p:spPr>
           <a:xfrm>
-            <a:off x="10579608" y="4540803"/>
-            <a:ext cx="841248" cy="236668"/>
+            <a:off x="10579608" y="4682804"/>
+            <a:ext cx="841248" cy="248502"/>
           </a:xfrm>
           <a:prstGeom prst="rect">
             <a:avLst/>
@@ -6548,8 +6548,8 @@
         </p:nvSpPr>
         <p:spPr>
           <a:xfrm>
-            <a:off x="6208776" y="4777471"/>
-            <a:ext cx="1938528" cy="236668"/>
+            <a:off x="6208776" y="4931305"/>
+            <a:ext cx="1938528" cy="248502"/>
           </a:xfrm>
           <a:prstGeom prst="rect">
             <a:avLst/>
@@ -6587,8 +6587,8 @@
         </p:nvSpPr>
         <p:spPr>
           <a:xfrm>
-            <a:off x="8220456" y="4830721"/>
-            <a:ext cx="18885" cy="130168"/>
+            <a:off x="8220456" y="4987218"/>
+            <a:ext cx="18885" cy="136676"/>
           </a:xfrm>
           <a:prstGeom prst="rect">
             <a:avLst/>
@@ -6607,8 +6607,8 @@
         </p:nvSpPr>
         <p:spPr>
           <a:xfrm>
-            <a:off x="8659368" y="4777471"/>
-            <a:ext cx="1024128" cy="236668"/>
+            <a:off x="8659368" y="4931305"/>
+            <a:ext cx="1024128" cy="248502"/>
           </a:xfrm>
           <a:prstGeom prst="rect">
             <a:avLst/>
@@ -6646,8 +6646,8 @@
         </p:nvSpPr>
         <p:spPr>
           <a:xfrm>
-            <a:off x="9683496" y="4777471"/>
-            <a:ext cx="896112" cy="236668"/>
+            <a:off x="9683496" y="4931305"/>
+            <a:ext cx="896112" cy="248502"/>
           </a:xfrm>
           <a:prstGeom prst="rect">
             <a:avLst/>
@@ -6685,8 +6685,8 @@
         </p:nvSpPr>
         <p:spPr>
           <a:xfrm>
-            <a:off x="10579608" y="4777471"/>
-            <a:ext cx="841248" cy="236668"/>
+            <a:off x="10579608" y="4931305"/>
+            <a:ext cx="841248" cy="248502"/>
           </a:xfrm>
           <a:prstGeom prst="rect">
             <a:avLst/>
@@ -6724,8 +6724,8 @@
         </p:nvSpPr>
         <p:spPr>
           <a:xfrm>
-            <a:off x="6208776" y="5014139"/>
-            <a:ext cx="1938528" cy="236668"/>
+            <a:off x="6208776" y="5179807"/>
+            <a:ext cx="1938528" cy="248502"/>
           </a:xfrm>
           <a:prstGeom prst="rect">
             <a:avLst/>
@@ -6763,8 +6763,8 @@
         </p:nvSpPr>
         <p:spPr>
           <a:xfrm>
-            <a:off x="8220456" y="5067390"/>
-            <a:ext cx="18288" cy="130168"/>
+            <a:off x="8220456" y="5235720"/>
+            <a:ext cx="18288" cy="136676"/>
           </a:xfrm>
           <a:prstGeom prst="rect">
             <a:avLst/>
@@ -6783,8 +6783,8 @@
         </p:nvSpPr>
         <p:spPr>
           <a:xfrm>
-            <a:off x="8659368" y="5014139"/>
-            <a:ext cx="1024128" cy="236668"/>
+            <a:off x="8659368" y="5179807"/>
+            <a:ext cx="1024128" cy="248502"/>
           </a:xfrm>
           <a:prstGeom prst="rect">
             <a:avLst/>
@@ -6822,8 +6822,8 @@
         </p:nvSpPr>
         <p:spPr>
           <a:xfrm>
-            <a:off x="9683496" y="5014139"/>
-            <a:ext cx="896112" cy="236668"/>
+            <a:off x="9683496" y="5179807"/>
+            <a:ext cx="896112" cy="248502"/>
           </a:xfrm>
           <a:prstGeom prst="rect">
             <a:avLst/>
@@ -6861,8 +6861,8 @@
         </p:nvSpPr>
         <p:spPr>
           <a:xfrm>
-            <a:off x="10579608" y="5014139"/>
-            <a:ext cx="841248" cy="236668"/>
+            <a:off x="10579608" y="5179807"/>
+            <a:ext cx="841248" cy="248502"/>
           </a:xfrm>
           <a:prstGeom prst="rect">
             <a:avLst/>
@@ -6900,8 +6900,8 @@
         </p:nvSpPr>
         <p:spPr>
           <a:xfrm>
-            <a:off x="6208776" y="5250808"/>
-            <a:ext cx="1938528" cy="236668"/>
+            <a:off x="6208776" y="5428309"/>
+            <a:ext cx="1938528" cy="248502"/>
           </a:xfrm>
           <a:prstGeom prst="rect">
             <a:avLst/>
@@ -6939,8 +6939,8 @@
         </p:nvSpPr>
         <p:spPr>
           <a:xfrm>
-            <a:off x="8220456" y="5304058"/>
-            <a:ext cx="18288" cy="130168"/>
+            <a:off x="8220456" y="5484222"/>
+            <a:ext cx="18288" cy="136676"/>
           </a:xfrm>
           <a:prstGeom prst="rect">
             <a:avLst/>
@@ -6959,8 +6959,8 @@
         </p:nvSpPr>
         <p:spPr>
           <a:xfrm>
-            <a:off x="8659368" y="5250808"/>
-            <a:ext cx="1024128" cy="236668"/>
+            <a:off x="8659368" y="5428309"/>
+            <a:ext cx="1024128" cy="248502"/>
           </a:xfrm>
           <a:prstGeom prst="rect">
             <a:avLst/>
@@ -6998,8 +6998,8 @@
         </p:nvSpPr>
         <p:spPr>
           <a:xfrm>
-            <a:off x="9683496" y="5250808"/>
-            <a:ext cx="896112" cy="236668"/>
+            <a:off x="9683496" y="5428309"/>
+            <a:ext cx="896112" cy="248502"/>
           </a:xfrm>
           <a:prstGeom prst="rect">
             <a:avLst/>
@@ -7037,8 +7037,8 @@
         </p:nvSpPr>
         <p:spPr>
           <a:xfrm>
-            <a:off x="10579608" y="5250808"/>
-            <a:ext cx="841248" cy="236668"/>
+            <a:off x="10579608" y="5428309"/>
+            <a:ext cx="841248" cy="248502"/>
           </a:xfrm>
           <a:prstGeom prst="rect">
             <a:avLst/>
@@ -7076,8 +7076,8 @@
         </p:nvSpPr>
         <p:spPr>
           <a:xfrm>
-            <a:off x="457200" y="5961888"/>
-            <a:ext cx="11274552" cy="548640"/>
+            <a:off x="457200" y="6126480"/>
+            <a:ext cx="11274552" cy="615696"/>
           </a:xfrm>
           <a:prstGeom prst="rect">
             <a:avLst/>
@@ -7096,8 +7096,8 @@
         </p:nvSpPr>
         <p:spPr>
           <a:xfrm>
-            <a:off x="658368" y="5980176"/>
-            <a:ext cx="10927080" cy="512064"/>
+            <a:off x="658368" y="6144768"/>
+            <a:ext cx="10927080" cy="579120"/>
           </a:xfrm>
           <a:prstGeom prst="rect">
             <a:avLst/>
@@ -7121,7 +7121,7 @@
                 <a:ea typeface="Inter" pitchFamily="34" charset="-122"/>
                 <a:cs typeface="Inter" pitchFamily="34" charset="-120"/>
               </a:rPr>
-              <a:t>0.1 hour more on every CP RO is worth $6,602,564 a year in gross: $4,741,969 labor and $1,860,595 parts. TOYOTA HENDERSON leads at $1,164,334.</a:t>
+              <a:t>0.1 hour more on every CP RO is worth $6,602,564 a year in gross: $4,741,969 labor and $1,860,595 parts. Toyota Henderson leads at $1,164,334.</a:t>
             </a:r>
             <a:endParaRPr lang="en-US" sz="1600" dirty="0"/>
           </a:p>

--- a/day2-deck/decks/Hours per RO Value - Review.pptx
+++ b/day2-deck/decks/Hours per RO Value - Review.pptx
@@ -1034,8 +1034,8 @@
         </p:nvSpPr>
         <p:spPr>
           <a:xfrm>
-            <a:off x="3108960" y="1316736"/>
-            <a:ext cx="1024128" cy="329184"/>
+            <a:off x="3218688" y="1316736"/>
+            <a:ext cx="914400" cy="329184"/>
           </a:xfrm>
           <a:prstGeom prst="rect">
             <a:avLst/>
@@ -1151,8 +1151,8 @@
         </p:nvSpPr>
         <p:spPr>
           <a:xfrm>
-            <a:off x="8659368" y="1316736"/>
-            <a:ext cx="1024128" cy="329184"/>
+            <a:off x="8769096" y="1316736"/>
+            <a:ext cx="914400" cy="329184"/>
           </a:xfrm>
           <a:prstGeom prst="rect">
             <a:avLst/>
@@ -1308,7 +1308,7 @@
         <p:spPr>
           <a:xfrm>
             <a:off x="2670048" y="1756697"/>
-            <a:ext cx="384048" cy="136676"/>
+            <a:ext cx="493776" cy="136676"/>
           </a:xfrm>
           <a:prstGeom prst="rect">
             <a:avLst/>
@@ -1327,8 +1327,8 @@
         </p:nvSpPr>
         <p:spPr>
           <a:xfrm>
-            <a:off x="3108960" y="1700784"/>
-            <a:ext cx="1024128" cy="248502"/>
+            <a:off x="3218688" y="1700784"/>
+            <a:ext cx="914400" cy="248502"/>
           </a:xfrm>
           <a:prstGeom prst="rect">
             <a:avLst/>
@@ -1352,7 +1352,7 @@
                 <a:ea typeface="Inter" pitchFamily="34" charset="-122"/>
                 <a:cs typeface="Inter" pitchFamily="34" charset="-120"/>
               </a:rPr>
-              <a:t>$1,164,334</a:t>
+              <a:t>$1.16M</a:t>
             </a:r>
             <a:endParaRPr lang="en-US" sz="1300" dirty="0"/>
           </a:p>
@@ -1391,7 +1391,7 @@
                 <a:ea typeface="Inter" pitchFamily="34" charset="-122"/>
                 <a:cs typeface="Inter" pitchFamily="34" charset="-120"/>
               </a:rPr>
-              <a:t>$868,256</a:t>
+              <a:t>$868K</a:t>
             </a:r>
             <a:endParaRPr lang="en-US" sz="1300" dirty="0"/>
           </a:p>
@@ -1430,7 +1430,7 @@
                 <a:ea typeface="Inter" pitchFamily="34" charset="-122"/>
                 <a:cs typeface="Inter" pitchFamily="34" charset="-120"/>
               </a:rPr>
-              <a:t>$296,078</a:t>
+              <a:t>$296K</a:t>
             </a:r>
             <a:endParaRPr lang="en-US" sz="1300" dirty="0"/>
           </a:p>
@@ -1484,7 +1484,7 @@
         <p:spPr>
           <a:xfrm>
             <a:off x="2670048" y="2005199"/>
-            <a:ext cx="169491" cy="136676"/>
+            <a:ext cx="217917" cy="136676"/>
           </a:xfrm>
           <a:prstGeom prst="rect">
             <a:avLst/>
@@ -1503,8 +1503,8 @@
         </p:nvSpPr>
         <p:spPr>
           <a:xfrm>
-            <a:off x="3108960" y="1949286"/>
-            <a:ext cx="1024128" cy="248502"/>
+            <a:off x="3218688" y="1949286"/>
+            <a:ext cx="914400" cy="248502"/>
           </a:xfrm>
           <a:prstGeom prst="rect">
             <a:avLst/>
@@ -1528,7 +1528,7 @@
                 <a:ea typeface="Inter" pitchFamily="34" charset="-122"/>
                 <a:cs typeface="Inter" pitchFamily="34" charset="-120"/>
               </a:rPr>
-              <a:t>$513,852</a:t>
+              <a:t>$514K</a:t>
             </a:r>
             <a:endParaRPr lang="en-US" sz="1300" dirty="0"/>
           </a:p>
@@ -1567,7 +1567,7 @@
                 <a:ea typeface="Inter" pitchFamily="34" charset="-122"/>
                 <a:cs typeface="Inter" pitchFamily="34" charset="-120"/>
               </a:rPr>
-              <a:t>$396,326</a:t>
+              <a:t>$396K</a:t>
             </a:r>
             <a:endParaRPr lang="en-US" sz="1300" dirty="0"/>
           </a:p>
@@ -1606,7 +1606,7 @@
                 <a:ea typeface="Inter" pitchFamily="34" charset="-122"/>
                 <a:cs typeface="Inter" pitchFamily="34" charset="-120"/>
               </a:rPr>
-              <a:t>$117,527</a:t>
+              <a:t>$118K</a:t>
             </a:r>
             <a:endParaRPr lang="en-US" sz="1300" dirty="0"/>
           </a:p>
@@ -1660,7 +1660,7 @@
         <p:spPr>
           <a:xfrm>
             <a:off x="2670048" y="2253700"/>
-            <a:ext cx="135326" cy="136676"/>
+            <a:ext cx="173990" cy="136676"/>
           </a:xfrm>
           <a:prstGeom prst="rect">
             <a:avLst/>
@@ -1679,8 +1679,8 @@
         </p:nvSpPr>
         <p:spPr>
           <a:xfrm>
-            <a:off x="3108960" y="2197787"/>
-            <a:ext cx="1024128" cy="248502"/>
+            <a:off x="3218688" y="2197787"/>
+            <a:ext cx="914400" cy="248502"/>
           </a:xfrm>
           <a:prstGeom prst="rect">
             <a:avLst/>
@@ -1704,7 +1704,7 @@
                 <a:ea typeface="Inter" pitchFamily="34" charset="-122"/>
                 <a:cs typeface="Inter" pitchFamily="34" charset="-120"/>
               </a:rPr>
-              <a:t>$410,273</a:t>
+              <a:t>$410K</a:t>
             </a:r>
             <a:endParaRPr lang="en-US" sz="1300" dirty="0"/>
           </a:p>
@@ -1743,7 +1743,7 @@
                 <a:ea typeface="Inter" pitchFamily="34" charset="-122"/>
                 <a:cs typeface="Inter" pitchFamily="34" charset="-120"/>
               </a:rPr>
-              <a:t>$295,521</a:t>
+              <a:t>$296K</a:t>
             </a:r>
             <a:endParaRPr lang="en-US" sz="1300" dirty="0"/>
           </a:p>
@@ -1782,7 +1782,7 @@
                 <a:ea typeface="Inter" pitchFamily="34" charset="-122"/>
                 <a:cs typeface="Inter" pitchFamily="34" charset="-120"/>
               </a:rPr>
-              <a:t>$114,751</a:t>
+              <a:t>$115K</a:t>
             </a:r>
             <a:endParaRPr lang="en-US" sz="1300" dirty="0"/>
           </a:p>
@@ -1836,7 +1836,7 @@
         <p:spPr>
           <a:xfrm>
             <a:off x="2670048" y="2502202"/>
-            <a:ext cx="113951" cy="136676"/>
+            <a:ext cx="146509" cy="136676"/>
           </a:xfrm>
           <a:prstGeom prst="rect">
             <a:avLst/>
@@ -1855,8 +1855,8 @@
         </p:nvSpPr>
         <p:spPr>
           <a:xfrm>
-            <a:off x="3108960" y="2446289"/>
-            <a:ext cx="1024128" cy="248502"/>
+            <a:off x="3218688" y="2446289"/>
+            <a:ext cx="914400" cy="248502"/>
           </a:xfrm>
           <a:prstGeom prst="rect">
             <a:avLst/>
@@ -1880,7 +1880,7 @@
                 <a:ea typeface="Inter" pitchFamily="34" charset="-122"/>
                 <a:cs typeface="Inter" pitchFamily="34" charset="-120"/>
               </a:rPr>
-              <a:t>$345,471</a:t>
+              <a:t>$345K</a:t>
             </a:r>
             <a:endParaRPr lang="en-US" sz="1300" dirty="0"/>
           </a:p>
@@ -1919,7 +1919,7 @@
                 <a:ea typeface="Inter" pitchFamily="34" charset="-122"/>
                 <a:cs typeface="Inter" pitchFamily="34" charset="-120"/>
               </a:rPr>
-              <a:t>$260,598</a:t>
+              <a:t>$261K</a:t>
             </a:r>
             <a:endParaRPr lang="en-US" sz="1300" dirty="0"/>
           </a:p>
@@ -1958,7 +1958,7 @@
                 <a:ea typeface="Inter" pitchFamily="34" charset="-122"/>
                 <a:cs typeface="Inter" pitchFamily="34" charset="-120"/>
               </a:rPr>
-              <a:t>$84,873</a:t>
+              <a:t>$85K</a:t>
             </a:r>
             <a:endParaRPr lang="en-US" sz="1300" dirty="0"/>
           </a:p>
@@ -2012,7 +2012,7 @@
         <p:spPr>
           <a:xfrm>
             <a:off x="2670048" y="2750703"/>
-            <a:ext cx="111909" cy="136676"/>
+            <a:ext cx="143883" cy="136676"/>
           </a:xfrm>
           <a:prstGeom prst="rect">
             <a:avLst/>
@@ -2031,8 +2031,8 @@
         </p:nvSpPr>
         <p:spPr>
           <a:xfrm>
-            <a:off x="3108960" y="2694791"/>
-            <a:ext cx="1024128" cy="248502"/>
+            <a:off x="3218688" y="2694791"/>
+            <a:ext cx="914400" cy="248502"/>
           </a:xfrm>
           <a:prstGeom prst="rect">
             <a:avLst/>
@@ -2056,7 +2056,7 @@
                 <a:ea typeface="Inter" pitchFamily="34" charset="-122"/>
                 <a:cs typeface="Inter" pitchFamily="34" charset="-120"/>
               </a:rPr>
-              <a:t>$339,280</a:t>
+              <a:t>$339K</a:t>
             </a:r>
             <a:endParaRPr lang="en-US" sz="1300" dirty="0"/>
           </a:p>
@@ -2095,7 +2095,7 @@
                 <a:ea typeface="Inter" pitchFamily="34" charset="-122"/>
                 <a:cs typeface="Inter" pitchFamily="34" charset="-120"/>
               </a:rPr>
-              <a:t>$220,993</a:t>
+              <a:t>$221K</a:t>
             </a:r>
             <a:endParaRPr lang="en-US" sz="1300" dirty="0"/>
           </a:p>
@@ -2134,7 +2134,7 @@
                 <a:ea typeface="Inter" pitchFamily="34" charset="-122"/>
                 <a:cs typeface="Inter" pitchFamily="34" charset="-120"/>
               </a:rPr>
-              <a:t>$118,287</a:t>
+              <a:t>$118K</a:t>
             </a:r>
             <a:endParaRPr lang="en-US" sz="1300" dirty="0"/>
           </a:p>
@@ -2188,7 +2188,7 @@
         <p:spPr>
           <a:xfrm>
             <a:off x="2670048" y="2999205"/>
-            <a:ext cx="110625" cy="136676"/>
+            <a:ext cx="142232" cy="136676"/>
           </a:xfrm>
           <a:prstGeom prst="rect">
             <a:avLst/>
@@ -2207,8 +2207,8 @@
         </p:nvSpPr>
         <p:spPr>
           <a:xfrm>
-            <a:off x="3108960" y="2943292"/>
-            <a:ext cx="1024128" cy="248502"/>
+            <a:off x="3218688" y="2943292"/>
+            <a:ext cx="914400" cy="248502"/>
           </a:xfrm>
           <a:prstGeom prst="rect">
             <a:avLst/>
@@ -2232,7 +2232,7 @@
                 <a:ea typeface="Inter" pitchFamily="34" charset="-122"/>
                 <a:cs typeface="Inter" pitchFamily="34" charset="-120"/>
               </a:rPr>
-              <a:t>$335,387</a:t>
+              <a:t>$335K</a:t>
             </a:r>
             <a:endParaRPr lang="en-US" sz="1300" dirty="0"/>
           </a:p>
@@ -2271,7 +2271,7 @@
                 <a:ea typeface="Inter" pitchFamily="34" charset="-122"/>
                 <a:cs typeface="Inter" pitchFamily="34" charset="-120"/>
               </a:rPr>
-              <a:t>$243,757</a:t>
+              <a:t>$244K</a:t>
             </a:r>
             <a:endParaRPr lang="en-US" sz="1300" dirty="0"/>
           </a:p>
@@ -2310,7 +2310,7 @@
                 <a:ea typeface="Inter" pitchFamily="34" charset="-122"/>
                 <a:cs typeface="Inter" pitchFamily="34" charset="-120"/>
               </a:rPr>
-              <a:t>$91,630</a:t>
+              <a:t>$92K</a:t>
             </a:r>
             <a:endParaRPr lang="en-US" sz="1300" dirty="0"/>
           </a:p>
@@ -2364,7 +2364,7 @@
         <p:spPr>
           <a:xfrm>
             <a:off x="2670048" y="3247707"/>
-            <a:ext cx="101643" cy="136676"/>
+            <a:ext cx="130684" cy="136676"/>
           </a:xfrm>
           <a:prstGeom prst="rect">
             <a:avLst/>
@@ -2383,8 +2383,8 @@
         </p:nvSpPr>
         <p:spPr>
           <a:xfrm>
-            <a:off x="3108960" y="3191794"/>
-            <a:ext cx="1024128" cy="248502"/>
+            <a:off x="3218688" y="3191794"/>
+            <a:ext cx="914400" cy="248502"/>
           </a:xfrm>
           <a:prstGeom prst="rect">
             <a:avLst/>
@@ -2408,7 +2408,7 @@
                 <a:ea typeface="Inter" pitchFamily="34" charset="-122"/>
                 <a:cs typeface="Inter" pitchFamily="34" charset="-120"/>
               </a:rPr>
-              <a:t>$308,157</a:t>
+              <a:t>$308K</a:t>
             </a:r>
             <a:endParaRPr lang="en-US" sz="1300" dirty="0"/>
           </a:p>
@@ -2447,7 +2447,7 @@
                 <a:ea typeface="Inter" pitchFamily="34" charset="-122"/>
                 <a:cs typeface="Inter" pitchFamily="34" charset="-120"/>
               </a:rPr>
-              <a:t>$224,917</a:t>
+              <a:t>$225K</a:t>
             </a:r>
             <a:endParaRPr lang="en-US" sz="1300" dirty="0"/>
           </a:p>
@@ -2486,7 +2486,7 @@
                 <a:ea typeface="Inter" pitchFamily="34" charset="-122"/>
                 <a:cs typeface="Inter" pitchFamily="34" charset="-120"/>
               </a:rPr>
-              <a:t>$83,240</a:t>
+              <a:t>$83K</a:t>
             </a:r>
             <a:endParaRPr lang="en-US" sz="1300" dirty="0"/>
           </a:p>
@@ -2540,7 +2540,7 @@
         <p:spPr>
           <a:xfrm>
             <a:off x="2670048" y="3496208"/>
-            <a:ext cx="101252" cy="136676"/>
+            <a:ext cx="130182" cy="136676"/>
           </a:xfrm>
           <a:prstGeom prst="rect">
             <a:avLst/>
@@ -2559,8 +2559,8 @@
         </p:nvSpPr>
         <p:spPr>
           <a:xfrm>
-            <a:off x="3108960" y="3440296"/>
-            <a:ext cx="1024128" cy="248502"/>
+            <a:off x="3218688" y="3440296"/>
+            <a:ext cx="914400" cy="248502"/>
           </a:xfrm>
           <a:prstGeom prst="rect">
             <a:avLst/>
@@ -2584,7 +2584,7 @@
                 <a:ea typeface="Inter" pitchFamily="34" charset="-122"/>
                 <a:cs typeface="Inter" pitchFamily="34" charset="-120"/>
               </a:rPr>
-              <a:t>$306,971</a:t>
+              <a:t>$307K</a:t>
             </a:r>
             <a:endParaRPr lang="en-US" sz="1300" dirty="0"/>
           </a:p>
@@ -2623,7 +2623,7 @@
                 <a:ea typeface="Inter" pitchFamily="34" charset="-122"/>
                 <a:cs typeface="Inter" pitchFamily="34" charset="-120"/>
               </a:rPr>
-              <a:t>$228,073</a:t>
+              <a:t>$228K</a:t>
             </a:r>
             <a:endParaRPr lang="en-US" sz="1300" dirty="0"/>
           </a:p>
@@ -2662,7 +2662,7 @@
                 <a:ea typeface="Inter" pitchFamily="34" charset="-122"/>
                 <a:cs typeface="Inter" pitchFamily="34" charset="-120"/>
               </a:rPr>
-              <a:t>$78,899</a:t>
+              <a:t>$79K</a:t>
             </a:r>
             <a:endParaRPr lang="en-US" sz="1300" dirty="0"/>
           </a:p>
@@ -2716,7 +2716,7 @@
         <p:spPr>
           <a:xfrm>
             <a:off x="2670048" y="3744710"/>
-            <a:ext cx="64695" cy="136676"/>
+            <a:ext cx="83179" cy="136676"/>
           </a:xfrm>
           <a:prstGeom prst="rect">
             <a:avLst/>
@@ -2735,8 +2735,8 @@
         </p:nvSpPr>
         <p:spPr>
           <a:xfrm>
-            <a:off x="3108960" y="3688797"/>
-            <a:ext cx="1024128" cy="248502"/>
+            <a:off x="3218688" y="3688797"/>
+            <a:ext cx="914400" cy="248502"/>
           </a:xfrm>
           <a:prstGeom prst="rect">
             <a:avLst/>
@@ -2760,7 +2760,7 @@
                 <a:ea typeface="Inter" pitchFamily="34" charset="-122"/>
                 <a:cs typeface="Inter" pitchFamily="34" charset="-120"/>
               </a:rPr>
-              <a:t>$196,138</a:t>
+              <a:t>$196K</a:t>
             </a:r>
             <a:endParaRPr lang="en-US" sz="1300" dirty="0"/>
           </a:p>
@@ -2799,7 +2799,7 @@
                 <a:ea typeface="Inter" pitchFamily="34" charset="-122"/>
                 <a:cs typeface="Inter" pitchFamily="34" charset="-120"/>
               </a:rPr>
-              <a:t>$136,735</a:t>
+              <a:t>$137K</a:t>
             </a:r>
             <a:endParaRPr lang="en-US" sz="1300" dirty="0"/>
           </a:p>
@@ -2838,7 +2838,7 @@
                 <a:ea typeface="Inter" pitchFamily="34" charset="-122"/>
                 <a:cs typeface="Inter" pitchFamily="34" charset="-120"/>
               </a:rPr>
-              <a:t>$59,403</a:t>
+              <a:t>$59K</a:t>
             </a:r>
             <a:endParaRPr lang="en-US" sz="1300" dirty="0"/>
           </a:p>
@@ -2892,7 +2892,7 @@
         <p:spPr>
           <a:xfrm>
             <a:off x="2670048" y="3993212"/>
-            <a:ext cx="61139" cy="136676"/>
+            <a:ext cx="78607" cy="136676"/>
           </a:xfrm>
           <a:prstGeom prst="rect">
             <a:avLst/>
@@ -2911,8 +2911,8 @@
         </p:nvSpPr>
         <p:spPr>
           <a:xfrm>
-            <a:off x="3108960" y="3937299"/>
-            <a:ext cx="1024128" cy="248502"/>
+            <a:off x="3218688" y="3937299"/>
+            <a:ext cx="914400" cy="248502"/>
           </a:xfrm>
           <a:prstGeom prst="rect">
             <a:avLst/>
@@ -2936,7 +2936,7 @@
                 <a:ea typeface="Inter" pitchFamily="34" charset="-122"/>
                 <a:cs typeface="Inter" pitchFamily="34" charset="-120"/>
               </a:rPr>
-              <a:t>$185,357</a:t>
+              <a:t>$185K</a:t>
             </a:r>
             <a:endParaRPr lang="en-US" sz="1300" dirty="0"/>
           </a:p>
@@ -2975,7 +2975,7 @@
                 <a:ea typeface="Inter" pitchFamily="34" charset="-122"/>
                 <a:cs typeface="Inter" pitchFamily="34" charset="-120"/>
               </a:rPr>
-              <a:t>$128,599</a:t>
+              <a:t>$129K</a:t>
             </a:r>
             <a:endParaRPr lang="en-US" sz="1300" dirty="0"/>
           </a:p>
@@ -3014,7 +3014,7 @@
                 <a:ea typeface="Inter" pitchFamily="34" charset="-122"/>
                 <a:cs typeface="Inter" pitchFamily="34" charset="-120"/>
               </a:rPr>
-              <a:t>$56,758</a:t>
+              <a:t>$57K</a:t>
             </a:r>
             <a:endParaRPr lang="en-US" sz="1300" dirty="0"/>
           </a:p>
@@ -3068,7 +3068,7 @@
         <p:spPr>
           <a:xfrm>
             <a:off x="2670048" y="4241713"/>
-            <a:ext cx="59038" cy="136676"/>
+            <a:ext cx="75906" cy="136676"/>
           </a:xfrm>
           <a:prstGeom prst="rect">
             <a:avLst/>
@@ -3087,8 +3087,8 @@
         </p:nvSpPr>
         <p:spPr>
           <a:xfrm>
-            <a:off x="3108960" y="4185800"/>
-            <a:ext cx="1024128" cy="248502"/>
+            <a:off x="3218688" y="4185800"/>
+            <a:ext cx="914400" cy="248502"/>
           </a:xfrm>
           <a:prstGeom prst="rect">
             <a:avLst/>
@@ -3112,7 +3112,7 @@
                 <a:ea typeface="Inter" pitchFamily="34" charset="-122"/>
                 <a:cs typeface="Inter" pitchFamily="34" charset="-120"/>
               </a:rPr>
-              <a:t>$178,988</a:t>
+              <a:t>$179K</a:t>
             </a:r>
             <a:endParaRPr lang="en-US" sz="1300" dirty="0"/>
           </a:p>
@@ -3151,7 +3151,7 @@
                 <a:ea typeface="Inter" pitchFamily="34" charset="-122"/>
                 <a:cs typeface="Inter" pitchFamily="34" charset="-120"/>
               </a:rPr>
-              <a:t>$128,448</a:t>
+              <a:t>$128K</a:t>
             </a:r>
             <a:endParaRPr lang="en-US" sz="1300" dirty="0"/>
           </a:p>
@@ -3190,7 +3190,7 @@
                 <a:ea typeface="Inter" pitchFamily="34" charset="-122"/>
                 <a:cs typeface="Inter" pitchFamily="34" charset="-120"/>
               </a:rPr>
-              <a:t>$50,540</a:t>
+              <a:t>$51K</a:t>
             </a:r>
             <a:endParaRPr lang="en-US" sz="1300" dirty="0"/>
           </a:p>
@@ -3244,7 +3244,7 @@
         <p:spPr>
           <a:xfrm>
             <a:off x="2670048" y="4490215"/>
-            <a:ext cx="50079" cy="136676"/>
+            <a:ext cx="64387" cy="136676"/>
           </a:xfrm>
           <a:prstGeom prst="rect">
             <a:avLst/>
@@ -3263,8 +3263,8 @@
         </p:nvSpPr>
         <p:spPr>
           <a:xfrm>
-            <a:off x="3108960" y="4434302"/>
-            <a:ext cx="1024128" cy="248502"/>
+            <a:off x="3218688" y="4434302"/>
+            <a:ext cx="914400" cy="248502"/>
           </a:xfrm>
           <a:prstGeom prst="rect">
             <a:avLst/>
@@ -3288,7 +3288,7 @@
                 <a:ea typeface="Inter" pitchFamily="34" charset="-122"/>
                 <a:cs typeface="Inter" pitchFamily="34" charset="-120"/>
               </a:rPr>
-              <a:t>$151,825</a:t>
+              <a:t>$152K</a:t>
             </a:r>
             <a:endParaRPr lang="en-US" sz="1300" dirty="0"/>
           </a:p>
@@ -3327,7 +3327,7 @@
                 <a:ea typeface="Inter" pitchFamily="34" charset="-122"/>
                 <a:cs typeface="Inter" pitchFamily="34" charset="-120"/>
               </a:rPr>
-              <a:t>$102,262</a:t>
+              <a:t>$102K</a:t>
             </a:r>
             <a:endParaRPr lang="en-US" sz="1300" dirty="0"/>
           </a:p>
@@ -3366,7 +3366,7 @@
                 <a:ea typeface="Inter" pitchFamily="34" charset="-122"/>
                 <a:cs typeface="Inter" pitchFamily="34" charset="-120"/>
               </a:rPr>
-              <a:t>$49,564</a:t>
+              <a:t>$50K</a:t>
             </a:r>
             <a:endParaRPr lang="en-US" sz="1300" dirty="0"/>
           </a:p>
@@ -3420,7 +3420,7 @@
         <p:spPr>
           <a:xfrm>
             <a:off x="2670048" y="4738717"/>
-            <a:ext cx="49123" cy="136676"/>
+            <a:ext cx="63158" cy="136676"/>
           </a:xfrm>
           <a:prstGeom prst="rect">
             <a:avLst/>
@@ -3439,8 +3439,8 @@
         </p:nvSpPr>
         <p:spPr>
           <a:xfrm>
-            <a:off x="3108960" y="4682804"/>
-            <a:ext cx="1024128" cy="248502"/>
+            <a:off x="3218688" y="4682804"/>
+            <a:ext cx="914400" cy="248502"/>
           </a:xfrm>
           <a:prstGeom prst="rect">
             <a:avLst/>
@@ -3464,7 +3464,7 @@
                 <a:ea typeface="Inter" pitchFamily="34" charset="-122"/>
                 <a:cs typeface="Inter" pitchFamily="34" charset="-120"/>
               </a:rPr>
-              <a:t>$148,928</a:t>
+              <a:t>$149K</a:t>
             </a:r>
             <a:endParaRPr lang="en-US" sz="1300" dirty="0"/>
           </a:p>
@@ -3503,7 +3503,7 @@
                 <a:ea typeface="Inter" pitchFamily="34" charset="-122"/>
                 <a:cs typeface="Inter" pitchFamily="34" charset="-120"/>
               </a:rPr>
-              <a:t>$113,075</a:t>
+              <a:t>$113K</a:t>
             </a:r>
             <a:endParaRPr lang="en-US" sz="1300" dirty="0"/>
           </a:p>
@@ -3542,7 +3542,7 @@
                 <a:ea typeface="Inter" pitchFamily="34" charset="-122"/>
                 <a:cs typeface="Inter" pitchFamily="34" charset="-120"/>
               </a:rPr>
-              <a:t>$35,853</a:t>
+              <a:t>$36K</a:t>
             </a:r>
             <a:endParaRPr lang="en-US" sz="1300" dirty="0"/>
           </a:p>
@@ -3596,7 +3596,7 @@
         <p:spPr>
           <a:xfrm>
             <a:off x="2670048" y="4987218"/>
-            <a:ext cx="48257" cy="136676"/>
+            <a:ext cx="62045" cy="136676"/>
           </a:xfrm>
           <a:prstGeom prst="rect">
             <a:avLst/>
@@ -3615,8 +3615,8 @@
         </p:nvSpPr>
         <p:spPr>
           <a:xfrm>
-            <a:off x="3108960" y="4931305"/>
-            <a:ext cx="1024128" cy="248502"/>
+            <a:off x="3218688" y="4931305"/>
+            <a:ext cx="914400" cy="248502"/>
           </a:xfrm>
           <a:prstGeom prst="rect">
             <a:avLst/>
@@ -3640,7 +3640,7 @@
                 <a:ea typeface="Inter" pitchFamily="34" charset="-122"/>
                 <a:cs typeface="Inter" pitchFamily="34" charset="-120"/>
               </a:rPr>
-              <a:t>$146,304</a:t>
+              <a:t>$146K</a:t>
             </a:r>
             <a:endParaRPr lang="en-US" sz="1300" dirty="0"/>
           </a:p>
@@ -3679,7 +3679,7 @@
                 <a:ea typeface="Inter" pitchFamily="34" charset="-122"/>
                 <a:cs typeface="Inter" pitchFamily="34" charset="-120"/>
               </a:rPr>
-              <a:t>$105,012</a:t>
+              <a:t>$105K</a:t>
             </a:r>
             <a:endParaRPr lang="en-US" sz="1300" dirty="0"/>
           </a:p>
@@ -3718,7 +3718,7 @@
                 <a:ea typeface="Inter" pitchFamily="34" charset="-122"/>
                 <a:cs typeface="Inter" pitchFamily="34" charset="-120"/>
               </a:rPr>
-              <a:t>$41,292</a:t>
+              <a:t>$41K</a:t>
             </a:r>
             <a:endParaRPr lang="en-US" sz="1300" dirty="0"/>
           </a:p>
@@ -3772,7 +3772,7 @@
         <p:spPr>
           <a:xfrm>
             <a:off x="2670048" y="5235720"/>
-            <a:ext cx="46762" cy="136676"/>
+            <a:ext cx="60123" cy="136676"/>
           </a:xfrm>
           <a:prstGeom prst="rect">
             <a:avLst/>
@@ -3791,8 +3791,8 @@
         </p:nvSpPr>
         <p:spPr>
           <a:xfrm>
-            <a:off x="3108960" y="5179807"/>
-            <a:ext cx="1024128" cy="248502"/>
+            <a:off x="3218688" y="5179807"/>
+            <a:ext cx="914400" cy="248502"/>
           </a:xfrm>
           <a:prstGeom prst="rect">
             <a:avLst/>
@@ -3816,7 +3816,7 @@
                 <a:ea typeface="Inter" pitchFamily="34" charset="-122"/>
                 <a:cs typeface="Inter" pitchFamily="34" charset="-120"/>
               </a:rPr>
-              <a:t>$141,770</a:t>
+              <a:t>$142K</a:t>
             </a:r>
             <a:endParaRPr lang="en-US" sz="1300" dirty="0"/>
           </a:p>
@@ -3855,7 +3855,7 @@
                 <a:ea typeface="Inter" pitchFamily="34" charset="-122"/>
                 <a:cs typeface="Inter" pitchFamily="34" charset="-120"/>
               </a:rPr>
-              <a:t>$96,704</a:t>
+              <a:t>$97K</a:t>
             </a:r>
             <a:endParaRPr lang="en-US" sz="1300" dirty="0"/>
           </a:p>
@@ -3894,7 +3894,7 @@
                 <a:ea typeface="Inter" pitchFamily="34" charset="-122"/>
                 <a:cs typeface="Inter" pitchFamily="34" charset="-120"/>
               </a:rPr>
-              <a:t>$45,066</a:t>
+              <a:t>$45K</a:t>
             </a:r>
             <a:endParaRPr lang="en-US" sz="1300" dirty="0"/>
           </a:p>
@@ -3948,7 +3948,7 @@
         <p:spPr>
           <a:xfrm>
             <a:off x="2670048" y="5484222"/>
-            <a:ext cx="44339" cy="136676"/>
+            <a:ext cx="57007" cy="136676"/>
           </a:xfrm>
           <a:prstGeom prst="rect">
             <a:avLst/>
@@ -3967,8 +3967,8 @@
         </p:nvSpPr>
         <p:spPr>
           <a:xfrm>
-            <a:off x="3108960" y="5428309"/>
-            <a:ext cx="1024128" cy="248502"/>
+            <a:off x="3218688" y="5428309"/>
+            <a:ext cx="914400" cy="248502"/>
           </a:xfrm>
           <a:prstGeom prst="rect">
             <a:avLst/>
@@ -3992,7 +3992,7 @@
                 <a:ea typeface="Inter" pitchFamily="34" charset="-122"/>
                 <a:cs typeface="Inter" pitchFamily="34" charset="-120"/>
               </a:rPr>
-              <a:t>$134,424</a:t>
+              <a:t>$134K</a:t>
             </a:r>
             <a:endParaRPr lang="en-US" sz="1300" dirty="0"/>
           </a:p>
@@ -4031,7 +4031,7 @@
                 <a:ea typeface="Inter" pitchFamily="34" charset="-122"/>
                 <a:cs typeface="Inter" pitchFamily="34" charset="-120"/>
               </a:rPr>
-              <a:t>$99,999</a:t>
+              <a:t>$100K</a:t>
             </a:r>
             <a:endParaRPr lang="en-US" sz="1300" dirty="0"/>
           </a:p>
@@ -4070,7 +4070,7 @@
                 <a:ea typeface="Inter" pitchFamily="34" charset="-122"/>
                 <a:cs typeface="Inter" pitchFamily="34" charset="-120"/>
               </a:rPr>
-              <a:t>$34,425</a:t>
+              <a:t>$34K</a:t>
             </a:r>
             <a:endParaRPr lang="en-US" sz="1300" dirty="0"/>
           </a:p>
@@ -4124,7 +4124,7 @@
         <p:spPr>
           <a:xfrm>
             <a:off x="2670048" y="5732723"/>
-            <a:ext cx="44034" cy="136676"/>
+            <a:ext cx="56616" cy="136676"/>
           </a:xfrm>
           <a:prstGeom prst="rect">
             <a:avLst/>
@@ -4143,8 +4143,8 @@
         </p:nvSpPr>
         <p:spPr>
           <a:xfrm>
-            <a:off x="3108960" y="5676810"/>
-            <a:ext cx="1024128" cy="248502"/>
+            <a:off x="3218688" y="5676810"/>
+            <a:ext cx="914400" cy="248502"/>
           </a:xfrm>
           <a:prstGeom prst="rect">
             <a:avLst/>
@@ -4168,7 +4168,7 @@
                 <a:ea typeface="Inter" pitchFamily="34" charset="-122"/>
                 <a:cs typeface="Inter" pitchFamily="34" charset="-120"/>
               </a:rPr>
-              <a:t>$133,501</a:t>
+              <a:t>$134K</a:t>
             </a:r>
             <a:endParaRPr lang="en-US" sz="1300" dirty="0"/>
           </a:p>
@@ -4207,7 +4207,7 @@
                 <a:ea typeface="Inter" pitchFamily="34" charset="-122"/>
                 <a:cs typeface="Inter" pitchFamily="34" charset="-120"/>
               </a:rPr>
-              <a:t>$91,287</a:t>
+              <a:t>$91K</a:t>
             </a:r>
             <a:endParaRPr lang="en-US" sz="1300" dirty="0"/>
           </a:p>
@@ -4246,7 +4246,7 @@
                 <a:ea typeface="Inter" pitchFamily="34" charset="-122"/>
                 <a:cs typeface="Inter" pitchFamily="34" charset="-120"/>
               </a:rPr>
-              <a:t>$42,215</a:t>
+              <a:t>$42K</a:t>
             </a:r>
             <a:endParaRPr lang="en-US" sz="1300" dirty="0"/>
           </a:p>
@@ -4300,7 +4300,7 @@
         <p:spPr>
           <a:xfrm>
             <a:off x="8220456" y="1756697"/>
-            <a:ext cx="43777" cy="136676"/>
+            <a:ext cx="56285" cy="136676"/>
           </a:xfrm>
           <a:prstGeom prst="rect">
             <a:avLst/>
@@ -4319,8 +4319,8 @@
         </p:nvSpPr>
         <p:spPr>
           <a:xfrm>
-            <a:off x="8659368" y="1700784"/>
-            <a:ext cx="1024128" cy="248502"/>
+            <a:off x="8769096" y="1700784"/>
+            <a:ext cx="914400" cy="248502"/>
           </a:xfrm>
           <a:prstGeom prst="rect">
             <a:avLst/>
@@ -4344,7 +4344,7 @@
                 <a:ea typeface="Inter" pitchFamily="34" charset="-122"/>
                 <a:cs typeface="Inter" pitchFamily="34" charset="-120"/>
               </a:rPr>
-              <a:t>$132,722</a:t>
+              <a:t>$133K</a:t>
             </a:r>
             <a:endParaRPr lang="en-US" sz="1300" dirty="0"/>
           </a:p>
@@ -4383,7 +4383,7 @@
                 <a:ea typeface="Inter" pitchFamily="34" charset="-122"/>
                 <a:cs typeface="Inter" pitchFamily="34" charset="-120"/>
               </a:rPr>
-              <a:t>$95,285</a:t>
+              <a:t>$95K</a:t>
             </a:r>
             <a:endParaRPr lang="en-US" sz="1300" dirty="0"/>
           </a:p>
@@ -4422,7 +4422,7 @@
                 <a:ea typeface="Inter" pitchFamily="34" charset="-122"/>
                 <a:cs typeface="Inter" pitchFamily="34" charset="-120"/>
               </a:rPr>
-              <a:t>$37,436</a:t>
+              <a:t>$37K</a:t>
             </a:r>
             <a:endParaRPr lang="en-US" sz="1300" dirty="0"/>
           </a:p>
@@ -4476,7 +4476,7 @@
         <p:spPr>
           <a:xfrm>
             <a:off x="8220456" y="2005199"/>
-            <a:ext cx="43509" cy="136676"/>
+            <a:ext cx="55940" cy="136676"/>
           </a:xfrm>
           <a:prstGeom prst="rect">
             <a:avLst/>
@@ -4495,8 +4495,8 @@
         </p:nvSpPr>
         <p:spPr>
           <a:xfrm>
-            <a:off x="8659368" y="1949286"/>
-            <a:ext cx="1024128" cy="248502"/>
+            <a:off x="8769096" y="1949286"/>
+            <a:ext cx="914400" cy="248502"/>
           </a:xfrm>
           <a:prstGeom prst="rect">
             <a:avLst/>
@@ -4520,7 +4520,7 @@
                 <a:ea typeface="Inter" pitchFamily="34" charset="-122"/>
                 <a:cs typeface="Inter" pitchFamily="34" charset="-120"/>
               </a:rPr>
-              <a:t>$131,908</a:t>
+              <a:t>$132K</a:t>
             </a:r>
             <a:endParaRPr lang="en-US" sz="1300" dirty="0"/>
           </a:p>
@@ -4559,7 +4559,7 @@
                 <a:ea typeface="Inter" pitchFamily="34" charset="-122"/>
                 <a:cs typeface="Inter" pitchFamily="34" charset="-120"/>
               </a:rPr>
-              <a:t>$89,257</a:t>
+              <a:t>$89K</a:t>
             </a:r>
             <a:endParaRPr lang="en-US" sz="1300" dirty="0"/>
           </a:p>
@@ -4598,7 +4598,7 @@
                 <a:ea typeface="Inter" pitchFamily="34" charset="-122"/>
                 <a:cs typeface="Inter" pitchFamily="34" charset="-120"/>
               </a:rPr>
-              <a:t>$42,652</a:t>
+              <a:t>$43K</a:t>
             </a:r>
             <a:endParaRPr lang="en-US" sz="1300" dirty="0"/>
           </a:p>
@@ -4652,7 +4652,7 @@
         <p:spPr>
           <a:xfrm>
             <a:off x="8220456" y="2253700"/>
-            <a:ext cx="42758" cy="136676"/>
+            <a:ext cx="54975" cy="136676"/>
           </a:xfrm>
           <a:prstGeom prst="rect">
             <a:avLst/>
@@ -4671,8 +4671,8 @@
         </p:nvSpPr>
         <p:spPr>
           <a:xfrm>
-            <a:off x="8659368" y="2197787"/>
-            <a:ext cx="1024128" cy="248502"/>
+            <a:off x="8769096" y="2197787"/>
+            <a:ext cx="914400" cy="248502"/>
           </a:xfrm>
           <a:prstGeom prst="rect">
             <a:avLst/>
@@ -4696,7 +4696,7 @@
                 <a:ea typeface="Inter" pitchFamily="34" charset="-122"/>
                 <a:cs typeface="Inter" pitchFamily="34" charset="-120"/>
               </a:rPr>
-              <a:t>$129,631</a:t>
+              <a:t>$130K</a:t>
             </a:r>
             <a:endParaRPr lang="en-US" sz="1300" dirty="0"/>
           </a:p>
@@ -4735,7 +4735,7 @@
                 <a:ea typeface="Inter" pitchFamily="34" charset="-122"/>
                 <a:cs typeface="Inter" pitchFamily="34" charset="-120"/>
               </a:rPr>
-              <a:t>$91,262</a:t>
+              <a:t>$91K</a:t>
             </a:r>
             <a:endParaRPr lang="en-US" sz="1300" dirty="0"/>
           </a:p>
@@ -4774,7 +4774,7 @@
                 <a:ea typeface="Inter" pitchFamily="34" charset="-122"/>
                 <a:cs typeface="Inter" pitchFamily="34" charset="-120"/>
               </a:rPr>
-              <a:t>$38,370</a:t>
+              <a:t>$38K</a:t>
             </a:r>
             <a:endParaRPr lang="en-US" sz="1300" dirty="0"/>
           </a:p>
@@ -4828,7 +4828,7 @@
         <p:spPr>
           <a:xfrm>
             <a:off x="8220456" y="2502202"/>
-            <a:ext cx="40422" cy="136676"/>
+            <a:ext cx="51971" cy="136676"/>
           </a:xfrm>
           <a:prstGeom prst="rect">
             <a:avLst/>
@@ -4847,8 +4847,8 @@
         </p:nvSpPr>
         <p:spPr>
           <a:xfrm>
-            <a:off x="8659368" y="2446289"/>
-            <a:ext cx="1024128" cy="248502"/>
+            <a:off x="8769096" y="2446289"/>
+            <a:ext cx="914400" cy="248502"/>
           </a:xfrm>
           <a:prstGeom prst="rect">
             <a:avLst/>
@@ -4872,7 +4872,7 @@
                 <a:ea typeface="Inter" pitchFamily="34" charset="-122"/>
                 <a:cs typeface="Inter" pitchFamily="34" charset="-120"/>
               </a:rPr>
-              <a:t>$122,550</a:t>
+              <a:t>$123K</a:t>
             </a:r>
             <a:endParaRPr lang="en-US" sz="1300" dirty="0"/>
           </a:p>
@@ -4911,7 +4911,7 @@
                 <a:ea typeface="Inter" pitchFamily="34" charset="-122"/>
                 <a:cs typeface="Inter" pitchFamily="34" charset="-120"/>
               </a:rPr>
-              <a:t>$81,713</a:t>
+              <a:t>$82K</a:t>
             </a:r>
             <a:endParaRPr lang="en-US" sz="1300" dirty="0"/>
           </a:p>
@@ -4950,7 +4950,7 @@
                 <a:ea typeface="Inter" pitchFamily="34" charset="-122"/>
                 <a:cs typeface="Inter" pitchFamily="34" charset="-120"/>
               </a:rPr>
-              <a:t>$40,837</a:t>
+              <a:t>$41K</a:t>
             </a:r>
             <a:endParaRPr lang="en-US" sz="1300" dirty="0"/>
           </a:p>
@@ -5004,7 +5004,7 @@
         <p:spPr>
           <a:xfrm>
             <a:off x="8220456" y="2750703"/>
-            <a:ext cx="38930" cy="136676"/>
+            <a:ext cx="50052" cy="136676"/>
           </a:xfrm>
           <a:prstGeom prst="rect">
             <a:avLst/>
@@ -5023,8 +5023,8 @@
         </p:nvSpPr>
         <p:spPr>
           <a:xfrm>
-            <a:off x="8659368" y="2694791"/>
-            <a:ext cx="1024128" cy="248502"/>
+            <a:off x="8769096" y="2694791"/>
+            <a:ext cx="914400" cy="248502"/>
           </a:xfrm>
           <a:prstGeom prst="rect">
             <a:avLst/>
@@ -5048,7 +5048,7 @@
                 <a:ea typeface="Inter" pitchFamily="34" charset="-122"/>
                 <a:cs typeface="Inter" pitchFamily="34" charset="-120"/>
               </a:rPr>
-              <a:t>$118,025</a:t>
+              <a:t>$118K</a:t>
             </a:r>
             <a:endParaRPr lang="en-US" sz="1300" dirty="0"/>
           </a:p>
@@ -5087,7 +5087,7 @@
                 <a:ea typeface="Inter" pitchFamily="34" charset="-122"/>
                 <a:cs typeface="Inter" pitchFamily="34" charset="-120"/>
               </a:rPr>
-              <a:t>$89,434</a:t>
+              <a:t>$89K</a:t>
             </a:r>
             <a:endParaRPr lang="en-US" sz="1300" dirty="0"/>
           </a:p>
@@ -5126,7 +5126,7 @@
                 <a:ea typeface="Inter" pitchFamily="34" charset="-122"/>
                 <a:cs typeface="Inter" pitchFamily="34" charset="-120"/>
               </a:rPr>
-              <a:t>$28,590</a:t>
+              <a:t>$29K</a:t>
             </a:r>
             <a:endParaRPr lang="en-US" sz="1300" dirty="0"/>
           </a:p>
@@ -5180,7 +5180,7 @@
         <p:spPr>
           <a:xfrm>
             <a:off x="8220456" y="2999205"/>
-            <a:ext cx="37956" cy="136676"/>
+            <a:ext cx="48801" cy="136676"/>
           </a:xfrm>
           <a:prstGeom prst="rect">
             <a:avLst/>
@@ -5199,8 +5199,8 @@
         </p:nvSpPr>
         <p:spPr>
           <a:xfrm>
-            <a:off x="8659368" y="2943292"/>
-            <a:ext cx="1024128" cy="248502"/>
+            <a:off x="8769096" y="2943292"/>
+            <a:ext cx="914400" cy="248502"/>
           </a:xfrm>
           <a:prstGeom prst="rect">
             <a:avLst/>
@@ -5224,7 +5224,7 @@
                 <a:ea typeface="Inter" pitchFamily="34" charset="-122"/>
                 <a:cs typeface="Inter" pitchFamily="34" charset="-120"/>
               </a:rPr>
-              <a:t>$115,073</a:t>
+              <a:t>$115K</a:t>
             </a:r>
             <a:endParaRPr lang="en-US" sz="1300" dirty="0"/>
           </a:p>
@@ -5263,7 +5263,7 @@
                 <a:ea typeface="Inter" pitchFamily="34" charset="-122"/>
                 <a:cs typeface="Inter" pitchFamily="34" charset="-120"/>
               </a:rPr>
-              <a:t>$75,721</a:t>
+              <a:t>$76K</a:t>
             </a:r>
             <a:endParaRPr lang="en-US" sz="1300" dirty="0"/>
           </a:p>
@@ -5302,7 +5302,7 @@
                 <a:ea typeface="Inter" pitchFamily="34" charset="-122"/>
                 <a:cs typeface="Inter" pitchFamily="34" charset="-120"/>
               </a:rPr>
-              <a:t>$39,353</a:t>
+              <a:t>$39K</a:t>
             </a:r>
             <a:endParaRPr lang="en-US" sz="1300" dirty="0"/>
           </a:p>
@@ -5356,7 +5356,7 @@
         <p:spPr>
           <a:xfrm>
             <a:off x="8220456" y="3247707"/>
-            <a:ext cx="33319" cy="136676"/>
+            <a:ext cx="42839" cy="136676"/>
           </a:xfrm>
           <a:prstGeom prst="rect">
             <a:avLst/>
@@ -5375,8 +5375,8 @@
         </p:nvSpPr>
         <p:spPr>
           <a:xfrm>
-            <a:off x="8659368" y="3191794"/>
-            <a:ext cx="1024128" cy="248502"/>
+            <a:off x="8769096" y="3191794"/>
+            <a:ext cx="914400" cy="248502"/>
           </a:xfrm>
           <a:prstGeom prst="rect">
             <a:avLst/>
@@ -5400,7 +5400,7 @@
                 <a:ea typeface="Inter" pitchFamily="34" charset="-122"/>
                 <a:cs typeface="Inter" pitchFamily="34" charset="-120"/>
               </a:rPr>
-              <a:t>$101,015</a:t>
+              <a:t>$101K</a:t>
             </a:r>
             <a:endParaRPr lang="en-US" sz="1300" dirty="0"/>
           </a:p>
@@ -5439,7 +5439,7 @@
                 <a:ea typeface="Inter" pitchFamily="34" charset="-122"/>
                 <a:cs typeface="Inter" pitchFamily="34" charset="-120"/>
               </a:rPr>
-              <a:t>$70,208</a:t>
+              <a:t>$70K</a:t>
             </a:r>
             <a:endParaRPr lang="en-US" sz="1300" dirty="0"/>
           </a:p>
@@ -5478,7 +5478,7 @@
                 <a:ea typeface="Inter" pitchFamily="34" charset="-122"/>
                 <a:cs typeface="Inter" pitchFamily="34" charset="-120"/>
               </a:rPr>
-              <a:t>$30,807</a:t>
+              <a:t>$31K</a:t>
             </a:r>
             <a:endParaRPr lang="en-US" sz="1300" dirty="0"/>
           </a:p>
@@ -5532,7 +5532,7 @@
         <p:spPr>
           <a:xfrm>
             <a:off x="8220456" y="3496208"/>
-            <a:ext cx="32649" cy="136676"/>
+            <a:ext cx="41978" cy="136676"/>
           </a:xfrm>
           <a:prstGeom prst="rect">
             <a:avLst/>
@@ -5551,8 +5551,8 @@
         </p:nvSpPr>
         <p:spPr>
           <a:xfrm>
-            <a:off x="8659368" y="3440296"/>
-            <a:ext cx="1024128" cy="248502"/>
+            <a:off x="8769096" y="3440296"/>
+            <a:ext cx="914400" cy="248502"/>
           </a:xfrm>
           <a:prstGeom prst="rect">
             <a:avLst/>
@@ -5576,7 +5576,7 @@
                 <a:ea typeface="Inter" pitchFamily="34" charset="-122"/>
                 <a:cs typeface="Inter" pitchFamily="34" charset="-120"/>
               </a:rPr>
-              <a:t>$98,985</a:t>
+              <a:t>$99K</a:t>
             </a:r>
             <a:endParaRPr lang="en-US" sz="1300" dirty="0"/>
           </a:p>
@@ -5615,7 +5615,7 @@
                 <a:ea typeface="Inter" pitchFamily="34" charset="-122"/>
                 <a:cs typeface="Inter" pitchFamily="34" charset="-120"/>
               </a:rPr>
-              <a:t>$68,101</a:t>
+              <a:t>$68K</a:t>
             </a:r>
             <a:endParaRPr lang="en-US" sz="1300" dirty="0"/>
           </a:p>
@@ -5654,7 +5654,7 @@
                 <a:ea typeface="Inter" pitchFamily="34" charset="-122"/>
                 <a:cs typeface="Inter" pitchFamily="34" charset="-120"/>
               </a:rPr>
-              <a:t>$30,883</a:t>
+              <a:t>$31K</a:t>
             </a:r>
             <a:endParaRPr lang="en-US" sz="1300" dirty="0"/>
           </a:p>
@@ -5708,7 +5708,7 @@
         <p:spPr>
           <a:xfrm>
             <a:off x="8220456" y="3744710"/>
-            <a:ext cx="29384" cy="136676"/>
+            <a:ext cx="37779" cy="136676"/>
           </a:xfrm>
           <a:prstGeom prst="rect">
             <a:avLst/>
@@ -5727,8 +5727,8 @@
         </p:nvSpPr>
         <p:spPr>
           <a:xfrm>
-            <a:off x="8659368" y="3688797"/>
-            <a:ext cx="1024128" cy="248502"/>
+            <a:off x="8769096" y="3688797"/>
+            <a:ext cx="914400" cy="248502"/>
           </a:xfrm>
           <a:prstGeom prst="rect">
             <a:avLst/>
@@ -5752,7 +5752,7 @@
                 <a:ea typeface="Inter" pitchFamily="34" charset="-122"/>
                 <a:cs typeface="Inter" pitchFamily="34" charset="-120"/>
               </a:rPr>
-              <a:t>$89,084</a:t>
+              <a:t>$89K</a:t>
             </a:r>
             <a:endParaRPr lang="en-US" sz="1300" dirty="0"/>
           </a:p>
@@ -5791,7 +5791,7 @@
                 <a:ea typeface="Inter" pitchFamily="34" charset="-122"/>
                 <a:cs typeface="Inter" pitchFamily="34" charset="-120"/>
               </a:rPr>
-              <a:t>$58,429</a:t>
+              <a:t>$58K</a:t>
             </a:r>
             <a:endParaRPr lang="en-US" sz="1300" dirty="0"/>
           </a:p>
@@ -5830,7 +5830,7 @@
                 <a:ea typeface="Inter" pitchFamily="34" charset="-122"/>
                 <a:cs typeface="Inter" pitchFamily="34" charset="-120"/>
               </a:rPr>
-              <a:t>$30,655</a:t>
+              <a:t>$31K</a:t>
             </a:r>
             <a:endParaRPr lang="en-US" sz="1300" dirty="0"/>
           </a:p>
@@ -5884,7 +5884,7 @@
         <p:spPr>
           <a:xfrm>
             <a:off x="8220456" y="3993212"/>
-            <a:ext cx="29214" cy="136676"/>
+            <a:ext cx="37560" cy="136676"/>
           </a:xfrm>
           <a:prstGeom prst="rect">
             <a:avLst/>
@@ -5903,8 +5903,8 @@
         </p:nvSpPr>
         <p:spPr>
           <a:xfrm>
-            <a:off x="8659368" y="3937299"/>
-            <a:ext cx="1024128" cy="248502"/>
+            <a:off x="8769096" y="3937299"/>
+            <a:ext cx="914400" cy="248502"/>
           </a:xfrm>
           <a:prstGeom prst="rect">
             <a:avLst/>
@@ -5928,7 +5928,7 @@
                 <a:ea typeface="Inter" pitchFamily="34" charset="-122"/>
                 <a:cs typeface="Inter" pitchFamily="34" charset="-120"/>
               </a:rPr>
-              <a:t>$88,568</a:t>
+              <a:t>$89K</a:t>
             </a:r>
             <a:endParaRPr lang="en-US" sz="1300" dirty="0"/>
           </a:p>
@@ -5967,7 +5967,7 @@
                 <a:ea typeface="Inter" pitchFamily="34" charset="-122"/>
                 <a:cs typeface="Inter" pitchFamily="34" charset="-120"/>
               </a:rPr>
-              <a:t>$61,607</a:t>
+              <a:t>$62K</a:t>
             </a:r>
             <a:endParaRPr lang="en-US" sz="1300" dirty="0"/>
           </a:p>
@@ -6006,7 +6006,7 @@
                 <a:ea typeface="Inter" pitchFamily="34" charset="-122"/>
                 <a:cs typeface="Inter" pitchFamily="34" charset="-120"/>
               </a:rPr>
-              <a:t>$26,961</a:t>
+              <a:t>$27K</a:t>
             </a:r>
             <a:endParaRPr lang="en-US" sz="1300" dirty="0"/>
           </a:p>
@@ -6060,7 +6060,7 @@
         <p:spPr>
           <a:xfrm>
             <a:off x="8220456" y="4241713"/>
-            <a:ext cx="22369" cy="136676"/>
+            <a:ext cx="28760" cy="136676"/>
           </a:xfrm>
           <a:prstGeom prst="rect">
             <a:avLst/>
@@ -6079,8 +6079,8 @@
         </p:nvSpPr>
         <p:spPr>
           <a:xfrm>
-            <a:off x="8659368" y="4185800"/>
-            <a:ext cx="1024128" cy="248502"/>
+            <a:off x="8769096" y="4185800"/>
+            <a:ext cx="914400" cy="248502"/>
           </a:xfrm>
           <a:prstGeom prst="rect">
             <a:avLst/>
@@ -6104,7 +6104,7 @@
                 <a:ea typeface="Inter" pitchFamily="34" charset="-122"/>
                 <a:cs typeface="Inter" pitchFamily="34" charset="-120"/>
               </a:rPr>
-              <a:t>$67,817</a:t>
+              <a:t>$68K</a:t>
             </a:r>
             <a:endParaRPr lang="en-US" sz="1300" dirty="0"/>
           </a:p>
@@ -6143,7 +6143,7 @@
                 <a:ea typeface="Inter" pitchFamily="34" charset="-122"/>
                 <a:cs typeface="Inter" pitchFamily="34" charset="-120"/>
               </a:rPr>
-              <a:t>$48,880</a:t>
+              <a:t>$49K</a:t>
             </a:r>
             <a:endParaRPr lang="en-US" sz="1300" dirty="0"/>
           </a:p>
@@ -6182,7 +6182,7 @@
                 <a:ea typeface="Inter" pitchFamily="34" charset="-122"/>
                 <a:cs typeface="Inter" pitchFamily="34" charset="-120"/>
               </a:rPr>
-              <a:t>$18,937</a:t>
+              <a:t>$19K</a:t>
             </a:r>
             <a:endParaRPr lang="en-US" sz="1300" dirty="0"/>
           </a:p>
@@ -6236,7 +6236,7 @@
         <p:spPr>
           <a:xfrm>
             <a:off x="8220456" y="4490215"/>
-            <a:ext cx="21616" cy="136676"/>
+            <a:ext cx="27792" cy="136676"/>
           </a:xfrm>
           <a:prstGeom prst="rect">
             <a:avLst/>
@@ -6255,8 +6255,8 @@
         </p:nvSpPr>
         <p:spPr>
           <a:xfrm>
-            <a:off x="8659368" y="4434302"/>
-            <a:ext cx="1024128" cy="248502"/>
+            <a:off x="8769096" y="4434302"/>
+            <a:ext cx="914400" cy="248502"/>
           </a:xfrm>
           <a:prstGeom prst="rect">
             <a:avLst/>
@@ -6280,7 +6280,7 @@
                 <a:ea typeface="Inter" pitchFamily="34" charset="-122"/>
                 <a:cs typeface="Inter" pitchFamily="34" charset="-120"/>
               </a:rPr>
-              <a:t>$65,535</a:t>
+              <a:t>$66K</a:t>
             </a:r>
             <a:endParaRPr lang="en-US" sz="1300" dirty="0"/>
           </a:p>
@@ -6319,7 +6319,7 @@
                 <a:ea typeface="Inter" pitchFamily="34" charset="-122"/>
                 <a:cs typeface="Inter" pitchFamily="34" charset="-120"/>
               </a:rPr>
-              <a:t>$42,792</a:t>
+              <a:t>$43K</a:t>
             </a:r>
             <a:endParaRPr lang="en-US" sz="1300" dirty="0"/>
           </a:p>
@@ -6358,7 +6358,7 @@
                 <a:ea typeface="Inter" pitchFamily="34" charset="-122"/>
                 <a:cs typeface="Inter" pitchFamily="34" charset="-120"/>
               </a:rPr>
-              <a:t>$22,743</a:t>
+              <a:t>$23K</a:t>
             </a:r>
             <a:endParaRPr lang="en-US" sz="1300" dirty="0"/>
           </a:p>
@@ -6412,7 +6412,7 @@
         <p:spPr>
           <a:xfrm>
             <a:off x="8220456" y="4738717"/>
-            <a:ext cx="20062" cy="136676"/>
+            <a:ext cx="25793" cy="136676"/>
           </a:xfrm>
           <a:prstGeom prst="rect">
             <a:avLst/>
@@ -6431,8 +6431,8 @@
         </p:nvSpPr>
         <p:spPr>
           <a:xfrm>
-            <a:off x="8659368" y="4682804"/>
-            <a:ext cx="1024128" cy="248502"/>
+            <a:off x="8769096" y="4682804"/>
+            <a:ext cx="914400" cy="248502"/>
           </a:xfrm>
           <a:prstGeom prst="rect">
             <a:avLst/>
@@ -6456,7 +6456,7 @@
                 <a:ea typeface="Inter" pitchFamily="34" charset="-122"/>
                 <a:cs typeface="Inter" pitchFamily="34" charset="-120"/>
               </a:rPr>
-              <a:t>$60,821</a:t>
+              <a:t>$61K</a:t>
             </a:r>
             <a:endParaRPr lang="en-US" sz="1300" dirty="0"/>
           </a:p>
@@ -6495,7 +6495,7 @@
                 <a:ea typeface="Inter" pitchFamily="34" charset="-122"/>
                 <a:cs typeface="Inter" pitchFamily="34" charset="-120"/>
               </a:rPr>
-              <a:t>$40,050</a:t>
+              <a:t>$40K</a:t>
             </a:r>
             <a:endParaRPr lang="en-US" sz="1300" dirty="0"/>
           </a:p>
@@ -6534,7 +6534,7 @@
                 <a:ea typeface="Inter" pitchFamily="34" charset="-122"/>
                 <a:cs typeface="Inter" pitchFamily="34" charset="-120"/>
               </a:rPr>
-              <a:t>$20,772</a:t>
+              <a:t>$21K</a:t>
             </a:r>
             <a:endParaRPr lang="en-US" sz="1300" dirty="0"/>
           </a:p>
@@ -6588,7 +6588,7 @@
         <p:spPr>
           <a:xfrm>
             <a:off x="8220456" y="4987218"/>
-            <a:ext cx="18885" cy="136676"/>
+            <a:ext cx="24281" cy="136676"/>
           </a:xfrm>
           <a:prstGeom prst="rect">
             <a:avLst/>
@@ -6607,8 +6607,8 @@
         </p:nvSpPr>
         <p:spPr>
           <a:xfrm>
-            <a:off x="8659368" y="4931305"/>
-            <a:ext cx="1024128" cy="248502"/>
+            <a:off x="8769096" y="4931305"/>
+            <a:ext cx="914400" cy="248502"/>
           </a:xfrm>
           <a:prstGeom prst="rect">
             <a:avLst/>
@@ -6632,7 +6632,7 @@
                 <a:ea typeface="Inter" pitchFamily="34" charset="-122"/>
                 <a:cs typeface="Inter" pitchFamily="34" charset="-120"/>
               </a:rPr>
-              <a:t>$57,255</a:t>
+              <a:t>$57K</a:t>
             </a:r>
             <a:endParaRPr lang="en-US" sz="1300" dirty="0"/>
           </a:p>
@@ -6671,7 +6671,7 @@
                 <a:ea typeface="Inter" pitchFamily="34" charset="-122"/>
                 <a:cs typeface="Inter" pitchFamily="34" charset="-120"/>
               </a:rPr>
-              <a:t>$37,516</a:t>
+              <a:t>$38K</a:t>
             </a:r>
             <a:endParaRPr lang="en-US" sz="1300" dirty="0"/>
           </a:p>
@@ -6710,7 +6710,7 @@
                 <a:ea typeface="Inter" pitchFamily="34" charset="-122"/>
                 <a:cs typeface="Inter" pitchFamily="34" charset="-120"/>
               </a:rPr>
-              <a:t>$19,739</a:t>
+              <a:t>$20K</a:t>
             </a:r>
             <a:endParaRPr lang="en-US" sz="1300" dirty="0"/>
           </a:p>
@@ -6764,7 +6764,7 @@
         <p:spPr>
           <a:xfrm>
             <a:off x="8220456" y="5235720"/>
-            <a:ext cx="18288" cy="136676"/>
+            <a:ext cx="18556" cy="136676"/>
           </a:xfrm>
           <a:prstGeom prst="rect">
             <a:avLst/>
@@ -6783,8 +6783,8 @@
         </p:nvSpPr>
         <p:spPr>
           <a:xfrm>
-            <a:off x="8659368" y="5179807"/>
-            <a:ext cx="1024128" cy="248502"/>
+            <a:off x="8769096" y="5179807"/>
+            <a:ext cx="914400" cy="248502"/>
           </a:xfrm>
           <a:prstGeom prst="rect">
             <a:avLst/>
@@ -6808,7 +6808,7 @@
                 <a:ea typeface="Inter" pitchFamily="34" charset="-122"/>
                 <a:cs typeface="Inter" pitchFamily="34" charset="-120"/>
               </a:rPr>
-              <a:t>$43,756</a:t>
+              <a:t>$44K</a:t>
             </a:r>
             <a:endParaRPr lang="en-US" sz="1300" dirty="0"/>
           </a:p>
@@ -6847,7 +6847,7 @@
                 <a:ea typeface="Inter" pitchFamily="34" charset="-122"/>
                 <a:cs typeface="Inter" pitchFamily="34" charset="-120"/>
               </a:rPr>
-              <a:t>$27,475</a:t>
+              <a:t>$27K</a:t>
             </a:r>
             <a:endParaRPr lang="en-US" sz="1300" dirty="0"/>
           </a:p>
@@ -6886,7 +6886,7 @@
                 <a:ea typeface="Inter" pitchFamily="34" charset="-122"/>
                 <a:cs typeface="Inter" pitchFamily="34" charset="-120"/>
               </a:rPr>
-              <a:t>$16,281</a:t>
+              <a:t>$16K</a:t>
             </a:r>
             <a:endParaRPr lang="en-US" sz="1300" dirty="0"/>
           </a:p>
@@ -6959,8 +6959,8 @@
         </p:nvSpPr>
         <p:spPr>
           <a:xfrm>
-            <a:off x="8659368" y="5428309"/>
-            <a:ext cx="1024128" cy="248502"/>
+            <a:off x="8769096" y="5428309"/>
+            <a:ext cx="914400" cy="248502"/>
           </a:xfrm>
           <a:prstGeom prst="rect">
             <a:avLst/>
@@ -6984,7 +6984,7 @@
                 <a:ea typeface="Inter" pitchFamily="34" charset="-122"/>
                 <a:cs typeface="Inter" pitchFamily="34" charset="-120"/>
               </a:rPr>
-              <a:t>$38,856</a:t>
+              <a:t>$39K</a:t>
             </a:r>
             <a:endParaRPr lang="en-US" sz="1300" dirty="0"/>
           </a:p>
@@ -7023,7 +7023,7 @@
                 <a:ea typeface="Inter" pitchFamily="34" charset="-122"/>
                 <a:cs typeface="Inter" pitchFamily="34" charset="-120"/>
               </a:rPr>
-              <a:t>$23,679</a:t>
+              <a:t>$24K</a:t>
             </a:r>
             <a:endParaRPr lang="en-US" sz="1300" dirty="0"/>
           </a:p>
@@ -7062,7 +7062,7 @@
                 <a:ea typeface="Inter" pitchFamily="34" charset="-122"/>
                 <a:cs typeface="Inter" pitchFamily="34" charset="-120"/>
               </a:rPr>
-              <a:t>$15,178</a:t>
+              <a:t>$15K</a:t>
             </a:r>
             <a:endParaRPr lang="en-US" sz="1300" dirty="0"/>
           </a:p>

--- a/day2-deck/decks/Hours per RO Value - Review.pptx
+++ b/day2-deck/decks/Hours per RO Value - Review.pptx
@@ -961,7 +961,7 @@
                 <a:ea typeface="Inter" pitchFamily="34" charset="-122"/>
                 <a:cs typeface="Inter" pitchFamily="34" charset="-120"/>
               </a:rPr>
-              <a:t>THE CP ENGINE</a:t>
+              <a:t>CUSTOMER PAY</a:t>
             </a:r>
             <a:endParaRPr lang="en-US" sz="1400" dirty="0"/>
           </a:p>

--- a/day2-deck/decks/Hours per RO Value - Review.pptx
+++ b/day2-deck/decks/Hours per RO Value - Review.pptx
@@ -502,7 +502,7 @@
           <a:p>
             <a:r>
               <a:rPr lang="en-US" dirty="0"/>
-              <a:t>Source: Qlik - Closed Repair Orders. Customer pay, all CP ROs, Jan-Sep 2026 by close date. Same-store, INEOS excluded (opened 2026). GMC Prescott body shop labor types excluded. Each store: 0.1 x its CP RO count x its own customer-pay labor gross and parts gross per sold hour; a year = Jan-Sep x 12 / 9. Gross, not sale, so it will not match the $4,543,691 labor sale on the Hours per RO slide. Gross/yr = labor gross + parts gross a year. Parts assumes the extra hours carry the store's average customer-pay parts gross per sold hour.Talk track: 0.1 hour is six minutes of sold time on a visit - one more inspection item sold, one tire rotation, one cabin filter. Parts gross assumes the extra hours carry the store's usual parts.
+              <a:t>Takeaway (off the slide): 0.1 hour more on every CP RO is worth $6,602,564 a year in added gross. Toyota Henderson leads at $1,164,334.Source: Qlik - Closed Repair Orders. Customer pay, all CP ROs, Jan-Sep 2026 by close date. Same-store, INEOS excluded (opened 2026). GMC Prescott body shop labor types excluded. Each store: 0.1 x its CP RO count x its own customer-pay labor gross and parts gross per sold hour; a year = Jan-Sep x 12 / 9. Gross, not sale, so it will not match the $4,543,691 labor sale on the Hours per RO slide. Gross/yr = labor gross + parts gross a year. Parts assumes the extra hours carry the store's average customer-pay parts gross per sold hour.Talk track: 0.1 hour is six minutes of sold time on a visit - one more inspection item sold, one tire rotation, one cabin filter. Parts gross assumes the extra hours carry the store's usual parts.
 TOYOTA HENDERSON: 53,084 CP ROs, 1.47 hrs/RO; +0.1 = $97,028 gross a month, $1,164,334 a year (labor $868,256, parts $296,078)
 HONDA HENDERSON: 22,527 CP ROs, 1.97 hrs/RO; +0.1 = $42,821 gross a month, $513,852 a year (labor $396,326, parts $117,527)
 CHEVY LV: 19,520 CP ROs, 2.30 hrs/RO; +0.1 = $34,189 gross a month, $410,273 a year (labor $295,521, parts $114,751)
@@ -1015,7 +1015,7 @@
         <p:spPr>
           <a:xfrm>
             <a:off x="457200" y="1207008"/>
-            <a:ext cx="11274552" cy="4782312"/>
+            <a:ext cx="11274552" cy="5148072"/>
           </a:xfrm>
           <a:prstGeom prst="rect">
             <a:avLst/>
@@ -1113,7 +1113,7 @@
         <p:spPr>
           <a:xfrm>
             <a:off x="658368" y="1700784"/>
-            <a:ext cx="310896" cy="248502"/>
+            <a:ext cx="310896" cy="270017"/>
           </a:xfrm>
           <a:prstGeom prst="rect">
             <a:avLst/>
@@ -1152,7 +1152,7 @@
         <p:spPr>
           <a:xfrm>
             <a:off x="1014984" y="1700784"/>
-            <a:ext cx="2011680" cy="248502"/>
+            <a:ext cx="2011680" cy="270017"/>
           </a:xfrm>
           <a:prstGeom prst="rect">
             <a:avLst/>
@@ -1190,8 +1190,8 @@
         </p:nvSpPr>
         <p:spPr>
           <a:xfrm>
-            <a:off x="3099816" y="1756697"/>
-            <a:ext cx="1847088" cy="136676"/>
+            <a:off x="3099816" y="1761538"/>
+            <a:ext cx="1847088" cy="148509"/>
           </a:xfrm>
           <a:prstGeom prst="rect">
             <a:avLst/>
@@ -1211,7 +1211,7 @@
         <p:spPr>
           <a:xfrm>
             <a:off x="5001768" y="1700784"/>
-            <a:ext cx="914400" cy="248502"/>
+            <a:ext cx="914400" cy="270017"/>
           </a:xfrm>
           <a:prstGeom prst="rect">
             <a:avLst/>
@@ -1249,8 +1249,8 @@
         </p:nvSpPr>
         <p:spPr>
           <a:xfrm>
-            <a:off x="658368" y="1949286"/>
-            <a:ext cx="310896" cy="248502"/>
+            <a:off x="658368" y="1970801"/>
+            <a:ext cx="310896" cy="270017"/>
           </a:xfrm>
           <a:prstGeom prst="rect">
             <a:avLst/>
@@ -1288,8 +1288,8 @@
         </p:nvSpPr>
         <p:spPr>
           <a:xfrm>
-            <a:off x="1014984" y="1949286"/>
-            <a:ext cx="2011680" cy="248502"/>
+            <a:off x="1014984" y="1970801"/>
+            <a:ext cx="2011680" cy="270017"/>
           </a:xfrm>
           <a:prstGeom prst="rect">
             <a:avLst/>
@@ -1327,8 +1327,8 @@
         </p:nvSpPr>
         <p:spPr>
           <a:xfrm>
-            <a:off x="3099816" y="2005199"/>
-            <a:ext cx="815170" cy="136676"/>
+            <a:off x="3099816" y="2031555"/>
+            <a:ext cx="815170" cy="148509"/>
           </a:xfrm>
           <a:prstGeom prst="rect">
             <a:avLst/>
@@ -1347,8 +1347,8 @@
         </p:nvSpPr>
         <p:spPr>
           <a:xfrm>
-            <a:off x="5001768" y="1949286"/>
-            <a:ext cx="914400" cy="248502"/>
+            <a:off x="5001768" y="1970801"/>
+            <a:ext cx="914400" cy="270017"/>
           </a:xfrm>
           <a:prstGeom prst="rect">
             <a:avLst/>
@@ -1386,8 +1386,8 @@
         </p:nvSpPr>
         <p:spPr>
           <a:xfrm>
-            <a:off x="658368" y="2197787"/>
-            <a:ext cx="310896" cy="248502"/>
+            <a:off x="658368" y="2240818"/>
+            <a:ext cx="310896" cy="270017"/>
           </a:xfrm>
           <a:prstGeom prst="rect">
             <a:avLst/>
@@ -1425,8 +1425,8 @@
         </p:nvSpPr>
         <p:spPr>
           <a:xfrm>
-            <a:off x="1014984" y="2197787"/>
-            <a:ext cx="2011680" cy="248502"/>
+            <a:off x="1014984" y="2240818"/>
+            <a:ext cx="2011680" cy="270017"/>
           </a:xfrm>
           <a:prstGeom prst="rect">
             <a:avLst/>
@@ -1464,8 +1464,8 @@
         </p:nvSpPr>
         <p:spPr>
           <a:xfrm>
-            <a:off x="3099816" y="2253700"/>
-            <a:ext cx="650852" cy="136676"/>
+            <a:off x="3099816" y="2301572"/>
+            <a:ext cx="650852" cy="148509"/>
           </a:xfrm>
           <a:prstGeom prst="rect">
             <a:avLst/>
@@ -1484,8 +1484,8 @@
         </p:nvSpPr>
         <p:spPr>
           <a:xfrm>
-            <a:off x="5001768" y="2197787"/>
-            <a:ext cx="914400" cy="248502"/>
+            <a:off x="5001768" y="2240818"/>
+            <a:ext cx="914400" cy="270017"/>
           </a:xfrm>
           <a:prstGeom prst="rect">
             <a:avLst/>
@@ -1523,8 +1523,8 @@
         </p:nvSpPr>
         <p:spPr>
           <a:xfrm>
-            <a:off x="658368" y="2446289"/>
-            <a:ext cx="310896" cy="248502"/>
+            <a:off x="658368" y="2510835"/>
+            <a:ext cx="310896" cy="270017"/>
           </a:xfrm>
           <a:prstGeom prst="rect">
             <a:avLst/>
@@ -1562,8 +1562,8 @@
         </p:nvSpPr>
         <p:spPr>
           <a:xfrm>
-            <a:off x="1014984" y="2446289"/>
-            <a:ext cx="2011680" cy="248502"/>
+            <a:off x="1014984" y="2510835"/>
+            <a:ext cx="2011680" cy="270017"/>
           </a:xfrm>
           <a:prstGeom prst="rect">
             <a:avLst/>
@@ -1601,8 +1601,8 @@
         </p:nvSpPr>
         <p:spPr>
           <a:xfrm>
-            <a:off x="3099816" y="2502202"/>
-            <a:ext cx="548052" cy="136676"/>
+            <a:off x="3099816" y="2571589"/>
+            <a:ext cx="548052" cy="148509"/>
           </a:xfrm>
           <a:prstGeom prst="rect">
             <a:avLst/>
@@ -1621,8 +1621,8 @@
         </p:nvSpPr>
         <p:spPr>
           <a:xfrm>
-            <a:off x="5001768" y="2446289"/>
-            <a:ext cx="914400" cy="248502"/>
+            <a:off x="5001768" y="2510835"/>
+            <a:ext cx="914400" cy="270017"/>
           </a:xfrm>
           <a:prstGeom prst="rect">
             <a:avLst/>
@@ -1660,8 +1660,8 @@
         </p:nvSpPr>
         <p:spPr>
           <a:xfrm>
-            <a:off x="658368" y="2694791"/>
-            <a:ext cx="310896" cy="248502"/>
+            <a:off x="658368" y="2780852"/>
+            <a:ext cx="310896" cy="270017"/>
           </a:xfrm>
           <a:prstGeom prst="rect">
             <a:avLst/>
@@ -1699,8 +1699,8 @@
         </p:nvSpPr>
         <p:spPr>
           <a:xfrm>
-            <a:off x="1014984" y="2694791"/>
-            <a:ext cx="2011680" cy="248502"/>
+            <a:off x="1014984" y="2780852"/>
+            <a:ext cx="2011680" cy="270017"/>
           </a:xfrm>
           <a:prstGeom prst="rect">
             <a:avLst/>
@@ -1738,8 +1738,8 @@
         </p:nvSpPr>
         <p:spPr>
           <a:xfrm>
-            <a:off x="3099816" y="2750703"/>
-            <a:ext cx="538230" cy="136676"/>
+            <a:off x="3099816" y="2841606"/>
+            <a:ext cx="538230" cy="148509"/>
           </a:xfrm>
           <a:prstGeom prst="rect">
             <a:avLst/>
@@ -1758,8 +1758,8 @@
         </p:nvSpPr>
         <p:spPr>
           <a:xfrm>
-            <a:off x="5001768" y="2694791"/>
-            <a:ext cx="914400" cy="248502"/>
+            <a:off x="5001768" y="2780852"/>
+            <a:ext cx="914400" cy="270017"/>
           </a:xfrm>
           <a:prstGeom prst="rect">
             <a:avLst/>
@@ -1797,8 +1797,8 @@
         </p:nvSpPr>
         <p:spPr>
           <a:xfrm>
-            <a:off x="658368" y="2943292"/>
-            <a:ext cx="310896" cy="248502"/>
+            <a:off x="658368" y="3050869"/>
+            <a:ext cx="310896" cy="270017"/>
           </a:xfrm>
           <a:prstGeom prst="rect">
             <a:avLst/>
@@ -1836,8 +1836,8 @@
         </p:nvSpPr>
         <p:spPr>
           <a:xfrm>
-            <a:off x="1014984" y="2943292"/>
-            <a:ext cx="2011680" cy="248502"/>
+            <a:off x="1014984" y="3050869"/>
+            <a:ext cx="2011680" cy="270017"/>
           </a:xfrm>
           <a:prstGeom prst="rect">
             <a:avLst/>
@@ -1875,8 +1875,8 @@
         </p:nvSpPr>
         <p:spPr>
           <a:xfrm>
-            <a:off x="3099816" y="2999205"/>
-            <a:ext cx="532055" cy="136676"/>
+            <a:off x="3099816" y="3111623"/>
+            <a:ext cx="532055" cy="148509"/>
           </a:xfrm>
           <a:prstGeom prst="rect">
             <a:avLst/>
@@ -1895,8 +1895,8 @@
         </p:nvSpPr>
         <p:spPr>
           <a:xfrm>
-            <a:off x="5001768" y="2943292"/>
-            <a:ext cx="914400" cy="248502"/>
+            <a:off x="5001768" y="3050869"/>
+            <a:ext cx="914400" cy="270017"/>
           </a:xfrm>
           <a:prstGeom prst="rect">
             <a:avLst/>
@@ -1934,8 +1934,8 @@
         </p:nvSpPr>
         <p:spPr>
           <a:xfrm>
-            <a:off x="658368" y="3191794"/>
-            <a:ext cx="310896" cy="248502"/>
+            <a:off x="658368" y="3320886"/>
+            <a:ext cx="310896" cy="270017"/>
           </a:xfrm>
           <a:prstGeom prst="rect">
             <a:avLst/>
@@ -1973,8 +1973,8 @@
         </p:nvSpPr>
         <p:spPr>
           <a:xfrm>
-            <a:off x="1014984" y="3191794"/>
-            <a:ext cx="2011680" cy="248502"/>
+            <a:off x="1014984" y="3320886"/>
+            <a:ext cx="2011680" cy="270017"/>
           </a:xfrm>
           <a:prstGeom prst="rect">
             <a:avLst/>
@@ -2012,8 +2012,8 @@
         </p:nvSpPr>
         <p:spPr>
           <a:xfrm>
-            <a:off x="3099816" y="3247707"/>
-            <a:ext cx="488857" cy="136676"/>
+            <a:off x="3099816" y="3381639"/>
+            <a:ext cx="488857" cy="148509"/>
           </a:xfrm>
           <a:prstGeom prst="rect">
             <a:avLst/>
@@ -2032,8 +2032,8 @@
         </p:nvSpPr>
         <p:spPr>
           <a:xfrm>
-            <a:off x="5001768" y="3191794"/>
-            <a:ext cx="914400" cy="248502"/>
+            <a:off x="5001768" y="3320886"/>
+            <a:ext cx="914400" cy="270017"/>
           </a:xfrm>
           <a:prstGeom prst="rect">
             <a:avLst/>
@@ -2071,8 +2071,8 @@
         </p:nvSpPr>
         <p:spPr>
           <a:xfrm>
-            <a:off x="658368" y="3440296"/>
-            <a:ext cx="310896" cy="248502"/>
+            <a:off x="658368" y="3590903"/>
+            <a:ext cx="310896" cy="270017"/>
           </a:xfrm>
           <a:prstGeom prst="rect">
             <a:avLst/>
@@ -2110,8 +2110,8 @@
         </p:nvSpPr>
         <p:spPr>
           <a:xfrm>
-            <a:off x="1014984" y="3440296"/>
-            <a:ext cx="2011680" cy="248502"/>
+            <a:off x="1014984" y="3590903"/>
+            <a:ext cx="2011680" cy="270017"/>
           </a:xfrm>
           <a:prstGeom prst="rect">
             <a:avLst/>
@@ -2149,8 +2149,8 @@
         </p:nvSpPr>
         <p:spPr>
           <a:xfrm>
-            <a:off x="3099816" y="3496208"/>
-            <a:ext cx="486976" cy="136676"/>
+            <a:off x="3099816" y="3651656"/>
+            <a:ext cx="486976" cy="148509"/>
           </a:xfrm>
           <a:prstGeom prst="rect">
             <a:avLst/>
@@ -2169,8 +2169,8 @@
         </p:nvSpPr>
         <p:spPr>
           <a:xfrm>
-            <a:off x="5001768" y="3440296"/>
-            <a:ext cx="914400" cy="248502"/>
+            <a:off x="5001768" y="3590903"/>
+            <a:ext cx="914400" cy="270017"/>
           </a:xfrm>
           <a:prstGeom prst="rect">
             <a:avLst/>
@@ -2208,8 +2208,8 @@
         </p:nvSpPr>
         <p:spPr>
           <a:xfrm>
-            <a:off x="658368" y="3688797"/>
-            <a:ext cx="310896" cy="248502"/>
+            <a:off x="658368" y="3860920"/>
+            <a:ext cx="310896" cy="270017"/>
           </a:xfrm>
           <a:prstGeom prst="rect">
             <a:avLst/>
@@ -2247,8 +2247,8 @@
         </p:nvSpPr>
         <p:spPr>
           <a:xfrm>
-            <a:off x="1014984" y="3688797"/>
-            <a:ext cx="2011680" cy="248502"/>
+            <a:off x="1014984" y="3860920"/>
+            <a:ext cx="2011680" cy="270017"/>
           </a:xfrm>
           <a:prstGeom prst="rect">
             <a:avLst/>
@@ -2286,8 +2286,8 @@
         </p:nvSpPr>
         <p:spPr>
           <a:xfrm>
-            <a:off x="3099816" y="3744710"/>
-            <a:ext cx="311151" cy="136676"/>
+            <a:off x="3099816" y="3921673"/>
+            <a:ext cx="311151" cy="148509"/>
           </a:xfrm>
           <a:prstGeom prst="rect">
             <a:avLst/>
@@ -2306,8 +2306,8 @@
         </p:nvSpPr>
         <p:spPr>
           <a:xfrm>
-            <a:off x="5001768" y="3688797"/>
-            <a:ext cx="914400" cy="248502"/>
+            <a:off x="5001768" y="3860920"/>
+            <a:ext cx="914400" cy="270017"/>
           </a:xfrm>
           <a:prstGeom prst="rect">
             <a:avLst/>
@@ -2345,8 +2345,8 @@
         </p:nvSpPr>
         <p:spPr>
           <a:xfrm>
-            <a:off x="658368" y="3937299"/>
-            <a:ext cx="310896" cy="248502"/>
+            <a:off x="658368" y="4130936"/>
+            <a:ext cx="310896" cy="270017"/>
           </a:xfrm>
           <a:prstGeom prst="rect">
             <a:avLst/>
@@ -2384,8 +2384,8 @@
         </p:nvSpPr>
         <p:spPr>
           <a:xfrm>
-            <a:off x="1014984" y="3937299"/>
-            <a:ext cx="2011680" cy="248502"/>
+            <a:off x="1014984" y="4130936"/>
+            <a:ext cx="2011680" cy="270017"/>
           </a:xfrm>
           <a:prstGeom prst="rect">
             <a:avLst/>
@@ -2423,8 +2423,8 @@
         </p:nvSpPr>
         <p:spPr>
           <a:xfrm>
-            <a:off x="3099816" y="3993212"/>
-            <a:ext cx="294048" cy="136676"/>
+            <a:off x="3099816" y="4191690"/>
+            <a:ext cx="294048" cy="148509"/>
           </a:xfrm>
           <a:prstGeom prst="rect">
             <a:avLst/>
@@ -2443,8 +2443,8 @@
         </p:nvSpPr>
         <p:spPr>
           <a:xfrm>
-            <a:off x="5001768" y="3937299"/>
-            <a:ext cx="914400" cy="248502"/>
+            <a:off x="5001768" y="4130936"/>
+            <a:ext cx="914400" cy="270017"/>
           </a:xfrm>
           <a:prstGeom prst="rect">
             <a:avLst/>
@@ -2482,8 +2482,8 @@
         </p:nvSpPr>
         <p:spPr>
           <a:xfrm>
-            <a:off x="658368" y="4185800"/>
-            <a:ext cx="310896" cy="248502"/>
+            <a:off x="658368" y="4400953"/>
+            <a:ext cx="310896" cy="270017"/>
           </a:xfrm>
           <a:prstGeom prst="rect">
             <a:avLst/>
@@ -2521,8 +2521,8 @@
         </p:nvSpPr>
         <p:spPr>
           <a:xfrm>
-            <a:off x="1014984" y="4185800"/>
-            <a:ext cx="2011680" cy="248502"/>
+            <a:off x="1014984" y="4400953"/>
+            <a:ext cx="2011680" cy="270017"/>
           </a:xfrm>
           <a:prstGeom prst="rect">
             <a:avLst/>
@@ -2560,8 +2560,8 @@
         </p:nvSpPr>
         <p:spPr>
           <a:xfrm>
-            <a:off x="3099816" y="4241713"/>
-            <a:ext cx="283945" cy="136676"/>
+            <a:off x="3099816" y="4461707"/>
+            <a:ext cx="283945" cy="148509"/>
           </a:xfrm>
           <a:prstGeom prst="rect">
             <a:avLst/>
@@ -2580,8 +2580,8 @@
         </p:nvSpPr>
         <p:spPr>
           <a:xfrm>
-            <a:off x="5001768" y="4185800"/>
-            <a:ext cx="914400" cy="248502"/>
+            <a:off x="5001768" y="4400953"/>
+            <a:ext cx="914400" cy="270017"/>
           </a:xfrm>
           <a:prstGeom prst="rect">
             <a:avLst/>
@@ -2619,8 +2619,8 @@
         </p:nvSpPr>
         <p:spPr>
           <a:xfrm>
-            <a:off x="658368" y="4434302"/>
-            <a:ext cx="310896" cy="248502"/>
+            <a:off x="658368" y="4670970"/>
+            <a:ext cx="310896" cy="270017"/>
           </a:xfrm>
           <a:prstGeom prst="rect">
             <a:avLst/>
@@ -2658,8 +2658,8 @@
         </p:nvSpPr>
         <p:spPr>
           <a:xfrm>
-            <a:off x="1014984" y="4434302"/>
-            <a:ext cx="2011680" cy="248502"/>
+            <a:off x="1014984" y="4670970"/>
+            <a:ext cx="2011680" cy="270017"/>
           </a:xfrm>
           <a:prstGeom prst="rect">
             <a:avLst/>
@@ -2697,8 +2697,8 @@
         </p:nvSpPr>
         <p:spPr>
           <a:xfrm>
-            <a:off x="3099816" y="4490215"/>
-            <a:ext cx="240854" cy="136676"/>
+            <a:off x="3099816" y="4731724"/>
+            <a:ext cx="240854" cy="148509"/>
           </a:xfrm>
           <a:prstGeom prst="rect">
             <a:avLst/>
@@ -2717,8 +2717,8 @@
         </p:nvSpPr>
         <p:spPr>
           <a:xfrm>
-            <a:off x="5001768" y="4434302"/>
-            <a:ext cx="914400" cy="248502"/>
+            <a:off x="5001768" y="4670970"/>
+            <a:ext cx="914400" cy="270017"/>
           </a:xfrm>
           <a:prstGeom prst="rect">
             <a:avLst/>
@@ -2756,8 +2756,8 @@
         </p:nvSpPr>
         <p:spPr>
           <a:xfrm>
-            <a:off x="658368" y="4682804"/>
-            <a:ext cx="310896" cy="248502"/>
+            <a:off x="658368" y="4940987"/>
+            <a:ext cx="310896" cy="270017"/>
           </a:xfrm>
           <a:prstGeom prst="rect">
             <a:avLst/>
@@ -2795,8 +2795,8 @@
         </p:nvSpPr>
         <p:spPr>
           <a:xfrm>
-            <a:off x="1014984" y="4682804"/>
-            <a:ext cx="2011680" cy="248502"/>
+            <a:off x="1014984" y="4940987"/>
+            <a:ext cx="2011680" cy="270017"/>
           </a:xfrm>
           <a:prstGeom prst="rect">
             <a:avLst/>
@@ -2834,8 +2834,8 @@
         </p:nvSpPr>
         <p:spPr>
           <a:xfrm>
-            <a:off x="3099816" y="4738717"/>
-            <a:ext cx="236258" cy="136676"/>
+            <a:off x="3099816" y="5001741"/>
+            <a:ext cx="236258" cy="148509"/>
           </a:xfrm>
           <a:prstGeom prst="rect">
             <a:avLst/>
@@ -2854,8 +2854,8 @@
         </p:nvSpPr>
         <p:spPr>
           <a:xfrm>
-            <a:off x="5001768" y="4682804"/>
-            <a:ext cx="914400" cy="248502"/>
+            <a:off x="5001768" y="4940987"/>
+            <a:ext cx="914400" cy="270017"/>
           </a:xfrm>
           <a:prstGeom prst="rect">
             <a:avLst/>
@@ -2893,8 +2893,8 @@
         </p:nvSpPr>
         <p:spPr>
           <a:xfrm>
-            <a:off x="658368" y="4931305"/>
-            <a:ext cx="310896" cy="248502"/>
+            <a:off x="658368" y="5211004"/>
+            <a:ext cx="310896" cy="270017"/>
           </a:xfrm>
           <a:prstGeom prst="rect">
             <a:avLst/>
@@ -2932,8 +2932,8 @@
         </p:nvSpPr>
         <p:spPr>
           <a:xfrm>
-            <a:off x="1014984" y="4931305"/>
-            <a:ext cx="2011680" cy="248502"/>
+            <a:off x="1014984" y="5211004"/>
+            <a:ext cx="2011680" cy="270017"/>
           </a:xfrm>
           <a:prstGeom prst="rect">
             <a:avLst/>
@@ -2971,8 +2971,8 @@
         </p:nvSpPr>
         <p:spPr>
           <a:xfrm>
-            <a:off x="3099816" y="4987218"/>
-            <a:ext cx="232096" cy="136676"/>
+            <a:off x="3099816" y="5271758"/>
+            <a:ext cx="232096" cy="148509"/>
           </a:xfrm>
           <a:prstGeom prst="rect">
             <a:avLst/>
@@ -2991,8 +2991,8 @@
         </p:nvSpPr>
         <p:spPr>
           <a:xfrm>
-            <a:off x="5001768" y="4931305"/>
-            <a:ext cx="914400" cy="248502"/>
+            <a:off x="5001768" y="5211004"/>
+            <a:ext cx="914400" cy="270017"/>
           </a:xfrm>
           <a:prstGeom prst="rect">
             <a:avLst/>
@@ -3030,8 +3030,8 @@
         </p:nvSpPr>
         <p:spPr>
           <a:xfrm>
-            <a:off x="658368" y="5179807"/>
-            <a:ext cx="310896" cy="248502"/>
+            <a:off x="658368" y="5481021"/>
+            <a:ext cx="310896" cy="270017"/>
           </a:xfrm>
           <a:prstGeom prst="rect">
             <a:avLst/>
@@ -3069,8 +3069,8 @@
         </p:nvSpPr>
         <p:spPr>
           <a:xfrm>
-            <a:off x="1014984" y="5179807"/>
-            <a:ext cx="2011680" cy="248502"/>
+            <a:off x="1014984" y="5481021"/>
+            <a:ext cx="2011680" cy="270017"/>
           </a:xfrm>
           <a:prstGeom prst="rect">
             <a:avLst/>
@@ -3108,8 +3108,8 @@
         </p:nvSpPr>
         <p:spPr>
           <a:xfrm>
-            <a:off x="3099816" y="5235720"/>
-            <a:ext cx="224903" cy="136676"/>
+            <a:off x="3099816" y="5541775"/>
+            <a:ext cx="224903" cy="148509"/>
           </a:xfrm>
           <a:prstGeom prst="rect">
             <a:avLst/>
@@ -3128,8 +3128,8 @@
         </p:nvSpPr>
         <p:spPr>
           <a:xfrm>
-            <a:off x="5001768" y="5179807"/>
-            <a:ext cx="914400" cy="248502"/>
+            <a:off x="5001768" y="5481021"/>
+            <a:ext cx="914400" cy="270017"/>
           </a:xfrm>
           <a:prstGeom prst="rect">
             <a:avLst/>
@@ -3167,8 +3167,8 @@
         </p:nvSpPr>
         <p:spPr>
           <a:xfrm>
-            <a:off x="658368" y="5428309"/>
-            <a:ext cx="310896" cy="248502"/>
+            <a:off x="658368" y="5751038"/>
+            <a:ext cx="310896" cy="270017"/>
           </a:xfrm>
           <a:prstGeom prst="rect">
             <a:avLst/>
@@ -3206,8 +3206,8 @@
         </p:nvSpPr>
         <p:spPr>
           <a:xfrm>
-            <a:off x="1014984" y="5428309"/>
-            <a:ext cx="2011680" cy="248502"/>
+            <a:off x="1014984" y="5751038"/>
+            <a:ext cx="2011680" cy="270017"/>
           </a:xfrm>
           <a:prstGeom prst="rect">
             <a:avLst/>
@@ -3245,8 +3245,8 @@
         </p:nvSpPr>
         <p:spPr>
           <a:xfrm>
-            <a:off x="3099816" y="5484222"/>
-            <a:ext cx="213249" cy="136676"/>
+            <a:off x="3099816" y="5811792"/>
+            <a:ext cx="213249" cy="148509"/>
           </a:xfrm>
           <a:prstGeom prst="rect">
             <a:avLst/>
@@ -3265,8 +3265,8 @@
         </p:nvSpPr>
         <p:spPr>
           <a:xfrm>
-            <a:off x="5001768" y="5428309"/>
-            <a:ext cx="914400" cy="248502"/>
+            <a:off x="5001768" y="5751038"/>
+            <a:ext cx="914400" cy="270017"/>
           </a:xfrm>
           <a:prstGeom prst="rect">
             <a:avLst/>
@@ -3304,8 +3304,8 @@
         </p:nvSpPr>
         <p:spPr>
           <a:xfrm>
-            <a:off x="658368" y="5676810"/>
-            <a:ext cx="310896" cy="248502"/>
+            <a:off x="658368" y="6021055"/>
+            <a:ext cx="310896" cy="270017"/>
           </a:xfrm>
           <a:prstGeom prst="rect">
             <a:avLst/>
@@ -3343,8 +3343,8 @@
         </p:nvSpPr>
         <p:spPr>
           <a:xfrm>
-            <a:off x="1014984" y="5676810"/>
-            <a:ext cx="2011680" cy="248502"/>
+            <a:off x="1014984" y="6021055"/>
+            <a:ext cx="2011680" cy="270017"/>
           </a:xfrm>
           <a:prstGeom prst="rect">
             <a:avLst/>
@@ -3382,8 +3382,8 @@
         </p:nvSpPr>
         <p:spPr>
           <a:xfrm>
-            <a:off x="3099816" y="5732723"/>
-            <a:ext cx="211785" cy="136676"/>
+            <a:off x="3099816" y="6081809"/>
+            <a:ext cx="211785" cy="148509"/>
           </a:xfrm>
           <a:prstGeom prst="rect">
             <a:avLst/>
@@ -3402,8 +3402,8 @@
         </p:nvSpPr>
         <p:spPr>
           <a:xfrm>
-            <a:off x="5001768" y="5676810"/>
-            <a:ext cx="914400" cy="248502"/>
+            <a:off x="5001768" y="6021055"/>
+            <a:ext cx="914400" cy="270017"/>
           </a:xfrm>
           <a:prstGeom prst="rect">
             <a:avLst/>
@@ -3442,7 +3442,7 @@
         <p:spPr>
           <a:xfrm>
             <a:off x="6208776" y="1700784"/>
-            <a:ext cx="310896" cy="248502"/>
+            <a:ext cx="310896" cy="270017"/>
           </a:xfrm>
           <a:prstGeom prst="rect">
             <a:avLst/>
@@ -3481,7 +3481,7 @@
         <p:spPr>
           <a:xfrm>
             <a:off x="6565392" y="1700784"/>
-            <a:ext cx="2011680" cy="248502"/>
+            <a:ext cx="2011680" cy="270017"/>
           </a:xfrm>
           <a:prstGeom prst="rect">
             <a:avLst/>
@@ -3519,8 +3519,8 @@
         </p:nvSpPr>
         <p:spPr>
           <a:xfrm>
-            <a:off x="8650224" y="1756697"/>
-            <a:ext cx="210549" cy="136676"/>
+            <a:off x="8650224" y="1761538"/>
+            <a:ext cx="210549" cy="148509"/>
           </a:xfrm>
           <a:prstGeom prst="rect">
             <a:avLst/>
@@ -3540,7 +3540,7 @@
         <p:spPr>
           <a:xfrm>
             <a:off x="10552176" y="1700784"/>
-            <a:ext cx="914400" cy="248502"/>
+            <a:ext cx="914400" cy="270017"/>
           </a:xfrm>
           <a:prstGeom prst="rect">
             <a:avLst/>
@@ -3578,8 +3578,8 @@
         </p:nvSpPr>
         <p:spPr>
           <a:xfrm>
-            <a:off x="6208776" y="1949286"/>
-            <a:ext cx="310896" cy="248502"/>
+            <a:off x="6208776" y="1970801"/>
+            <a:ext cx="310896" cy="270017"/>
           </a:xfrm>
           <a:prstGeom prst="rect">
             <a:avLst/>
@@ -3617,8 +3617,8 @@
         </p:nvSpPr>
         <p:spPr>
           <a:xfrm>
-            <a:off x="6565392" y="1949286"/>
-            <a:ext cx="2011680" cy="248502"/>
+            <a:off x="6565392" y="1970801"/>
+            <a:ext cx="2011680" cy="270017"/>
           </a:xfrm>
           <a:prstGeom prst="rect">
             <a:avLst/>
@@ -3656,8 +3656,8 @@
         </p:nvSpPr>
         <p:spPr>
           <a:xfrm>
-            <a:off x="8650224" y="2005199"/>
-            <a:ext cx="209258" cy="136676"/>
+            <a:off x="8650224" y="2031555"/>
+            <a:ext cx="209258" cy="148509"/>
           </a:xfrm>
           <a:prstGeom prst="rect">
             <a:avLst/>
@@ -3676,8 +3676,8 @@
         </p:nvSpPr>
         <p:spPr>
           <a:xfrm>
-            <a:off x="10552176" y="1949286"/>
-            <a:ext cx="914400" cy="248502"/>
+            <a:off x="10552176" y="1970801"/>
+            <a:ext cx="914400" cy="270017"/>
           </a:xfrm>
           <a:prstGeom prst="rect">
             <a:avLst/>
@@ -3715,8 +3715,8 @@
         </p:nvSpPr>
         <p:spPr>
           <a:xfrm>
-            <a:off x="6208776" y="2197787"/>
-            <a:ext cx="310896" cy="248502"/>
+            <a:off x="6208776" y="2240818"/>
+            <a:ext cx="310896" cy="270017"/>
           </a:xfrm>
           <a:prstGeom prst="rect">
             <a:avLst/>
@@ -3754,8 +3754,8 @@
         </p:nvSpPr>
         <p:spPr>
           <a:xfrm>
-            <a:off x="6565392" y="2197787"/>
-            <a:ext cx="2011680" cy="248502"/>
+            <a:off x="6565392" y="2240818"/>
+            <a:ext cx="2011680" cy="270017"/>
           </a:xfrm>
           <a:prstGeom prst="rect">
             <a:avLst/>
@@ -3793,8 +3793,8 @@
         </p:nvSpPr>
         <p:spPr>
           <a:xfrm>
-            <a:off x="8650224" y="2253700"/>
-            <a:ext cx="205646" cy="136676"/>
+            <a:off x="8650224" y="2301572"/>
+            <a:ext cx="205646" cy="148509"/>
           </a:xfrm>
           <a:prstGeom prst="rect">
             <a:avLst/>
@@ -3813,8 +3813,8 @@
         </p:nvSpPr>
         <p:spPr>
           <a:xfrm>
-            <a:off x="10552176" y="2197787"/>
-            <a:ext cx="914400" cy="248502"/>
+            <a:off x="10552176" y="2240818"/>
+            <a:ext cx="914400" cy="270017"/>
           </a:xfrm>
           <a:prstGeom prst="rect">
             <a:avLst/>
@@ -3852,8 +3852,8 @@
         </p:nvSpPr>
         <p:spPr>
           <a:xfrm>
-            <a:off x="6208776" y="2446289"/>
-            <a:ext cx="310896" cy="248502"/>
+            <a:off x="6208776" y="2510835"/>
+            <a:ext cx="310896" cy="270017"/>
           </a:xfrm>
           <a:prstGeom prst="rect">
             <a:avLst/>
@@ -3891,8 +3891,8 @@
         </p:nvSpPr>
         <p:spPr>
           <a:xfrm>
-            <a:off x="6565392" y="2446289"/>
-            <a:ext cx="2011680" cy="248502"/>
+            <a:off x="6565392" y="2510835"/>
+            <a:ext cx="2011680" cy="270017"/>
           </a:xfrm>
           <a:prstGeom prst="rect">
             <a:avLst/>
@@ -3930,8 +3930,8 @@
         </p:nvSpPr>
         <p:spPr>
           <a:xfrm>
-            <a:off x="8650224" y="2502202"/>
-            <a:ext cx="194412" cy="136676"/>
+            <a:off x="8650224" y="2571589"/>
+            <a:ext cx="194412" cy="148509"/>
           </a:xfrm>
           <a:prstGeom prst="rect">
             <a:avLst/>
@@ -3950,8 +3950,8 @@
         </p:nvSpPr>
         <p:spPr>
           <a:xfrm>
-            <a:off x="10552176" y="2446289"/>
-            <a:ext cx="914400" cy="248502"/>
+            <a:off x="10552176" y="2510835"/>
+            <a:ext cx="914400" cy="270017"/>
           </a:xfrm>
           <a:prstGeom prst="rect">
             <a:avLst/>
@@ -3989,8 +3989,8 @@
         </p:nvSpPr>
         <p:spPr>
           <a:xfrm>
-            <a:off x="6208776" y="2694791"/>
-            <a:ext cx="310896" cy="248502"/>
+            <a:off x="6208776" y="2780852"/>
+            <a:ext cx="310896" cy="270017"/>
           </a:xfrm>
           <a:prstGeom prst="rect">
             <a:avLst/>
@@ -4028,8 +4028,8 @@
         </p:nvSpPr>
         <p:spPr>
           <a:xfrm>
-            <a:off x="6565392" y="2694791"/>
-            <a:ext cx="2011680" cy="248502"/>
+            <a:off x="6565392" y="2780852"/>
+            <a:ext cx="2011680" cy="270017"/>
           </a:xfrm>
           <a:prstGeom prst="rect">
             <a:avLst/>
@@ -4067,8 +4067,8 @@
         </p:nvSpPr>
         <p:spPr>
           <a:xfrm>
-            <a:off x="8650224" y="2750703"/>
-            <a:ext cx="187233" cy="136676"/>
+            <a:off x="8650224" y="2841606"/>
+            <a:ext cx="187233" cy="148509"/>
           </a:xfrm>
           <a:prstGeom prst="rect">
             <a:avLst/>
@@ -4087,8 +4087,8 @@
         </p:nvSpPr>
         <p:spPr>
           <a:xfrm>
-            <a:off x="10552176" y="2694791"/>
-            <a:ext cx="914400" cy="248502"/>
+            <a:off x="10552176" y="2780852"/>
+            <a:ext cx="914400" cy="270017"/>
           </a:xfrm>
           <a:prstGeom prst="rect">
             <a:avLst/>
@@ -4126,8 +4126,8 @@
         </p:nvSpPr>
         <p:spPr>
           <a:xfrm>
-            <a:off x="6208776" y="2943292"/>
-            <a:ext cx="310896" cy="248502"/>
+            <a:off x="6208776" y="3050869"/>
+            <a:ext cx="310896" cy="270017"/>
           </a:xfrm>
           <a:prstGeom prst="rect">
             <a:avLst/>
@@ -4165,8 +4165,8 @@
         </p:nvSpPr>
         <p:spPr>
           <a:xfrm>
-            <a:off x="6565392" y="2943292"/>
-            <a:ext cx="2011680" cy="248502"/>
+            <a:off x="6565392" y="3050869"/>
+            <a:ext cx="2011680" cy="270017"/>
           </a:xfrm>
           <a:prstGeom prst="rect">
             <a:avLst/>
@@ -4204,8 +4204,8 @@
         </p:nvSpPr>
         <p:spPr>
           <a:xfrm>
-            <a:off x="8650224" y="2999205"/>
-            <a:ext cx="182551" cy="136676"/>
+            <a:off x="8650224" y="3111623"/>
+            <a:ext cx="182551" cy="148509"/>
           </a:xfrm>
           <a:prstGeom prst="rect">
             <a:avLst/>
@@ -4224,8 +4224,8 @@
         </p:nvSpPr>
         <p:spPr>
           <a:xfrm>
-            <a:off x="10552176" y="2943292"/>
-            <a:ext cx="914400" cy="248502"/>
+            <a:off x="10552176" y="3050869"/>
+            <a:ext cx="914400" cy="270017"/>
           </a:xfrm>
           <a:prstGeom prst="rect">
             <a:avLst/>
@@ -4263,8 +4263,8 @@
         </p:nvSpPr>
         <p:spPr>
           <a:xfrm>
-            <a:off x="6208776" y="3191794"/>
-            <a:ext cx="310896" cy="248502"/>
+            <a:off x="6208776" y="3320886"/>
+            <a:ext cx="310896" cy="270017"/>
           </a:xfrm>
           <a:prstGeom prst="rect">
             <a:avLst/>
@@ -4302,8 +4302,8 @@
         </p:nvSpPr>
         <p:spPr>
           <a:xfrm>
-            <a:off x="6565392" y="3191794"/>
-            <a:ext cx="2011680" cy="248502"/>
+            <a:off x="6565392" y="3320886"/>
+            <a:ext cx="2011680" cy="270017"/>
           </a:xfrm>
           <a:prstGeom prst="rect">
             <a:avLst/>
@@ -4341,8 +4341,8 @@
         </p:nvSpPr>
         <p:spPr>
           <a:xfrm>
-            <a:off x="8650224" y="3247707"/>
-            <a:ext cx="160249" cy="136676"/>
+            <a:off x="8650224" y="3381639"/>
+            <a:ext cx="160249" cy="148509"/>
           </a:xfrm>
           <a:prstGeom prst="rect">
             <a:avLst/>
@@ -4361,8 +4361,8 @@
         </p:nvSpPr>
         <p:spPr>
           <a:xfrm>
-            <a:off x="10552176" y="3191794"/>
-            <a:ext cx="914400" cy="248502"/>
+            <a:off x="10552176" y="3320886"/>
+            <a:ext cx="914400" cy="270017"/>
           </a:xfrm>
           <a:prstGeom prst="rect">
             <a:avLst/>
@@ -4400,8 +4400,8 @@
         </p:nvSpPr>
         <p:spPr>
           <a:xfrm>
-            <a:off x="6208776" y="3440296"/>
-            <a:ext cx="310896" cy="248502"/>
+            <a:off x="6208776" y="3590903"/>
+            <a:ext cx="310896" cy="270017"/>
           </a:xfrm>
           <a:prstGeom prst="rect">
             <a:avLst/>
@@ -4439,8 +4439,8 @@
         </p:nvSpPr>
         <p:spPr>
           <a:xfrm>
-            <a:off x="6565392" y="3440296"/>
-            <a:ext cx="2011680" cy="248502"/>
+            <a:off x="6565392" y="3590903"/>
+            <a:ext cx="2011680" cy="270017"/>
           </a:xfrm>
           <a:prstGeom prst="rect">
             <a:avLst/>
@@ -4478,8 +4478,8 @@
         </p:nvSpPr>
         <p:spPr>
           <a:xfrm>
-            <a:off x="8650224" y="3496208"/>
-            <a:ext cx="157028" cy="136676"/>
+            <a:off x="8650224" y="3651656"/>
+            <a:ext cx="157028" cy="148509"/>
           </a:xfrm>
           <a:prstGeom prst="rect">
             <a:avLst/>
@@ -4498,8 +4498,8 @@
         </p:nvSpPr>
         <p:spPr>
           <a:xfrm>
-            <a:off x="10552176" y="3440296"/>
-            <a:ext cx="914400" cy="248502"/>
+            <a:off x="10552176" y="3590903"/>
+            <a:ext cx="914400" cy="270017"/>
           </a:xfrm>
           <a:prstGeom prst="rect">
             <a:avLst/>
@@ -4537,8 +4537,8 @@
         </p:nvSpPr>
         <p:spPr>
           <a:xfrm>
-            <a:off x="6208776" y="3688797"/>
-            <a:ext cx="310896" cy="248502"/>
+            <a:off x="6208776" y="3860920"/>
+            <a:ext cx="310896" cy="270017"/>
           </a:xfrm>
           <a:prstGeom prst="rect">
             <a:avLst/>
@@ -4576,8 +4576,8 @@
         </p:nvSpPr>
         <p:spPr>
           <a:xfrm>
-            <a:off x="6565392" y="3688797"/>
-            <a:ext cx="2011680" cy="248502"/>
+            <a:off x="6565392" y="3860920"/>
+            <a:ext cx="2011680" cy="270017"/>
           </a:xfrm>
           <a:prstGeom prst="rect">
             <a:avLst/>
@@ -4615,8 +4615,8 @@
         </p:nvSpPr>
         <p:spPr>
           <a:xfrm>
-            <a:off x="8650224" y="3744710"/>
-            <a:ext cx="141322" cy="136676"/>
+            <a:off x="8650224" y="3921673"/>
+            <a:ext cx="141322" cy="148509"/>
           </a:xfrm>
           <a:prstGeom prst="rect">
             <a:avLst/>
@@ -4635,8 +4635,8 @@
         </p:nvSpPr>
         <p:spPr>
           <a:xfrm>
-            <a:off x="10552176" y="3688797"/>
-            <a:ext cx="914400" cy="248502"/>
+            <a:off x="10552176" y="3860920"/>
+            <a:ext cx="914400" cy="270017"/>
           </a:xfrm>
           <a:prstGeom prst="rect">
             <a:avLst/>
@@ -4674,8 +4674,8 @@
         </p:nvSpPr>
         <p:spPr>
           <a:xfrm>
-            <a:off x="6208776" y="3937299"/>
-            <a:ext cx="310896" cy="248502"/>
+            <a:off x="6208776" y="4130936"/>
+            <a:ext cx="310896" cy="270017"/>
           </a:xfrm>
           <a:prstGeom prst="rect">
             <a:avLst/>
@@ -4713,8 +4713,8 @@
         </p:nvSpPr>
         <p:spPr>
           <a:xfrm>
-            <a:off x="6565392" y="3937299"/>
-            <a:ext cx="2011680" cy="248502"/>
+            <a:off x="6565392" y="4130936"/>
+            <a:ext cx="2011680" cy="270017"/>
           </a:xfrm>
           <a:prstGeom prst="rect">
             <a:avLst/>
@@ -4752,8 +4752,8 @@
         </p:nvSpPr>
         <p:spPr>
           <a:xfrm>
-            <a:off x="8650224" y="3993212"/>
-            <a:ext cx="140504" cy="136676"/>
+            <a:off x="8650224" y="4191690"/>
+            <a:ext cx="140504" cy="148509"/>
           </a:xfrm>
           <a:prstGeom prst="rect">
             <a:avLst/>
@@ -4772,8 +4772,8 @@
         </p:nvSpPr>
         <p:spPr>
           <a:xfrm>
-            <a:off x="10552176" y="3937299"/>
-            <a:ext cx="914400" cy="248502"/>
+            <a:off x="10552176" y="4130936"/>
+            <a:ext cx="914400" cy="270017"/>
           </a:xfrm>
           <a:prstGeom prst="rect">
             <a:avLst/>
@@ -4811,8 +4811,8 @@
         </p:nvSpPr>
         <p:spPr>
           <a:xfrm>
-            <a:off x="6208776" y="4185800"/>
-            <a:ext cx="310896" cy="248502"/>
+            <a:off x="6208776" y="4400953"/>
+            <a:ext cx="310896" cy="270017"/>
           </a:xfrm>
           <a:prstGeom prst="rect">
             <a:avLst/>
@@ -4850,8 +4850,8 @@
         </p:nvSpPr>
         <p:spPr>
           <a:xfrm>
-            <a:off x="6565392" y="4185800"/>
-            <a:ext cx="2011680" cy="248502"/>
+            <a:off x="6565392" y="4400953"/>
+            <a:ext cx="2011680" cy="270017"/>
           </a:xfrm>
           <a:prstGeom prst="rect">
             <a:avLst/>
@@ -4889,8 +4889,8 @@
         </p:nvSpPr>
         <p:spPr>
           <a:xfrm>
-            <a:off x="8650224" y="4241713"/>
-            <a:ext cx="107585" cy="136676"/>
+            <a:off x="8650224" y="4461707"/>
+            <a:ext cx="107585" cy="148509"/>
           </a:xfrm>
           <a:prstGeom prst="rect">
             <a:avLst/>
@@ -4909,8 +4909,8 @@
         </p:nvSpPr>
         <p:spPr>
           <a:xfrm>
-            <a:off x="10552176" y="4185800"/>
-            <a:ext cx="914400" cy="248502"/>
+            <a:off x="10552176" y="4400953"/>
+            <a:ext cx="914400" cy="270017"/>
           </a:xfrm>
           <a:prstGeom prst="rect">
             <a:avLst/>
@@ -4948,8 +4948,8 @@
         </p:nvSpPr>
         <p:spPr>
           <a:xfrm>
-            <a:off x="6208776" y="4434302"/>
-            <a:ext cx="310896" cy="248502"/>
+            <a:off x="6208776" y="4670970"/>
+            <a:ext cx="310896" cy="270017"/>
           </a:xfrm>
           <a:prstGeom prst="rect">
             <a:avLst/>
@@ -4987,8 +4987,8 @@
         </p:nvSpPr>
         <p:spPr>
           <a:xfrm>
-            <a:off x="6565392" y="4434302"/>
-            <a:ext cx="2011680" cy="248502"/>
+            <a:off x="6565392" y="4670970"/>
+            <a:ext cx="2011680" cy="270017"/>
           </a:xfrm>
           <a:prstGeom prst="rect">
             <a:avLst/>
@@ -5026,8 +5026,8 @@
         </p:nvSpPr>
         <p:spPr>
           <a:xfrm>
-            <a:off x="8650224" y="4490215"/>
-            <a:ext cx="103964" cy="136676"/>
+            <a:off x="8650224" y="4731724"/>
+            <a:ext cx="103964" cy="148509"/>
           </a:xfrm>
           <a:prstGeom prst="rect">
             <a:avLst/>
@@ -5046,8 +5046,8 @@
         </p:nvSpPr>
         <p:spPr>
           <a:xfrm>
-            <a:off x="10552176" y="4434302"/>
-            <a:ext cx="914400" cy="248502"/>
+            <a:off x="10552176" y="4670970"/>
+            <a:ext cx="914400" cy="270017"/>
           </a:xfrm>
           <a:prstGeom prst="rect">
             <a:avLst/>
@@ -5085,8 +5085,8 @@
         </p:nvSpPr>
         <p:spPr>
           <a:xfrm>
-            <a:off x="6208776" y="4682804"/>
-            <a:ext cx="310896" cy="248502"/>
+            <a:off x="6208776" y="4940987"/>
+            <a:ext cx="310896" cy="270017"/>
           </a:xfrm>
           <a:prstGeom prst="rect">
             <a:avLst/>
@@ -5124,8 +5124,8 @@
         </p:nvSpPr>
         <p:spPr>
           <a:xfrm>
-            <a:off x="6565392" y="4682804"/>
-            <a:ext cx="2011680" cy="248502"/>
+            <a:off x="6565392" y="4940987"/>
+            <a:ext cx="2011680" cy="270017"/>
           </a:xfrm>
           <a:prstGeom prst="rect">
             <a:avLst/>
@@ -5163,8 +5163,8 @@
         </p:nvSpPr>
         <p:spPr>
           <a:xfrm>
-            <a:off x="8650224" y="4738717"/>
-            <a:ext cx="96486" cy="136676"/>
+            <a:off x="8650224" y="5001741"/>
+            <a:ext cx="96486" cy="148509"/>
           </a:xfrm>
           <a:prstGeom prst="rect">
             <a:avLst/>
@@ -5183,8 +5183,8 @@
         </p:nvSpPr>
         <p:spPr>
           <a:xfrm>
-            <a:off x="10552176" y="4682804"/>
-            <a:ext cx="914400" cy="248502"/>
+            <a:off x="10552176" y="4940987"/>
+            <a:ext cx="914400" cy="270017"/>
           </a:xfrm>
           <a:prstGeom prst="rect">
             <a:avLst/>
@@ -5222,8 +5222,8 @@
         </p:nvSpPr>
         <p:spPr>
           <a:xfrm>
-            <a:off x="6208776" y="4931305"/>
-            <a:ext cx="310896" cy="248502"/>
+            <a:off x="6208776" y="5211004"/>
+            <a:ext cx="310896" cy="270017"/>
           </a:xfrm>
           <a:prstGeom prst="rect">
             <a:avLst/>
@@ -5261,8 +5261,8 @@
         </p:nvSpPr>
         <p:spPr>
           <a:xfrm>
-            <a:off x="6565392" y="4931305"/>
-            <a:ext cx="2011680" cy="248502"/>
+            <a:off x="6565392" y="5211004"/>
+            <a:ext cx="2011680" cy="270017"/>
           </a:xfrm>
           <a:prstGeom prst="rect">
             <a:avLst/>
@@ -5300,8 +5300,8 @@
         </p:nvSpPr>
         <p:spPr>
           <a:xfrm>
-            <a:off x="8650224" y="4987218"/>
-            <a:ext cx="90829" cy="136676"/>
+            <a:off x="8650224" y="5271758"/>
+            <a:ext cx="90829" cy="148509"/>
           </a:xfrm>
           <a:prstGeom prst="rect">
             <a:avLst/>
@@ -5320,8 +5320,8 @@
         </p:nvSpPr>
         <p:spPr>
           <a:xfrm>
-            <a:off x="10552176" y="4931305"/>
-            <a:ext cx="914400" cy="248502"/>
+            <a:off x="10552176" y="5211004"/>
+            <a:ext cx="914400" cy="270017"/>
           </a:xfrm>
           <a:prstGeom prst="rect">
             <a:avLst/>
@@ -5359,8 +5359,8 @@
         </p:nvSpPr>
         <p:spPr>
           <a:xfrm>
-            <a:off x="6208776" y="5179807"/>
-            <a:ext cx="310896" cy="248502"/>
+            <a:off x="6208776" y="5481021"/>
+            <a:ext cx="310896" cy="270017"/>
           </a:xfrm>
           <a:prstGeom prst="rect">
             <a:avLst/>
@@ -5398,8 +5398,8 @@
         </p:nvSpPr>
         <p:spPr>
           <a:xfrm>
-            <a:off x="6565392" y="5179807"/>
-            <a:ext cx="2011680" cy="248502"/>
+            <a:off x="6565392" y="5481021"/>
+            <a:ext cx="2011680" cy="270017"/>
           </a:xfrm>
           <a:prstGeom prst="rect">
             <a:avLst/>
@@ -5437,8 +5437,8 @@
         </p:nvSpPr>
         <p:spPr>
           <a:xfrm>
-            <a:off x="8650224" y="5235720"/>
-            <a:ext cx="69414" cy="136676"/>
+            <a:off x="8650224" y="5541775"/>
+            <a:ext cx="69414" cy="148509"/>
           </a:xfrm>
           <a:prstGeom prst="rect">
             <a:avLst/>
@@ -5457,8 +5457,8 @@
         </p:nvSpPr>
         <p:spPr>
           <a:xfrm>
-            <a:off x="10552176" y="5179807"/>
-            <a:ext cx="914400" cy="248502"/>
+            <a:off x="10552176" y="5481021"/>
+            <a:ext cx="914400" cy="270017"/>
           </a:xfrm>
           <a:prstGeom prst="rect">
             <a:avLst/>
@@ -5496,8 +5496,8 @@
         </p:nvSpPr>
         <p:spPr>
           <a:xfrm>
-            <a:off x="6208776" y="5428309"/>
-            <a:ext cx="310896" cy="248502"/>
+            <a:off x="6208776" y="5751038"/>
+            <a:ext cx="310896" cy="270017"/>
           </a:xfrm>
           <a:prstGeom prst="rect">
             <a:avLst/>
@@ -5535,8 +5535,8 @@
         </p:nvSpPr>
         <p:spPr>
           <a:xfrm>
-            <a:off x="6565392" y="5428309"/>
-            <a:ext cx="2011680" cy="248502"/>
+            <a:off x="6565392" y="5751038"/>
+            <a:ext cx="2011680" cy="270017"/>
           </a:xfrm>
           <a:prstGeom prst="rect">
             <a:avLst/>
@@ -5574,8 +5574,8 @@
         </p:nvSpPr>
         <p:spPr>
           <a:xfrm>
-            <a:off x="8650224" y="5484222"/>
-            <a:ext cx="61641" cy="136676"/>
+            <a:off x="8650224" y="5811792"/>
+            <a:ext cx="61641" cy="148509"/>
           </a:xfrm>
           <a:prstGeom prst="rect">
             <a:avLst/>
@@ -5594,8 +5594,8 @@
         </p:nvSpPr>
         <p:spPr>
           <a:xfrm>
-            <a:off x="10552176" y="5428309"/>
-            <a:ext cx="914400" cy="248502"/>
+            <a:off x="10552176" y="5751038"/>
+            <a:ext cx="914400" cy="270017"/>
           </a:xfrm>
           <a:prstGeom prst="rect">
             <a:avLst/>
@@ -5634,7 +5634,7 @@
         <p:spPr>
           <a:xfrm>
             <a:off x="6085332" y="1700784"/>
-            <a:ext cx="10973" cy="4224528"/>
+            <a:ext cx="10973" cy="4590288"/>
           </a:xfrm>
           <a:prstGeom prst="rect">
             <a:avLst/>
@@ -5644,65 +5644,6 @@
           </a:solidFill>
           <a:ln/>
         </p:spPr>
-      </p:sp>
-      <p:sp>
-        <p:nvSpPr>
-          <p:cNvPr id="141" name="Shape 139"/>
-          <p:cNvSpPr/>
-          <p:nvPr/>
-        </p:nvSpPr>
-        <p:spPr>
-          <a:xfrm>
-            <a:off x="457200" y="6126480"/>
-            <a:ext cx="11274552" cy="348996"/>
-          </a:xfrm>
-          <a:prstGeom prst="rect">
-            <a:avLst/>
-          </a:prstGeom>
-          <a:solidFill>
-            <a:srgbClr val="E6F6EE"/>
-          </a:solidFill>
-          <a:ln/>
-        </p:spPr>
-      </p:sp>
-      <p:sp>
-        <p:nvSpPr>
-          <p:cNvPr id="142" name="Text 140"/>
-          <p:cNvSpPr txBox="1"/>
-          <p:nvPr/>
-        </p:nvSpPr>
-        <p:spPr>
-          <a:xfrm>
-            <a:off x="658368" y="6144768"/>
-            <a:ext cx="10927080" cy="312420"/>
-          </a:xfrm>
-          <a:prstGeom prst="rect">
-            <a:avLst/>
-          </a:prstGeom>
-          <a:noFill/>
-          <a:ln/>
-        </p:spPr>
-        <p:txBody>
-          <a:bodyPr wrap="square" lIns="0" tIns="0" rIns="0" bIns="0" rtlCol="0" anchor="ctr"/>
-          <a:lstStyle/>
-          <a:p>
-            <a:pPr indent="0" marL="0">
-              <a:buNone/>
-            </a:pPr>
-            <a:r>
-              <a:rPr lang="en-US" sz="1450" b="1" dirty="0">
-                <a:solidFill>
-                  <a:srgbClr val="0B7A4A"/>
-                </a:solidFill>
-                <a:latin typeface="Inter" pitchFamily="34" charset="0"/>
-                <a:ea typeface="Inter" pitchFamily="34" charset="-122"/>
-                <a:cs typeface="Inter" pitchFamily="34" charset="-120"/>
-              </a:rPr>
-              <a:t>0.1 hour more on every CP RO is worth $6,602,564 a year in added gross. Toyota Henderson leads at $1,164,334.</a:t>
-            </a:r>
-            <a:endParaRPr lang="en-US" sz="1450" dirty="0"/>
-          </a:p>
-        </p:txBody>
       </p:sp>
     </p:spTree>
   </p:cSld>

--- a/day2-deck/decks/Hours per RO Value - Review.pptx
+++ b/day2-deck/decks/Hours per RO Value - Review.pptx
@@ -502,7 +502,7 @@
           <a:p>
             <a:r>
               <a:rPr lang="en-US" dirty="0"/>
-              <a:t>Takeaway (off the slide): 0.1 hour more on every CP RO is worth $6,602,564 a year in added gross. Toyota Henderson leads at $1,164,334.Source: Qlik - Closed Repair Orders. Customer pay, all CP ROs, Jan-Sep 2026 by close date. Same-store, INEOS excluded (opened 2026). GMC Prescott body shop labor types excluded. Each store: 0.1 x its CP RO count x its own customer-pay labor gross and parts gross per sold hour; a year = Jan-Sep x 12 / 9. Gross, not sale, so it will not match the $4,543,691 labor sale on the Hours per RO slide. Gross/yr = labor gross + parts gross a year. Parts assumes the extra hours carry the store's average customer-pay parts gross per sold hour.Talk track: 0.1 hour is six minutes of sold time on a visit - one more inspection item sold, one tire rotation, one cabin filter. Parts gross assumes the extra hours carry the store's usual parts.
+              <a:t>Takeaway with the store call-outs (off the slide): 0.1 hour more on every CP RO is worth $6,602,564 a year in added gross. Toyota Henderson leads at $1,164,334.Source: Qlik - Closed Repair Orders. Customer pay, all CP ROs, Jan-Sep 2026 by close date. Same-store, INEOS excluded (opened 2026). GMC Prescott body shop labor types excluded. Each store: 0.1 x its CP RO count x its own customer-pay labor gross and parts gross per sold hour; a year = Jan-Sep x 12 / 9. Gross, not sale, so it will not match the $4,543,691 labor sale on the Hours per RO slide. Gross/yr = labor gross + parts gross a year. Parts assumes the extra hours carry the store's average customer-pay parts gross per sold hour.Talk track: 0.1 hour is six minutes of sold time on a visit - one more inspection item sold, one tire rotation, one cabin filter. Parts gross assumes the extra hours carry the store's usual parts.
 TOYOTA HENDERSON: 53,084 CP ROs, 1.47 hrs/RO; +0.1 = $97,028 gross a month, $1,164,334 a year (labor $868,256, parts $296,078)
 HONDA HENDERSON: 22,527 CP ROs, 1.97 hrs/RO; +0.1 = $42,821 gross a month, $513,852 a year (labor $396,326, parts $117,527)
 CHEVY LV: 19,520 CP ROs, 2.30 hrs/RO; +0.1 = $34,189 gross a month, $410,273 a year (labor $295,521, parts $114,751)
@@ -1015,7 +1015,7 @@
         <p:spPr>
           <a:xfrm>
             <a:off x="457200" y="1207008"/>
-            <a:ext cx="11274552" cy="5148072"/>
+            <a:ext cx="11274552" cy="4782312"/>
           </a:xfrm>
           <a:prstGeom prst="rect">
             <a:avLst/>
@@ -1113,7 +1113,7 @@
         <p:spPr>
           <a:xfrm>
             <a:off x="658368" y="1700784"/>
-            <a:ext cx="310896" cy="270017"/>
+            <a:ext cx="310896" cy="248502"/>
           </a:xfrm>
           <a:prstGeom prst="rect">
             <a:avLst/>
@@ -1152,7 +1152,7 @@
         <p:spPr>
           <a:xfrm>
             <a:off x="1014984" y="1700784"/>
-            <a:ext cx="2011680" cy="270017"/>
+            <a:ext cx="2011680" cy="248502"/>
           </a:xfrm>
           <a:prstGeom prst="rect">
             <a:avLst/>
@@ -1190,8 +1190,8 @@
         </p:nvSpPr>
         <p:spPr>
           <a:xfrm>
-            <a:off x="3099816" y="1761538"/>
-            <a:ext cx="1847088" cy="148509"/>
+            <a:off x="3099816" y="1756697"/>
+            <a:ext cx="1847088" cy="136676"/>
           </a:xfrm>
           <a:prstGeom prst="rect">
             <a:avLst/>
@@ -1211,7 +1211,7 @@
         <p:spPr>
           <a:xfrm>
             <a:off x="5001768" y="1700784"/>
-            <a:ext cx="914400" cy="270017"/>
+            <a:ext cx="914400" cy="248502"/>
           </a:xfrm>
           <a:prstGeom prst="rect">
             <a:avLst/>
@@ -1249,8 +1249,8 @@
         </p:nvSpPr>
         <p:spPr>
           <a:xfrm>
-            <a:off x="658368" y="1970801"/>
-            <a:ext cx="310896" cy="270017"/>
+            <a:off x="658368" y="1949286"/>
+            <a:ext cx="310896" cy="248502"/>
           </a:xfrm>
           <a:prstGeom prst="rect">
             <a:avLst/>
@@ -1288,8 +1288,8 @@
         </p:nvSpPr>
         <p:spPr>
           <a:xfrm>
-            <a:off x="1014984" y="1970801"/>
-            <a:ext cx="2011680" cy="270017"/>
+            <a:off x="1014984" y="1949286"/>
+            <a:ext cx="2011680" cy="248502"/>
           </a:xfrm>
           <a:prstGeom prst="rect">
             <a:avLst/>
@@ -1327,8 +1327,8 @@
         </p:nvSpPr>
         <p:spPr>
           <a:xfrm>
-            <a:off x="3099816" y="2031555"/>
-            <a:ext cx="815170" cy="148509"/>
+            <a:off x="3099816" y="2005199"/>
+            <a:ext cx="815170" cy="136676"/>
           </a:xfrm>
           <a:prstGeom prst="rect">
             <a:avLst/>
@@ -1347,8 +1347,8 @@
         </p:nvSpPr>
         <p:spPr>
           <a:xfrm>
-            <a:off x="5001768" y="1970801"/>
-            <a:ext cx="914400" cy="270017"/>
+            <a:off x="5001768" y="1949286"/>
+            <a:ext cx="914400" cy="248502"/>
           </a:xfrm>
           <a:prstGeom prst="rect">
             <a:avLst/>
@@ -1386,8 +1386,8 @@
         </p:nvSpPr>
         <p:spPr>
           <a:xfrm>
-            <a:off x="658368" y="2240818"/>
-            <a:ext cx="310896" cy="270017"/>
+            <a:off x="658368" y="2197787"/>
+            <a:ext cx="310896" cy="248502"/>
           </a:xfrm>
           <a:prstGeom prst="rect">
             <a:avLst/>
@@ -1425,8 +1425,8 @@
         </p:nvSpPr>
         <p:spPr>
           <a:xfrm>
-            <a:off x="1014984" y="2240818"/>
-            <a:ext cx="2011680" cy="270017"/>
+            <a:off x="1014984" y="2197787"/>
+            <a:ext cx="2011680" cy="248502"/>
           </a:xfrm>
           <a:prstGeom prst="rect">
             <a:avLst/>
@@ -1464,8 +1464,8 @@
         </p:nvSpPr>
         <p:spPr>
           <a:xfrm>
-            <a:off x="3099816" y="2301572"/>
-            <a:ext cx="650852" cy="148509"/>
+            <a:off x="3099816" y="2253700"/>
+            <a:ext cx="650852" cy="136676"/>
           </a:xfrm>
           <a:prstGeom prst="rect">
             <a:avLst/>
@@ -1484,8 +1484,8 @@
         </p:nvSpPr>
         <p:spPr>
           <a:xfrm>
-            <a:off x="5001768" y="2240818"/>
-            <a:ext cx="914400" cy="270017"/>
+            <a:off x="5001768" y="2197787"/>
+            <a:ext cx="914400" cy="248502"/>
           </a:xfrm>
           <a:prstGeom prst="rect">
             <a:avLst/>
@@ -1523,8 +1523,8 @@
         </p:nvSpPr>
         <p:spPr>
           <a:xfrm>
-            <a:off x="658368" y="2510835"/>
-            <a:ext cx="310896" cy="270017"/>
+            <a:off x="658368" y="2446289"/>
+            <a:ext cx="310896" cy="248502"/>
           </a:xfrm>
           <a:prstGeom prst="rect">
             <a:avLst/>
@@ -1562,8 +1562,8 @@
         </p:nvSpPr>
         <p:spPr>
           <a:xfrm>
-            <a:off x="1014984" y="2510835"/>
-            <a:ext cx="2011680" cy="270017"/>
+            <a:off x="1014984" y="2446289"/>
+            <a:ext cx="2011680" cy="248502"/>
           </a:xfrm>
           <a:prstGeom prst="rect">
             <a:avLst/>
@@ -1601,8 +1601,8 @@
         </p:nvSpPr>
         <p:spPr>
           <a:xfrm>
-            <a:off x="3099816" y="2571589"/>
-            <a:ext cx="548052" cy="148509"/>
+            <a:off x="3099816" y="2502202"/>
+            <a:ext cx="548052" cy="136676"/>
           </a:xfrm>
           <a:prstGeom prst="rect">
             <a:avLst/>
@@ -1621,8 +1621,8 @@
         </p:nvSpPr>
         <p:spPr>
           <a:xfrm>
-            <a:off x="5001768" y="2510835"/>
-            <a:ext cx="914400" cy="270017"/>
+            <a:off x="5001768" y="2446289"/>
+            <a:ext cx="914400" cy="248502"/>
           </a:xfrm>
           <a:prstGeom prst="rect">
             <a:avLst/>
@@ -1660,8 +1660,8 @@
         </p:nvSpPr>
         <p:spPr>
           <a:xfrm>
-            <a:off x="658368" y="2780852"/>
-            <a:ext cx="310896" cy="270017"/>
+            <a:off x="658368" y="2694791"/>
+            <a:ext cx="310896" cy="248502"/>
           </a:xfrm>
           <a:prstGeom prst="rect">
             <a:avLst/>
@@ -1699,8 +1699,8 @@
         </p:nvSpPr>
         <p:spPr>
           <a:xfrm>
-            <a:off x="1014984" y="2780852"/>
-            <a:ext cx="2011680" cy="270017"/>
+            <a:off x="1014984" y="2694791"/>
+            <a:ext cx="2011680" cy="248502"/>
           </a:xfrm>
           <a:prstGeom prst="rect">
             <a:avLst/>
@@ -1738,8 +1738,8 @@
         </p:nvSpPr>
         <p:spPr>
           <a:xfrm>
-            <a:off x="3099816" y="2841606"/>
-            <a:ext cx="538230" cy="148509"/>
+            <a:off x="3099816" y="2750703"/>
+            <a:ext cx="538230" cy="136676"/>
           </a:xfrm>
           <a:prstGeom prst="rect">
             <a:avLst/>
@@ -1758,8 +1758,8 @@
         </p:nvSpPr>
         <p:spPr>
           <a:xfrm>
-            <a:off x="5001768" y="2780852"/>
-            <a:ext cx="914400" cy="270017"/>
+            <a:off x="5001768" y="2694791"/>
+            <a:ext cx="914400" cy="248502"/>
           </a:xfrm>
           <a:prstGeom prst="rect">
             <a:avLst/>
@@ -1797,8 +1797,8 @@
         </p:nvSpPr>
         <p:spPr>
           <a:xfrm>
-            <a:off x="658368" y="3050869"/>
-            <a:ext cx="310896" cy="270017"/>
+            <a:off x="658368" y="2943292"/>
+            <a:ext cx="310896" cy="248502"/>
           </a:xfrm>
           <a:prstGeom prst="rect">
             <a:avLst/>
@@ -1836,8 +1836,8 @@
         </p:nvSpPr>
         <p:spPr>
           <a:xfrm>
-            <a:off x="1014984" y="3050869"/>
-            <a:ext cx="2011680" cy="270017"/>
+            <a:off x="1014984" y="2943292"/>
+            <a:ext cx="2011680" cy="248502"/>
           </a:xfrm>
           <a:prstGeom prst="rect">
             <a:avLst/>
@@ -1875,8 +1875,8 @@
         </p:nvSpPr>
         <p:spPr>
           <a:xfrm>
-            <a:off x="3099816" y="3111623"/>
-            <a:ext cx="532055" cy="148509"/>
+            <a:off x="3099816" y="2999205"/>
+            <a:ext cx="532055" cy="136676"/>
           </a:xfrm>
           <a:prstGeom prst="rect">
             <a:avLst/>
@@ -1895,8 +1895,8 @@
         </p:nvSpPr>
         <p:spPr>
           <a:xfrm>
-            <a:off x="5001768" y="3050869"/>
-            <a:ext cx="914400" cy="270017"/>
+            <a:off x="5001768" y="2943292"/>
+            <a:ext cx="914400" cy="248502"/>
           </a:xfrm>
           <a:prstGeom prst="rect">
             <a:avLst/>
@@ -1934,8 +1934,8 @@
         </p:nvSpPr>
         <p:spPr>
           <a:xfrm>
-            <a:off x="658368" y="3320886"/>
-            <a:ext cx="310896" cy="270017"/>
+            <a:off x="658368" y="3191794"/>
+            <a:ext cx="310896" cy="248502"/>
           </a:xfrm>
           <a:prstGeom prst="rect">
             <a:avLst/>
@@ -1973,8 +1973,8 @@
         </p:nvSpPr>
         <p:spPr>
           <a:xfrm>
-            <a:off x="1014984" y="3320886"/>
-            <a:ext cx="2011680" cy="270017"/>
+            <a:off x="1014984" y="3191794"/>
+            <a:ext cx="2011680" cy="248502"/>
           </a:xfrm>
           <a:prstGeom prst="rect">
             <a:avLst/>
@@ -2012,8 +2012,8 @@
         </p:nvSpPr>
         <p:spPr>
           <a:xfrm>
-            <a:off x="3099816" y="3381639"/>
-            <a:ext cx="488857" cy="148509"/>
+            <a:off x="3099816" y="3247707"/>
+            <a:ext cx="488857" cy="136676"/>
           </a:xfrm>
           <a:prstGeom prst="rect">
             <a:avLst/>
@@ -2032,8 +2032,8 @@
         </p:nvSpPr>
         <p:spPr>
           <a:xfrm>
-            <a:off x="5001768" y="3320886"/>
-            <a:ext cx="914400" cy="270017"/>
+            <a:off x="5001768" y="3191794"/>
+            <a:ext cx="914400" cy="248502"/>
           </a:xfrm>
           <a:prstGeom prst="rect">
             <a:avLst/>
@@ -2071,8 +2071,8 @@
         </p:nvSpPr>
         <p:spPr>
           <a:xfrm>
-            <a:off x="658368" y="3590903"/>
-            <a:ext cx="310896" cy="270017"/>
+            <a:off x="658368" y="3440296"/>
+            <a:ext cx="310896" cy="248502"/>
           </a:xfrm>
           <a:prstGeom prst="rect">
             <a:avLst/>
@@ -2110,8 +2110,8 @@
         </p:nvSpPr>
         <p:spPr>
           <a:xfrm>
-            <a:off x="1014984" y="3590903"/>
-            <a:ext cx="2011680" cy="270017"/>
+            <a:off x="1014984" y="3440296"/>
+            <a:ext cx="2011680" cy="248502"/>
           </a:xfrm>
           <a:prstGeom prst="rect">
             <a:avLst/>
@@ -2149,8 +2149,8 @@
         </p:nvSpPr>
         <p:spPr>
           <a:xfrm>
-            <a:off x="3099816" y="3651656"/>
-            <a:ext cx="486976" cy="148509"/>
+            <a:off x="3099816" y="3496208"/>
+            <a:ext cx="486976" cy="136676"/>
           </a:xfrm>
           <a:prstGeom prst="rect">
             <a:avLst/>
@@ -2169,8 +2169,8 @@
         </p:nvSpPr>
         <p:spPr>
           <a:xfrm>
-            <a:off x="5001768" y="3590903"/>
-            <a:ext cx="914400" cy="270017"/>
+            <a:off x="5001768" y="3440296"/>
+            <a:ext cx="914400" cy="248502"/>
           </a:xfrm>
           <a:prstGeom prst="rect">
             <a:avLst/>
@@ -2208,8 +2208,8 @@
         </p:nvSpPr>
         <p:spPr>
           <a:xfrm>
-            <a:off x="658368" y="3860920"/>
-            <a:ext cx="310896" cy="270017"/>
+            <a:off x="658368" y="3688797"/>
+            <a:ext cx="310896" cy="248502"/>
           </a:xfrm>
           <a:prstGeom prst="rect">
             <a:avLst/>
@@ -2247,8 +2247,8 @@
         </p:nvSpPr>
         <p:spPr>
           <a:xfrm>
-            <a:off x="1014984" y="3860920"/>
-            <a:ext cx="2011680" cy="270017"/>
+            <a:off x="1014984" y="3688797"/>
+            <a:ext cx="2011680" cy="248502"/>
           </a:xfrm>
           <a:prstGeom prst="rect">
             <a:avLst/>
@@ -2286,8 +2286,8 @@
         </p:nvSpPr>
         <p:spPr>
           <a:xfrm>
-            <a:off x="3099816" y="3921673"/>
-            <a:ext cx="311151" cy="148509"/>
+            <a:off x="3099816" y="3744710"/>
+            <a:ext cx="311151" cy="136676"/>
           </a:xfrm>
           <a:prstGeom prst="rect">
             <a:avLst/>
@@ -2306,8 +2306,8 @@
         </p:nvSpPr>
         <p:spPr>
           <a:xfrm>
-            <a:off x="5001768" y="3860920"/>
-            <a:ext cx="914400" cy="270017"/>
+            <a:off x="5001768" y="3688797"/>
+            <a:ext cx="914400" cy="248502"/>
           </a:xfrm>
           <a:prstGeom prst="rect">
             <a:avLst/>
@@ -2345,8 +2345,8 @@
         </p:nvSpPr>
         <p:spPr>
           <a:xfrm>
-            <a:off x="658368" y="4130936"/>
-            <a:ext cx="310896" cy="270017"/>
+            <a:off x="658368" y="3937299"/>
+            <a:ext cx="310896" cy="248502"/>
           </a:xfrm>
           <a:prstGeom prst="rect">
             <a:avLst/>
@@ -2384,8 +2384,8 @@
         </p:nvSpPr>
         <p:spPr>
           <a:xfrm>
-            <a:off x="1014984" y="4130936"/>
-            <a:ext cx="2011680" cy="270017"/>
+            <a:off x="1014984" y="3937299"/>
+            <a:ext cx="2011680" cy="248502"/>
           </a:xfrm>
           <a:prstGeom prst="rect">
             <a:avLst/>
@@ -2423,8 +2423,8 @@
         </p:nvSpPr>
         <p:spPr>
           <a:xfrm>
-            <a:off x="3099816" y="4191690"/>
-            <a:ext cx="294048" cy="148509"/>
+            <a:off x="3099816" y="3993212"/>
+            <a:ext cx="294048" cy="136676"/>
           </a:xfrm>
           <a:prstGeom prst="rect">
             <a:avLst/>
@@ -2443,8 +2443,8 @@
         </p:nvSpPr>
         <p:spPr>
           <a:xfrm>
-            <a:off x="5001768" y="4130936"/>
-            <a:ext cx="914400" cy="270017"/>
+            <a:off x="5001768" y="3937299"/>
+            <a:ext cx="914400" cy="248502"/>
           </a:xfrm>
           <a:prstGeom prst="rect">
             <a:avLst/>
@@ -2482,8 +2482,8 @@
         </p:nvSpPr>
         <p:spPr>
           <a:xfrm>
-            <a:off x="658368" y="4400953"/>
-            <a:ext cx="310896" cy="270017"/>
+            <a:off x="658368" y="4185800"/>
+            <a:ext cx="310896" cy="248502"/>
           </a:xfrm>
           <a:prstGeom prst="rect">
             <a:avLst/>
@@ -2521,8 +2521,8 @@
         </p:nvSpPr>
         <p:spPr>
           <a:xfrm>
-            <a:off x="1014984" y="4400953"/>
-            <a:ext cx="2011680" cy="270017"/>
+            <a:off x="1014984" y="4185800"/>
+            <a:ext cx="2011680" cy="248502"/>
           </a:xfrm>
           <a:prstGeom prst="rect">
             <a:avLst/>
@@ -2560,8 +2560,8 @@
         </p:nvSpPr>
         <p:spPr>
           <a:xfrm>
-            <a:off x="3099816" y="4461707"/>
-            <a:ext cx="283945" cy="148509"/>
+            <a:off x="3099816" y="4241713"/>
+            <a:ext cx="283945" cy="136676"/>
           </a:xfrm>
           <a:prstGeom prst="rect">
             <a:avLst/>
@@ -2580,8 +2580,8 @@
         </p:nvSpPr>
         <p:spPr>
           <a:xfrm>
-            <a:off x="5001768" y="4400953"/>
-            <a:ext cx="914400" cy="270017"/>
+            <a:off x="5001768" y="4185800"/>
+            <a:ext cx="914400" cy="248502"/>
           </a:xfrm>
           <a:prstGeom prst="rect">
             <a:avLst/>
@@ -2619,8 +2619,8 @@
         </p:nvSpPr>
         <p:spPr>
           <a:xfrm>
-            <a:off x="658368" y="4670970"/>
-            <a:ext cx="310896" cy="270017"/>
+            <a:off x="658368" y="4434302"/>
+            <a:ext cx="310896" cy="248502"/>
           </a:xfrm>
           <a:prstGeom prst="rect">
             <a:avLst/>
@@ -2658,8 +2658,8 @@
         </p:nvSpPr>
         <p:spPr>
           <a:xfrm>
-            <a:off x="1014984" y="4670970"/>
-            <a:ext cx="2011680" cy="270017"/>
+            <a:off x="1014984" y="4434302"/>
+            <a:ext cx="2011680" cy="248502"/>
           </a:xfrm>
           <a:prstGeom prst="rect">
             <a:avLst/>
@@ -2697,8 +2697,8 @@
         </p:nvSpPr>
         <p:spPr>
           <a:xfrm>
-            <a:off x="3099816" y="4731724"/>
-            <a:ext cx="240854" cy="148509"/>
+            <a:off x="3099816" y="4490215"/>
+            <a:ext cx="240854" cy="136676"/>
           </a:xfrm>
           <a:prstGeom prst="rect">
             <a:avLst/>
@@ -2717,8 +2717,8 @@
         </p:nvSpPr>
         <p:spPr>
           <a:xfrm>
-            <a:off x="5001768" y="4670970"/>
-            <a:ext cx="914400" cy="270017"/>
+            <a:off x="5001768" y="4434302"/>
+            <a:ext cx="914400" cy="248502"/>
           </a:xfrm>
           <a:prstGeom prst="rect">
             <a:avLst/>
@@ -2756,8 +2756,8 @@
         </p:nvSpPr>
         <p:spPr>
           <a:xfrm>
-            <a:off x="658368" y="4940987"/>
-            <a:ext cx="310896" cy="270017"/>
+            <a:off x="658368" y="4682804"/>
+            <a:ext cx="310896" cy="248502"/>
           </a:xfrm>
           <a:prstGeom prst="rect">
             <a:avLst/>
@@ -2795,8 +2795,8 @@
         </p:nvSpPr>
         <p:spPr>
           <a:xfrm>
-            <a:off x="1014984" y="4940987"/>
-            <a:ext cx="2011680" cy="270017"/>
+            <a:off x="1014984" y="4682804"/>
+            <a:ext cx="2011680" cy="248502"/>
           </a:xfrm>
           <a:prstGeom prst="rect">
             <a:avLst/>
@@ -2834,8 +2834,8 @@
         </p:nvSpPr>
         <p:spPr>
           <a:xfrm>
-            <a:off x="3099816" y="5001741"/>
-            <a:ext cx="236258" cy="148509"/>
+            <a:off x="3099816" y="4738717"/>
+            <a:ext cx="236258" cy="136676"/>
           </a:xfrm>
           <a:prstGeom prst="rect">
             <a:avLst/>
@@ -2854,8 +2854,8 @@
         </p:nvSpPr>
         <p:spPr>
           <a:xfrm>
-            <a:off x="5001768" y="4940987"/>
-            <a:ext cx="914400" cy="270017"/>
+            <a:off x="5001768" y="4682804"/>
+            <a:ext cx="914400" cy="248502"/>
           </a:xfrm>
           <a:prstGeom prst="rect">
             <a:avLst/>
@@ -2893,8 +2893,8 @@
         </p:nvSpPr>
         <p:spPr>
           <a:xfrm>
-            <a:off x="658368" y="5211004"/>
-            <a:ext cx="310896" cy="270017"/>
+            <a:off x="658368" y="4931305"/>
+            <a:ext cx="310896" cy="248502"/>
           </a:xfrm>
           <a:prstGeom prst="rect">
             <a:avLst/>
@@ -2932,8 +2932,8 @@
         </p:nvSpPr>
         <p:spPr>
           <a:xfrm>
-            <a:off x="1014984" y="5211004"/>
-            <a:ext cx="2011680" cy="270017"/>
+            <a:off x="1014984" y="4931305"/>
+            <a:ext cx="2011680" cy="248502"/>
           </a:xfrm>
           <a:prstGeom prst="rect">
             <a:avLst/>
@@ -2971,8 +2971,8 @@
         </p:nvSpPr>
         <p:spPr>
           <a:xfrm>
-            <a:off x="3099816" y="5271758"/>
-            <a:ext cx="232096" cy="148509"/>
+            <a:off x="3099816" y="4987218"/>
+            <a:ext cx="232096" cy="136676"/>
           </a:xfrm>
           <a:prstGeom prst="rect">
             <a:avLst/>
@@ -2991,8 +2991,8 @@
         </p:nvSpPr>
         <p:spPr>
           <a:xfrm>
-            <a:off x="5001768" y="5211004"/>
-            <a:ext cx="914400" cy="270017"/>
+            <a:off x="5001768" y="4931305"/>
+            <a:ext cx="914400" cy="248502"/>
           </a:xfrm>
           <a:prstGeom prst="rect">
             <a:avLst/>
@@ -3030,8 +3030,8 @@
         </p:nvSpPr>
         <p:spPr>
           <a:xfrm>
-            <a:off x="658368" y="5481021"/>
-            <a:ext cx="310896" cy="270017"/>
+            <a:off x="658368" y="5179807"/>
+            <a:ext cx="310896" cy="248502"/>
           </a:xfrm>
           <a:prstGeom prst="rect">
             <a:avLst/>
@@ -3069,8 +3069,8 @@
         </p:nvSpPr>
         <p:spPr>
           <a:xfrm>
-            <a:off x="1014984" y="5481021"/>
-            <a:ext cx="2011680" cy="270017"/>
+            <a:off x="1014984" y="5179807"/>
+            <a:ext cx="2011680" cy="248502"/>
           </a:xfrm>
           <a:prstGeom prst="rect">
             <a:avLst/>
@@ -3108,8 +3108,8 @@
         </p:nvSpPr>
         <p:spPr>
           <a:xfrm>
-            <a:off x="3099816" y="5541775"/>
-            <a:ext cx="224903" cy="148509"/>
+            <a:off x="3099816" y="5235720"/>
+            <a:ext cx="224903" cy="136676"/>
           </a:xfrm>
           <a:prstGeom prst="rect">
             <a:avLst/>
@@ -3128,8 +3128,8 @@
         </p:nvSpPr>
         <p:spPr>
           <a:xfrm>
-            <a:off x="5001768" y="5481021"/>
-            <a:ext cx="914400" cy="270017"/>
+            <a:off x="5001768" y="5179807"/>
+            <a:ext cx="914400" cy="248502"/>
           </a:xfrm>
           <a:prstGeom prst="rect">
             <a:avLst/>
@@ -3167,8 +3167,8 @@
         </p:nvSpPr>
         <p:spPr>
           <a:xfrm>
-            <a:off x="658368" y="5751038"/>
-            <a:ext cx="310896" cy="270017"/>
+            <a:off x="658368" y="5428309"/>
+            <a:ext cx="310896" cy="248502"/>
           </a:xfrm>
           <a:prstGeom prst="rect">
             <a:avLst/>
@@ -3206,8 +3206,8 @@
         </p:nvSpPr>
         <p:spPr>
           <a:xfrm>
-            <a:off x="1014984" y="5751038"/>
-            <a:ext cx="2011680" cy="270017"/>
+            <a:off x="1014984" y="5428309"/>
+            <a:ext cx="2011680" cy="248502"/>
           </a:xfrm>
           <a:prstGeom prst="rect">
             <a:avLst/>
@@ -3245,8 +3245,8 @@
         </p:nvSpPr>
         <p:spPr>
           <a:xfrm>
-            <a:off x="3099816" y="5811792"/>
-            <a:ext cx="213249" cy="148509"/>
+            <a:off x="3099816" y="5484222"/>
+            <a:ext cx="213249" cy="136676"/>
           </a:xfrm>
           <a:prstGeom prst="rect">
             <a:avLst/>
@@ -3265,8 +3265,8 @@
         </p:nvSpPr>
         <p:spPr>
           <a:xfrm>
-            <a:off x="5001768" y="5751038"/>
-            <a:ext cx="914400" cy="270017"/>
+            <a:off x="5001768" y="5428309"/>
+            <a:ext cx="914400" cy="248502"/>
           </a:xfrm>
           <a:prstGeom prst="rect">
             <a:avLst/>
@@ -3304,8 +3304,8 @@
         </p:nvSpPr>
         <p:spPr>
           <a:xfrm>
-            <a:off x="658368" y="6021055"/>
-            <a:ext cx="310896" cy="270017"/>
+            <a:off x="658368" y="5676810"/>
+            <a:ext cx="310896" cy="248502"/>
           </a:xfrm>
           <a:prstGeom prst="rect">
             <a:avLst/>
@@ -3343,8 +3343,8 @@
         </p:nvSpPr>
         <p:spPr>
           <a:xfrm>
-            <a:off x="1014984" y="6021055"/>
-            <a:ext cx="2011680" cy="270017"/>
+            <a:off x="1014984" y="5676810"/>
+            <a:ext cx="2011680" cy="248502"/>
           </a:xfrm>
           <a:prstGeom prst="rect">
             <a:avLst/>
@@ -3382,8 +3382,8 @@
         </p:nvSpPr>
         <p:spPr>
           <a:xfrm>
-            <a:off x="3099816" y="6081809"/>
-            <a:ext cx="211785" cy="148509"/>
+            <a:off x="3099816" y="5732723"/>
+            <a:ext cx="211785" cy="136676"/>
           </a:xfrm>
           <a:prstGeom prst="rect">
             <a:avLst/>
@@ -3402,8 +3402,8 @@
         </p:nvSpPr>
         <p:spPr>
           <a:xfrm>
-            <a:off x="5001768" y="6021055"/>
-            <a:ext cx="914400" cy="270017"/>
+            <a:off x="5001768" y="5676810"/>
+            <a:ext cx="914400" cy="248502"/>
           </a:xfrm>
           <a:prstGeom prst="rect">
             <a:avLst/>
@@ -3442,7 +3442,7 @@
         <p:spPr>
           <a:xfrm>
             <a:off x="6208776" y="1700784"/>
-            <a:ext cx="310896" cy="270017"/>
+            <a:ext cx="310896" cy="248502"/>
           </a:xfrm>
           <a:prstGeom prst="rect">
             <a:avLst/>
@@ -3481,7 +3481,7 @@
         <p:spPr>
           <a:xfrm>
             <a:off x="6565392" y="1700784"/>
-            <a:ext cx="2011680" cy="270017"/>
+            <a:ext cx="2011680" cy="248502"/>
           </a:xfrm>
           <a:prstGeom prst="rect">
             <a:avLst/>
@@ -3519,8 +3519,8 @@
         </p:nvSpPr>
         <p:spPr>
           <a:xfrm>
-            <a:off x="8650224" y="1761538"/>
-            <a:ext cx="210549" cy="148509"/>
+            <a:off x="8650224" y="1756697"/>
+            <a:ext cx="210549" cy="136676"/>
           </a:xfrm>
           <a:prstGeom prst="rect">
             <a:avLst/>
@@ -3540,7 +3540,7 @@
         <p:spPr>
           <a:xfrm>
             <a:off x="10552176" y="1700784"/>
-            <a:ext cx="914400" cy="270017"/>
+            <a:ext cx="914400" cy="248502"/>
           </a:xfrm>
           <a:prstGeom prst="rect">
             <a:avLst/>
@@ -3578,8 +3578,8 @@
         </p:nvSpPr>
         <p:spPr>
           <a:xfrm>
-            <a:off x="6208776" y="1970801"/>
-            <a:ext cx="310896" cy="270017"/>
+            <a:off x="6208776" y="1949286"/>
+            <a:ext cx="310896" cy="248502"/>
           </a:xfrm>
           <a:prstGeom prst="rect">
             <a:avLst/>
@@ -3617,8 +3617,8 @@
         </p:nvSpPr>
         <p:spPr>
           <a:xfrm>
-            <a:off x="6565392" y="1970801"/>
-            <a:ext cx="2011680" cy="270017"/>
+            <a:off x="6565392" y="1949286"/>
+            <a:ext cx="2011680" cy="248502"/>
           </a:xfrm>
           <a:prstGeom prst="rect">
             <a:avLst/>
@@ -3656,8 +3656,8 @@
         </p:nvSpPr>
         <p:spPr>
           <a:xfrm>
-            <a:off x="8650224" y="2031555"/>
-            <a:ext cx="209258" cy="148509"/>
+            <a:off x="8650224" y="2005199"/>
+            <a:ext cx="209258" cy="136676"/>
           </a:xfrm>
           <a:prstGeom prst="rect">
             <a:avLst/>
@@ -3676,8 +3676,8 @@
         </p:nvSpPr>
         <p:spPr>
           <a:xfrm>
-            <a:off x="10552176" y="1970801"/>
-            <a:ext cx="914400" cy="270017"/>
+            <a:off x="10552176" y="1949286"/>
+            <a:ext cx="914400" cy="248502"/>
           </a:xfrm>
           <a:prstGeom prst="rect">
             <a:avLst/>
@@ -3715,8 +3715,8 @@
         </p:nvSpPr>
         <p:spPr>
           <a:xfrm>
-            <a:off x="6208776" y="2240818"/>
-            <a:ext cx="310896" cy="270017"/>
+            <a:off x="6208776" y="2197787"/>
+            <a:ext cx="310896" cy="248502"/>
           </a:xfrm>
           <a:prstGeom prst="rect">
             <a:avLst/>
@@ -3754,8 +3754,8 @@
         </p:nvSpPr>
         <p:spPr>
           <a:xfrm>
-            <a:off x="6565392" y="2240818"/>
-            <a:ext cx="2011680" cy="270017"/>
+            <a:off x="6565392" y="2197787"/>
+            <a:ext cx="2011680" cy="248502"/>
           </a:xfrm>
           <a:prstGeom prst="rect">
             <a:avLst/>
@@ -3793,8 +3793,8 @@
         </p:nvSpPr>
         <p:spPr>
           <a:xfrm>
-            <a:off x="8650224" y="2301572"/>
-            <a:ext cx="205646" cy="148509"/>
+            <a:off x="8650224" y="2253700"/>
+            <a:ext cx="205646" cy="136676"/>
           </a:xfrm>
           <a:prstGeom prst="rect">
             <a:avLst/>
@@ -3813,8 +3813,8 @@
         </p:nvSpPr>
         <p:spPr>
           <a:xfrm>
-            <a:off x="10552176" y="2240818"/>
-            <a:ext cx="914400" cy="270017"/>
+            <a:off x="10552176" y="2197787"/>
+            <a:ext cx="914400" cy="248502"/>
           </a:xfrm>
           <a:prstGeom prst="rect">
             <a:avLst/>
@@ -3852,8 +3852,8 @@
         </p:nvSpPr>
         <p:spPr>
           <a:xfrm>
-            <a:off x="6208776" y="2510835"/>
-            <a:ext cx="310896" cy="270017"/>
+            <a:off x="6208776" y="2446289"/>
+            <a:ext cx="310896" cy="248502"/>
           </a:xfrm>
           <a:prstGeom prst="rect">
             <a:avLst/>
@@ -3891,8 +3891,8 @@
         </p:nvSpPr>
         <p:spPr>
           <a:xfrm>
-            <a:off x="6565392" y="2510835"/>
-            <a:ext cx="2011680" cy="270017"/>
+            <a:off x="6565392" y="2446289"/>
+            <a:ext cx="2011680" cy="248502"/>
           </a:xfrm>
           <a:prstGeom prst="rect">
             <a:avLst/>
@@ -3930,8 +3930,8 @@
         </p:nvSpPr>
         <p:spPr>
           <a:xfrm>
-            <a:off x="8650224" y="2571589"/>
-            <a:ext cx="194412" cy="148509"/>
+            <a:off x="8650224" y="2502202"/>
+            <a:ext cx="194412" cy="136676"/>
           </a:xfrm>
           <a:prstGeom prst="rect">
             <a:avLst/>
@@ -3950,8 +3950,8 @@
         </p:nvSpPr>
         <p:spPr>
           <a:xfrm>
-            <a:off x="10552176" y="2510835"/>
-            <a:ext cx="914400" cy="270017"/>
+            <a:off x="10552176" y="2446289"/>
+            <a:ext cx="914400" cy="248502"/>
           </a:xfrm>
           <a:prstGeom prst="rect">
             <a:avLst/>
@@ -3989,8 +3989,8 @@
         </p:nvSpPr>
         <p:spPr>
           <a:xfrm>
-            <a:off x="6208776" y="2780852"/>
-            <a:ext cx="310896" cy="270017"/>
+            <a:off x="6208776" y="2694791"/>
+            <a:ext cx="310896" cy="248502"/>
           </a:xfrm>
           <a:prstGeom prst="rect">
             <a:avLst/>
@@ -4028,8 +4028,8 @@
         </p:nvSpPr>
         <p:spPr>
           <a:xfrm>
-            <a:off x="6565392" y="2780852"/>
-            <a:ext cx="2011680" cy="270017"/>
+            <a:off x="6565392" y="2694791"/>
+            <a:ext cx="2011680" cy="248502"/>
           </a:xfrm>
           <a:prstGeom prst="rect">
             <a:avLst/>
@@ -4067,8 +4067,8 @@
         </p:nvSpPr>
         <p:spPr>
           <a:xfrm>
-            <a:off x="8650224" y="2841606"/>
-            <a:ext cx="187233" cy="148509"/>
+            <a:off x="8650224" y="2750703"/>
+            <a:ext cx="187233" cy="136676"/>
           </a:xfrm>
           <a:prstGeom prst="rect">
             <a:avLst/>
@@ -4087,8 +4087,8 @@
         </p:nvSpPr>
         <p:spPr>
           <a:xfrm>
-            <a:off x="10552176" y="2780852"/>
-            <a:ext cx="914400" cy="270017"/>
+            <a:off x="10552176" y="2694791"/>
+            <a:ext cx="914400" cy="248502"/>
           </a:xfrm>
           <a:prstGeom prst="rect">
             <a:avLst/>
@@ -4126,8 +4126,8 @@
         </p:nvSpPr>
         <p:spPr>
           <a:xfrm>
-            <a:off x="6208776" y="3050869"/>
-            <a:ext cx="310896" cy="270017"/>
+            <a:off x="6208776" y="2943292"/>
+            <a:ext cx="310896" cy="248502"/>
           </a:xfrm>
           <a:prstGeom prst="rect">
             <a:avLst/>
@@ -4165,8 +4165,8 @@
         </p:nvSpPr>
         <p:spPr>
           <a:xfrm>
-            <a:off x="6565392" y="3050869"/>
-            <a:ext cx="2011680" cy="270017"/>
+            <a:off x="6565392" y="2943292"/>
+            <a:ext cx="2011680" cy="248502"/>
           </a:xfrm>
           <a:prstGeom prst="rect">
             <a:avLst/>
@@ -4204,8 +4204,8 @@
         </p:nvSpPr>
         <p:spPr>
           <a:xfrm>
-            <a:off x="8650224" y="3111623"/>
-            <a:ext cx="182551" cy="148509"/>
+            <a:off x="8650224" y="2999205"/>
+            <a:ext cx="182551" cy="136676"/>
           </a:xfrm>
           <a:prstGeom prst="rect">
             <a:avLst/>
@@ -4224,8 +4224,8 @@
         </p:nvSpPr>
         <p:spPr>
           <a:xfrm>
-            <a:off x="10552176" y="3050869"/>
-            <a:ext cx="914400" cy="270017"/>
+            <a:off x="10552176" y="2943292"/>
+            <a:ext cx="914400" cy="248502"/>
           </a:xfrm>
           <a:prstGeom prst="rect">
             <a:avLst/>
@@ -4263,8 +4263,8 @@
         </p:nvSpPr>
         <p:spPr>
           <a:xfrm>
-            <a:off x="6208776" y="3320886"/>
-            <a:ext cx="310896" cy="270017"/>
+            <a:off x="6208776" y="3191794"/>
+            <a:ext cx="310896" cy="248502"/>
           </a:xfrm>
           <a:prstGeom prst="rect">
             <a:avLst/>
@@ -4302,8 +4302,8 @@
         </p:nvSpPr>
         <p:spPr>
           <a:xfrm>
-            <a:off x="6565392" y="3320886"/>
-            <a:ext cx="2011680" cy="270017"/>
+            <a:off x="6565392" y="3191794"/>
+            <a:ext cx="2011680" cy="248502"/>
           </a:xfrm>
           <a:prstGeom prst="rect">
             <a:avLst/>
@@ -4341,8 +4341,8 @@
         </p:nvSpPr>
         <p:spPr>
           <a:xfrm>
-            <a:off x="8650224" y="3381639"/>
-            <a:ext cx="160249" cy="148509"/>
+            <a:off x="8650224" y="3247707"/>
+            <a:ext cx="160249" cy="136676"/>
           </a:xfrm>
           <a:prstGeom prst="rect">
             <a:avLst/>
@@ -4361,8 +4361,8 @@
         </p:nvSpPr>
         <p:spPr>
           <a:xfrm>
-            <a:off x="10552176" y="3320886"/>
-            <a:ext cx="914400" cy="270017"/>
+            <a:off x="10552176" y="3191794"/>
+            <a:ext cx="914400" cy="248502"/>
           </a:xfrm>
           <a:prstGeom prst="rect">
             <a:avLst/>
@@ -4400,8 +4400,8 @@
         </p:nvSpPr>
         <p:spPr>
           <a:xfrm>
-            <a:off x="6208776" y="3590903"/>
-            <a:ext cx="310896" cy="270017"/>
+            <a:off x="6208776" y="3440296"/>
+            <a:ext cx="310896" cy="248502"/>
           </a:xfrm>
           <a:prstGeom prst="rect">
             <a:avLst/>
@@ -4439,8 +4439,8 @@
         </p:nvSpPr>
         <p:spPr>
           <a:xfrm>
-            <a:off x="6565392" y="3590903"/>
-            <a:ext cx="2011680" cy="270017"/>
+            <a:off x="6565392" y="3440296"/>
+            <a:ext cx="2011680" cy="248502"/>
           </a:xfrm>
           <a:prstGeom prst="rect">
             <a:avLst/>
@@ -4478,8 +4478,8 @@
         </p:nvSpPr>
         <p:spPr>
           <a:xfrm>
-            <a:off x="8650224" y="3651656"/>
-            <a:ext cx="157028" cy="148509"/>
+            <a:off x="8650224" y="3496208"/>
+            <a:ext cx="157028" cy="136676"/>
           </a:xfrm>
           <a:prstGeom prst="rect">
             <a:avLst/>
@@ -4498,8 +4498,8 @@
         </p:nvSpPr>
         <p:spPr>
           <a:xfrm>
-            <a:off x="10552176" y="3590903"/>
-            <a:ext cx="914400" cy="270017"/>
+            <a:off x="10552176" y="3440296"/>
+            <a:ext cx="914400" cy="248502"/>
           </a:xfrm>
           <a:prstGeom prst="rect">
             <a:avLst/>
@@ -4537,8 +4537,8 @@
         </p:nvSpPr>
         <p:spPr>
           <a:xfrm>
-            <a:off x="6208776" y="3860920"/>
-            <a:ext cx="310896" cy="270017"/>
+            <a:off x="6208776" y="3688797"/>
+            <a:ext cx="310896" cy="248502"/>
           </a:xfrm>
           <a:prstGeom prst="rect">
             <a:avLst/>
@@ -4576,8 +4576,8 @@
         </p:nvSpPr>
         <p:spPr>
           <a:xfrm>
-            <a:off x="6565392" y="3860920"/>
-            <a:ext cx="2011680" cy="270017"/>
+            <a:off x="6565392" y="3688797"/>
+            <a:ext cx="2011680" cy="248502"/>
           </a:xfrm>
           <a:prstGeom prst="rect">
             <a:avLst/>
@@ -4615,8 +4615,8 @@
         </p:nvSpPr>
         <p:spPr>
           <a:xfrm>
-            <a:off x="8650224" y="3921673"/>
-            <a:ext cx="141322" cy="148509"/>
+            <a:off x="8650224" y="3744710"/>
+            <a:ext cx="141322" cy="136676"/>
           </a:xfrm>
           <a:prstGeom prst="rect">
             <a:avLst/>
@@ -4635,8 +4635,8 @@
         </p:nvSpPr>
         <p:spPr>
           <a:xfrm>
-            <a:off x="10552176" y="3860920"/>
-            <a:ext cx="914400" cy="270017"/>
+            <a:off x="10552176" y="3688797"/>
+            <a:ext cx="914400" cy="248502"/>
           </a:xfrm>
           <a:prstGeom prst="rect">
             <a:avLst/>
@@ -4674,8 +4674,8 @@
         </p:nvSpPr>
         <p:spPr>
           <a:xfrm>
-            <a:off x="6208776" y="4130936"/>
-            <a:ext cx="310896" cy="270017"/>
+            <a:off x="6208776" y="3937299"/>
+            <a:ext cx="310896" cy="248502"/>
           </a:xfrm>
           <a:prstGeom prst="rect">
             <a:avLst/>
@@ -4713,8 +4713,8 @@
         </p:nvSpPr>
         <p:spPr>
           <a:xfrm>
-            <a:off x="6565392" y="4130936"/>
-            <a:ext cx="2011680" cy="270017"/>
+            <a:off x="6565392" y="3937299"/>
+            <a:ext cx="2011680" cy="248502"/>
           </a:xfrm>
           <a:prstGeom prst="rect">
             <a:avLst/>
@@ -4752,8 +4752,8 @@
         </p:nvSpPr>
         <p:spPr>
           <a:xfrm>
-            <a:off x="8650224" y="4191690"/>
-            <a:ext cx="140504" cy="148509"/>
+            <a:off x="8650224" y="3993212"/>
+            <a:ext cx="140504" cy="136676"/>
           </a:xfrm>
           <a:prstGeom prst="rect">
             <a:avLst/>
@@ -4772,8 +4772,8 @@
         </p:nvSpPr>
         <p:spPr>
           <a:xfrm>
-            <a:off x="10552176" y="4130936"/>
-            <a:ext cx="914400" cy="270017"/>
+            <a:off x="10552176" y="3937299"/>
+            <a:ext cx="914400" cy="248502"/>
           </a:xfrm>
           <a:prstGeom prst="rect">
             <a:avLst/>
@@ -4811,8 +4811,8 @@
         </p:nvSpPr>
         <p:spPr>
           <a:xfrm>
-            <a:off x="6208776" y="4400953"/>
-            <a:ext cx="310896" cy="270017"/>
+            <a:off x="6208776" y="4185800"/>
+            <a:ext cx="310896" cy="248502"/>
           </a:xfrm>
           <a:prstGeom prst="rect">
             <a:avLst/>
@@ -4850,8 +4850,8 @@
         </p:nvSpPr>
         <p:spPr>
           <a:xfrm>
-            <a:off x="6565392" y="4400953"/>
-            <a:ext cx="2011680" cy="270017"/>
+            <a:off x="6565392" y="4185800"/>
+            <a:ext cx="2011680" cy="248502"/>
           </a:xfrm>
           <a:prstGeom prst="rect">
             <a:avLst/>
@@ -4889,8 +4889,8 @@
         </p:nvSpPr>
         <p:spPr>
           <a:xfrm>
-            <a:off x="8650224" y="4461707"/>
-            <a:ext cx="107585" cy="148509"/>
+            <a:off x="8650224" y="4241713"/>
+            <a:ext cx="107585" cy="136676"/>
           </a:xfrm>
           <a:prstGeom prst="rect">
             <a:avLst/>
@@ -4909,8 +4909,8 @@
         </p:nvSpPr>
         <p:spPr>
           <a:xfrm>
-            <a:off x="10552176" y="4400953"/>
-            <a:ext cx="914400" cy="270017"/>
+            <a:off x="10552176" y="4185800"/>
+            <a:ext cx="914400" cy="248502"/>
           </a:xfrm>
           <a:prstGeom prst="rect">
             <a:avLst/>
@@ -4948,8 +4948,8 @@
         </p:nvSpPr>
         <p:spPr>
           <a:xfrm>
-            <a:off x="6208776" y="4670970"/>
-            <a:ext cx="310896" cy="270017"/>
+            <a:off x="6208776" y="4434302"/>
+            <a:ext cx="310896" cy="248502"/>
           </a:xfrm>
           <a:prstGeom prst="rect">
             <a:avLst/>
@@ -4987,8 +4987,8 @@
         </p:nvSpPr>
         <p:spPr>
           <a:xfrm>
-            <a:off x="6565392" y="4670970"/>
-            <a:ext cx="2011680" cy="270017"/>
+            <a:off x="6565392" y="4434302"/>
+            <a:ext cx="2011680" cy="248502"/>
           </a:xfrm>
           <a:prstGeom prst="rect">
             <a:avLst/>
@@ -5026,8 +5026,8 @@
         </p:nvSpPr>
         <p:spPr>
           <a:xfrm>
-            <a:off x="8650224" y="4731724"/>
-            <a:ext cx="103964" cy="148509"/>
+            <a:off x="8650224" y="4490215"/>
+            <a:ext cx="103964" cy="136676"/>
           </a:xfrm>
           <a:prstGeom prst="rect">
             <a:avLst/>
@@ -5046,8 +5046,8 @@
         </p:nvSpPr>
         <p:spPr>
           <a:xfrm>
-            <a:off x="10552176" y="4670970"/>
-            <a:ext cx="914400" cy="270017"/>
+            <a:off x="10552176" y="4434302"/>
+            <a:ext cx="914400" cy="248502"/>
           </a:xfrm>
           <a:prstGeom prst="rect">
             <a:avLst/>
@@ -5085,8 +5085,8 @@
         </p:nvSpPr>
         <p:spPr>
           <a:xfrm>
-            <a:off x="6208776" y="4940987"/>
-            <a:ext cx="310896" cy="270017"/>
+            <a:off x="6208776" y="4682804"/>
+            <a:ext cx="310896" cy="248502"/>
           </a:xfrm>
           <a:prstGeom prst="rect">
             <a:avLst/>
@@ -5124,8 +5124,8 @@
         </p:nvSpPr>
         <p:spPr>
           <a:xfrm>
-            <a:off x="6565392" y="4940987"/>
-            <a:ext cx="2011680" cy="270017"/>
+            <a:off x="6565392" y="4682804"/>
+            <a:ext cx="2011680" cy="248502"/>
           </a:xfrm>
           <a:prstGeom prst="rect">
             <a:avLst/>
@@ -5163,8 +5163,8 @@
         </p:nvSpPr>
         <p:spPr>
           <a:xfrm>
-            <a:off x="8650224" y="5001741"/>
-            <a:ext cx="96486" cy="148509"/>
+            <a:off x="8650224" y="4738717"/>
+            <a:ext cx="96486" cy="136676"/>
           </a:xfrm>
           <a:prstGeom prst="rect">
             <a:avLst/>
@@ -5183,8 +5183,8 @@
         </p:nvSpPr>
         <p:spPr>
           <a:xfrm>
-            <a:off x="10552176" y="4940987"/>
-            <a:ext cx="914400" cy="270017"/>
+            <a:off x="10552176" y="4682804"/>
+            <a:ext cx="914400" cy="248502"/>
           </a:xfrm>
           <a:prstGeom prst="rect">
             <a:avLst/>
@@ -5222,8 +5222,8 @@
         </p:nvSpPr>
         <p:spPr>
           <a:xfrm>
-            <a:off x="6208776" y="5211004"/>
-            <a:ext cx="310896" cy="270017"/>
+            <a:off x="6208776" y="4931305"/>
+            <a:ext cx="310896" cy="248502"/>
           </a:xfrm>
           <a:prstGeom prst="rect">
             <a:avLst/>
@@ -5261,8 +5261,8 @@
         </p:nvSpPr>
         <p:spPr>
           <a:xfrm>
-            <a:off x="6565392" y="5211004"/>
-            <a:ext cx="2011680" cy="270017"/>
+            <a:off x="6565392" y="4931305"/>
+            <a:ext cx="2011680" cy="248502"/>
           </a:xfrm>
           <a:prstGeom prst="rect">
             <a:avLst/>
@@ -5300,8 +5300,8 @@
         </p:nvSpPr>
         <p:spPr>
           <a:xfrm>
-            <a:off x="8650224" y="5271758"/>
-            <a:ext cx="90829" cy="148509"/>
+            <a:off x="8650224" y="4987218"/>
+            <a:ext cx="90829" cy="136676"/>
           </a:xfrm>
           <a:prstGeom prst="rect">
             <a:avLst/>
@@ -5320,8 +5320,8 @@
         </p:nvSpPr>
         <p:spPr>
           <a:xfrm>
-            <a:off x="10552176" y="5211004"/>
-            <a:ext cx="914400" cy="270017"/>
+            <a:off x="10552176" y="4931305"/>
+            <a:ext cx="914400" cy="248502"/>
           </a:xfrm>
           <a:prstGeom prst="rect">
             <a:avLst/>
@@ -5359,8 +5359,8 @@
         </p:nvSpPr>
         <p:spPr>
           <a:xfrm>
-            <a:off x="6208776" y="5481021"/>
-            <a:ext cx="310896" cy="270017"/>
+            <a:off x="6208776" y="5179807"/>
+            <a:ext cx="310896" cy="248502"/>
           </a:xfrm>
           <a:prstGeom prst="rect">
             <a:avLst/>
@@ -5398,8 +5398,8 @@
         </p:nvSpPr>
         <p:spPr>
           <a:xfrm>
-            <a:off x="6565392" y="5481021"/>
-            <a:ext cx="2011680" cy="270017"/>
+            <a:off x="6565392" y="5179807"/>
+            <a:ext cx="2011680" cy="248502"/>
           </a:xfrm>
           <a:prstGeom prst="rect">
             <a:avLst/>
@@ -5437,8 +5437,8 @@
         </p:nvSpPr>
         <p:spPr>
           <a:xfrm>
-            <a:off x="8650224" y="5541775"/>
-            <a:ext cx="69414" cy="148509"/>
+            <a:off x="8650224" y="5235720"/>
+            <a:ext cx="69414" cy="136676"/>
           </a:xfrm>
           <a:prstGeom prst="rect">
             <a:avLst/>
@@ -5457,8 +5457,8 @@
         </p:nvSpPr>
         <p:spPr>
           <a:xfrm>
-            <a:off x="10552176" y="5481021"/>
-            <a:ext cx="914400" cy="270017"/>
+            <a:off x="10552176" y="5179807"/>
+            <a:ext cx="914400" cy="248502"/>
           </a:xfrm>
           <a:prstGeom prst="rect">
             <a:avLst/>
@@ -5496,8 +5496,8 @@
         </p:nvSpPr>
         <p:spPr>
           <a:xfrm>
-            <a:off x="6208776" y="5751038"/>
-            <a:ext cx="310896" cy="270017"/>
+            <a:off x="6208776" y="5428309"/>
+            <a:ext cx="310896" cy="248502"/>
           </a:xfrm>
           <a:prstGeom prst="rect">
             <a:avLst/>
@@ -5535,8 +5535,8 @@
         </p:nvSpPr>
         <p:spPr>
           <a:xfrm>
-            <a:off x="6565392" y="5751038"/>
-            <a:ext cx="2011680" cy="270017"/>
+            <a:off x="6565392" y="5428309"/>
+            <a:ext cx="2011680" cy="248502"/>
           </a:xfrm>
           <a:prstGeom prst="rect">
             <a:avLst/>
@@ -5574,8 +5574,8 @@
         </p:nvSpPr>
         <p:spPr>
           <a:xfrm>
-            <a:off x="8650224" y="5811792"/>
-            <a:ext cx="61641" cy="148509"/>
+            <a:off x="8650224" y="5484222"/>
+            <a:ext cx="61641" cy="136676"/>
           </a:xfrm>
           <a:prstGeom prst="rect">
             <a:avLst/>
@@ -5594,8 +5594,8 @@
         </p:nvSpPr>
         <p:spPr>
           <a:xfrm>
-            <a:off x="10552176" y="5751038"/>
-            <a:ext cx="914400" cy="270017"/>
+            <a:off x="10552176" y="5428309"/>
+            <a:ext cx="914400" cy="248502"/>
           </a:xfrm>
           <a:prstGeom prst="rect">
             <a:avLst/>
@@ -5634,7 +5634,7 @@
         <p:spPr>
           <a:xfrm>
             <a:off x="6085332" y="1700784"/>
-            <a:ext cx="10973" cy="4590288"/>
+            <a:ext cx="10973" cy="4224528"/>
           </a:xfrm>
           <a:prstGeom prst="rect">
             <a:avLst/>
@@ -5644,6 +5644,65 @@
           </a:solidFill>
           <a:ln/>
         </p:spPr>
+      </p:sp>
+      <p:sp>
+        <p:nvSpPr>
+          <p:cNvPr id="142" name="Shape 139"/>
+          <p:cNvSpPr/>
+          <p:nvPr/>
+        </p:nvSpPr>
+        <p:spPr>
+          <a:xfrm>
+            <a:off x="457200" y="6126480"/>
+            <a:ext cx="11274552" cy="371856"/>
+          </a:xfrm>
+          <a:prstGeom prst="rect">
+            <a:avLst/>
+          </a:prstGeom>
+          <a:solidFill>
+            <a:srgbClr val="E6F6EE"/>
+          </a:solidFill>
+          <a:ln/>
+        </p:spPr>
+      </p:sp>
+      <p:sp>
+        <p:nvSpPr>
+          <p:cNvPr id="143" name="Text 140"/>
+          <p:cNvSpPr txBox="1"/>
+          <p:nvPr/>
+        </p:nvSpPr>
+        <p:spPr>
+          <a:xfrm>
+            <a:off x="658368" y="6144768"/>
+            <a:ext cx="10927080" cy="335280"/>
+          </a:xfrm>
+          <a:prstGeom prst="rect">
+            <a:avLst/>
+          </a:prstGeom>
+          <a:noFill/>
+          <a:ln/>
+        </p:spPr>
+        <p:txBody>
+          <a:bodyPr wrap="square" lIns="0" tIns="0" rIns="0" bIns="0" rtlCol="0" anchor="ctr"/>
+          <a:lstStyle/>
+          <a:p>
+            <a:pPr indent="0" marL="0">
+              <a:buNone/>
+            </a:pPr>
+            <a:r>
+              <a:rPr lang="en-US" sz="1600" b="1" dirty="0">
+                <a:solidFill>
+                  <a:srgbClr val="0B7A4A"/>
+                </a:solidFill>
+                <a:latin typeface="Inter" pitchFamily="34" charset="0"/>
+                <a:ea typeface="Inter" pitchFamily="34" charset="-122"/>
+                <a:cs typeface="Inter" pitchFamily="34" charset="-120"/>
+              </a:rPr>
+              <a:t>0.1 hour more on every CP RO is worth $6,602,564 a year in added gross.</a:t>
+            </a:r>
+            <a:endParaRPr lang="en-US" sz="1600" dirty="0"/>
+          </a:p>
+        </p:txBody>
       </p:sp>
     </p:spTree>
   </p:cSld>

--- a/day2-deck/decks/Hours per RO Value - Review.pptx
+++ b/day2-deck/decks/Hours per RO Value - Review.pptx
@@ -502,7 +502,7 @@
           <a:p>
             <a:r>
               <a:rPr lang="en-US" dirty="0"/>
-              <a:t>Takeaway with the store call-outs (off the slide): 0.1 hour more on every CP RO is worth $6,602,564 a year in added gross. Toyota Henderson leads at $1,164,334.Source: Qlik - Closed Repair Orders. Customer pay, all CP ROs, Jan-Sep 2026 by close date. Same-store, INEOS excluded (opened 2026). GMC Prescott body shop labor types excluded. Each store: 0.1 x its CP RO count x its own customer-pay labor gross and parts gross per sold hour; a year = Jan-Sep x 12 / 9. Gross, not sale, so it will not match the $4,543,691 labor sale on the Hours per RO slide. Gross/yr = labor gross + parts gross a year. Parts assumes the extra hours carry the store's average customer-pay parts gross per sold hour.Talk track: 0.1 hour is six minutes of sold time on a visit - one more inspection item sold, one tire rotation, one cabin filter. Parts gross assumes the extra hours carry the store's usual parts.
+              <a:t>Takeaway with the store call-outs (off the slide): 0.1 hour more on every CP RO is worth $6,602,564 a year in added gross. Toyota Henderson leads at $1,164,334.Source: Qlik - Closed Repair Orders. Customer pay, all CP ROs, Jan-Sep 2026 by close date. Same-store, INEOS excluded (opened 2026). GMC Prescott body shop labor types excluded. Each store: 0.1 x its CP RO count x its own customer-pay labor gross and parts gross per sold hour; a year = Jan-Sep x 12 / 9. Gross/yr = labor gross + parts gross a year. Parts assumes the extra hours carry the store's average customer-pay parts gross per sold hour.Talk track: 0.1 hour is six minutes of sold time on a visit - one more inspection item sold, one tire rotation, one cabin filter. Parts gross assumes the extra hours carry the store's usual parts.
 TOYOTA HENDERSON: 53,084 CP ROs, 1.47 hrs/RO; +0.1 = $97,028 gross a month, $1,164,334 a year (labor $868,256, parts $296,078)
 HONDA HENDERSON: 22,527 CP ROs, 1.97 hrs/RO; +0.1 = $42,821 gross a month, $513,852 a year (labor $396,326, parts $117,527)
 CHEVY LV: 19,520 CP ROs, 2.30 hrs/RO; +0.1 = $34,189 gross a month, $410,273 a year (labor $295,521, parts $114,751)
